--- a/output/submission/Dunlo_KEIC_2026_Editable.pptx
+++ b/output/submission/Dunlo_KEIC_2026_Editable.pptx
@@ -620,7 +620,7 @@
           <a:p>
             <a:r>
               <a:rPr lang="en-US"/>
-              <a:t>Open with the question: You watched it. Can you use it? Let the audience recognise the gap between an interesting explanation and using an idea. Introduce Dunlo as the connection between discovery, Khan Academy practice and a useful return.</a:t>
+              <a:t>Problem: understanding an explanation does not always make the next independent question straightforward. Dunlo connects a short-form starting point with practice and a useful return.</a:t>
             </a:r>
             <a:endParaRPr lang="en-US" smtClean="0"/>
           </a:p>
@@ -1259,7 +1259,7 @@
           <a:p>
             <a:r>
               <a:rPr lang="en-US"/>
-              <a:t>Expand through reviewed content sequences. Additional subjects, Filipino explanations and access options are future work. Original offline mini-packs require separate implementation.</a:t>
+              <a:t>November 2026: review content and launch publicly. December 2026 through February 2027: gather voluntary feedback, review where learners stop and refine the flow. March 2027: evaluate use and plan continuation. Future content sequences will include an interactive or clip, matching Khan activity, support and fresh questions. Expansion priorities are more subjects, reviewed Filipino content and original offline mini-packs.</a:t>
             </a:r>
             <a:endParaRPr lang="en-US" smtClean="0"/>
           </a:p>
@@ -1685,7 +1685,7 @@
           <a:p>
             <a:r>
               <a:rPr lang="en-US"/>
-              <a:t>November: prepare and launch. December through February: gather voluntary feedback, refine, and evaluate where feasible with suitable permissions. March: report findings and confirm continuation.</a:t>
+              <a:t>Dunlo connects short-form discovery to Khan Academy practice, independent application and later review. Explore the working product at https://dunlo.vercel.app/. Team: Matthew Labrador, Paul Recio and Harry Gomez. Coach: Justin Mesias. University of the Philippines Manila.</a:t>
             </a:r>
             <a:endParaRPr lang="en-US" smtClean="0"/>
           </a:p>
@@ -1898,7 +1898,7 @@
           <a:p>
             <a:r>
               <a:rPr lang="en-US"/>
-              <a:t>Close on the connected experience: relevant Khan practice, a fresh question after the explanation and a clear reason to return. Point to the working journey and the implementation plan. Sources: https://enactus.ph/2026-national-competition/khan-academy-challenge ; https://pubmed.ncbi.nlm.nih.gov/23576743/ ; https://support.khanacademy.org/hc/en-us/articles/202262954-Can-I-use-Khan-Academy-s-videos-name-materials-links-in-my-project</a:t>
+              <a:t>Learning research references are linked directly from each visible entry. IES (2007) is also linked on slide 3. Khan Academy’s original lesson is credited on slide 6. These sources inform the learning design; no product-specific trial outcomes are claimed.</a:t>
             </a:r>
             <a:endParaRPr lang="en-US" smtClean="0"/>
           </a:p>
@@ -2111,7 +2111,7 @@
           <a:p>
             <a:r>
               <a:rPr lang="en-US"/>
-              <a:t>Explain the proposed learning difficulty: choosing a starting point and continuing after an interesting explanation. Source: https://enactus.ph/2026-national-competition/khan-academy-challenge</a:t>
+              <a:t>Dunlo connects short-form interactive discovery to Khan Academy practice. The feed offers a familiar starting point for young learners used to mobile content, while each idea has a clear continuation into practice and review.</a:t>
             </a:r>
             <a:endParaRPr lang="en-US" smtClean="0"/>
           </a:p>
@@ -2324,7 +2324,7 @@
           <a:p>
             <a:r>
               <a:rPr lang="en-US"/>
-              <a:t>Walk through the four steps in order: discover, understand, practise with Khan Academy, and return. Useful support remains available throughout.</a:t>
+              <a:t>The four connected steps are choosing one short idea, making a prediction and seeing an explanation, practising the matching skill on Khan Academy, and answering a fresh question in Dunlo. Learning design source: https://ies.ed.gov/ncee/wwc/practiceguide/1</a:t>
             </a:r>
             <a:endParaRPr lang="en-US" smtClean="0"/>
           </a:p>
@@ -2537,7 +2537,7 @@
           <a:p>
             <a:r>
               <a:rPr lang="en-US"/>
-              <a:t>Show the actual Explore feed. Learners can change a model, save or share an idea and open a relevant Khan activity. https://dunlo.vercel.app/explore</a:t>
+              <a:t>Dunlo offers a scrollable feed of original interactive models and focused, source-labelled Khan Academy video segments. Each item connects to a prediction, explanation, matching Khan exercise and later questions. Working feed: https://dunlo.vercel.app/explore</a:t>
             </a:r>
             <a:endParaRPr lang="en-US" smtClean="0"/>
           </a:p>
@@ -6824,195 +6824,9 @@
           </p:spPr>
         </p:sp>
       </p:grpSp>
-      <p:grpSp>
-        <p:nvGrpSpPr>
-          <p:cNvPr name="Group 8" id="8"/>
-          <p:cNvGrpSpPr/>
-          <p:nvPr/>
-        </p:nvGrpSpPr>
-        <p:grpSpPr>
-          <a:xfrm rot="0">
-            <a:off x="5581650" y="5295900"/>
-            <a:ext cx="266700" cy="266700"/>
-            <a:chOff x="0" y="0"/>
-            <a:chExt cx="105363" cy="105363"/>
-          </a:xfrm>
-        </p:grpSpPr>
-        <p:sp>
-          <p:nvSpPr>
-            <p:cNvPr name="Freeform 9" id="9"/>
-            <p:cNvSpPr/>
-            <p:nvPr/>
-          </p:nvSpPr>
-          <p:spPr>
-            <a:xfrm flipH="false" flipV="false" rot="0">
-              <a:off x="0" y="0"/>
-              <a:ext cx="105363" cy="105363"/>
-            </a:xfrm>
-            <a:custGeom>
-              <a:avLst/>
-              <a:gdLst/>
-              <a:ahLst/>
-              <a:cxnLst/>
-              <a:rect r="r" b="b" t="t" l="l"/>
-              <a:pathLst>
-                <a:path h="105363" w="105363">
-                  <a:moveTo>
-                    <a:pt x="52681" y="0"/>
-                  </a:moveTo>
-                  <a:cubicBezTo>
-                    <a:pt x="23586" y="0"/>
-                    <a:pt x="0" y="23586"/>
-                    <a:pt x="0" y="52681"/>
-                  </a:cubicBezTo>
-                  <a:cubicBezTo>
-                    <a:pt x="0" y="81777"/>
-                    <a:pt x="23586" y="105363"/>
-                    <a:pt x="52681" y="105363"/>
-                  </a:cubicBezTo>
-                  <a:cubicBezTo>
-                    <a:pt x="81777" y="105363"/>
-                    <a:pt x="105363" y="81777"/>
-                    <a:pt x="105363" y="52681"/>
-                  </a:cubicBezTo>
-                  <a:cubicBezTo>
-                    <a:pt x="105363" y="23586"/>
-                    <a:pt x="81777" y="0"/>
-                    <a:pt x="52681" y="0"/>
-                  </a:cubicBezTo>
-                  <a:close/>
-                </a:path>
-              </a:pathLst>
-            </a:custGeom>
-            <a:solidFill>
-              <a:srgbClr val="C96331"/>
-            </a:solidFill>
-          </p:spPr>
-        </p:sp>
-        <p:sp>
-          <p:nvSpPr>
-            <p:cNvPr name="TextBox 10" id="10"/>
-            <p:cNvSpPr txBox="true"/>
-            <p:nvPr/>
-          </p:nvSpPr>
-          <p:spPr>
-            <a:xfrm>
-              <a:off x="9878" y="9878"/>
-              <a:ext cx="85607" cy="85607"/>
-            </a:xfrm>
-            <a:prstGeom prst="rect">
-              <a:avLst/>
-            </a:prstGeom>
-          </p:spPr>
-          <p:txBody>
-            <a:bodyPr anchor="ctr" rtlCol="false" tIns="50800" lIns="50800" bIns="50800" rIns="50800"/>
-            <a:lstStyle/>
-            <a:p>
-              <a:pPr algn="ctr">
-                <a:lnSpc>
-                  <a:spcPts val="1372"/>
-                </a:lnSpc>
-              </a:pPr>
-            </a:p>
-          </p:txBody>
-        </p:sp>
-      </p:grpSp>
-      <p:grpSp>
-        <p:nvGrpSpPr>
-          <p:cNvPr name="Group 11" id="11"/>
-          <p:cNvGrpSpPr/>
-          <p:nvPr/>
-        </p:nvGrpSpPr>
-        <p:grpSpPr>
-          <a:xfrm rot="0">
-            <a:off x="1581150" y="4438650"/>
-            <a:ext cx="266700" cy="266700"/>
-            <a:chOff x="0" y="0"/>
-            <a:chExt cx="105363" cy="105363"/>
-          </a:xfrm>
-        </p:grpSpPr>
-        <p:sp>
-          <p:nvSpPr>
-            <p:cNvPr name="Freeform 12" id="12"/>
-            <p:cNvSpPr/>
-            <p:nvPr/>
-          </p:nvSpPr>
-          <p:spPr>
-            <a:xfrm flipH="false" flipV="false" rot="0">
-              <a:off x="0" y="0"/>
-              <a:ext cx="105363" cy="105363"/>
-            </a:xfrm>
-            <a:custGeom>
-              <a:avLst/>
-              <a:gdLst/>
-              <a:ahLst/>
-              <a:cxnLst/>
-              <a:rect r="r" b="b" t="t" l="l"/>
-              <a:pathLst>
-                <a:path h="105363" w="105363">
-                  <a:moveTo>
-                    <a:pt x="52681" y="0"/>
-                  </a:moveTo>
-                  <a:cubicBezTo>
-                    <a:pt x="23586" y="0"/>
-                    <a:pt x="0" y="23586"/>
-                    <a:pt x="0" y="52681"/>
-                  </a:cubicBezTo>
-                  <a:cubicBezTo>
-                    <a:pt x="0" y="81777"/>
-                    <a:pt x="23586" y="105363"/>
-                    <a:pt x="52681" y="105363"/>
-                  </a:cubicBezTo>
-                  <a:cubicBezTo>
-                    <a:pt x="81777" y="105363"/>
-                    <a:pt x="105363" y="81777"/>
-                    <a:pt x="105363" y="52681"/>
-                  </a:cubicBezTo>
-                  <a:cubicBezTo>
-                    <a:pt x="105363" y="23586"/>
-                    <a:pt x="81777" y="0"/>
-                    <a:pt x="52681" y="0"/>
-                  </a:cubicBezTo>
-                  <a:close/>
-                </a:path>
-              </a:pathLst>
-            </a:custGeom>
-            <a:solidFill>
-              <a:srgbClr val="C96331"/>
-            </a:solidFill>
-          </p:spPr>
-        </p:sp>
-        <p:sp>
-          <p:nvSpPr>
-            <p:cNvPr name="TextBox 13" id="13"/>
-            <p:cNvSpPr txBox="true"/>
-            <p:nvPr/>
-          </p:nvSpPr>
-          <p:spPr>
-            <a:xfrm>
-              <a:off x="9878" y="9878"/>
-              <a:ext cx="85607" cy="85607"/>
-            </a:xfrm>
-            <a:prstGeom prst="rect">
-              <a:avLst/>
-            </a:prstGeom>
-          </p:spPr>
-          <p:txBody>
-            <a:bodyPr anchor="ctr" rtlCol="false" tIns="50800" lIns="50800" bIns="50800" rIns="50800"/>
-            <a:lstStyle/>
-            <a:p>
-              <a:pPr algn="ctr">
-                <a:lnSpc>
-                  <a:spcPts val="1372"/>
-                </a:lnSpc>
-              </a:pPr>
-            </a:p>
-          </p:txBody>
-        </p:sp>
-      </p:grpSp>
-      <p:sp>
-        <p:nvSpPr>
-          <p:cNvPr name="TextBox 14" id="14"/>
+      <p:sp>
+        <p:nvSpPr>
+          <p:cNvPr name="TextBox 8" id="8"/>
           <p:cNvSpPr txBox="true"/>
           <p:nvPr/>
         </p:nvSpPr>
@@ -7056,14 +6870,14 @@
       </p:sp>
       <p:sp>
         <p:nvSpPr>
-          <p:cNvPr name="TextBox 15" id="15"/>
+          <p:cNvPr name="TextBox 9" id="9"/>
           <p:cNvSpPr txBox="true"/>
           <p:nvPr/>
         </p:nvSpPr>
         <p:spPr>
           <a:xfrm rot="0">
-            <a:off x="609600" y="1066800"/>
-            <a:ext cx="10972800" cy="571500"/>
+            <a:off x="762000" y="2352675"/>
+            <a:ext cx="10668000" cy="618363"/>
           </a:xfrm>
           <a:prstGeom prst="rect">
             <a:avLst/>
@@ -7077,14 +6891,14 @@
           <a:p>
             <a:pPr algn="l" marL="0" indent="0" lvl="0">
               <a:lnSpc>
-                <a:spcPts val="4575"/>
+                <a:spcPts val="4941"/>
               </a:lnSpc>
               <a:spcBef>
                 <a:spcPct val="0"/>
               </a:spcBef>
             </a:pPr>
             <a:r>
-              <a:rPr lang="en-US" b="true" sz="3750" strike="noStrike" u="none">
+              <a:rPr lang="en-US" b="true" sz="4050" strike="noStrike" u="none">
                 <a:solidFill>
                   <a:srgbClr val="0A2A66"/>
                 </a:solidFill>
@@ -7093,21 +6907,21 @@
                 <a:cs typeface="DM Sans Bold"/>
                 <a:sym typeface="DM Sans Bold"/>
               </a:rPr>
-              <a:t>You watched it.</a:t>
-            </a:r>
-          </a:p>
-        </p:txBody>
-      </p:sp>
-      <p:sp>
-        <p:nvSpPr>
-          <p:cNvPr name="TextBox 16" id="16"/>
+              <a:t>The lesson makes sense.</a:t>
+            </a:r>
+          </a:p>
+        </p:txBody>
+      </p:sp>
+      <p:sp>
+        <p:nvSpPr>
+          <p:cNvPr name="TextBox 10" id="10"/>
           <p:cNvSpPr txBox="true"/>
           <p:nvPr/>
         </p:nvSpPr>
         <p:spPr>
           <a:xfrm rot="0">
-            <a:off x="609600" y="1752600"/>
-            <a:ext cx="10972800" cy="571500"/>
+            <a:off x="762000" y="3086100"/>
+            <a:ext cx="10668000" cy="618363"/>
           </a:xfrm>
           <a:prstGeom prst="rect">
             <a:avLst/>
@@ -7121,14 +6935,14 @@
           <a:p>
             <a:pPr algn="l" marL="0" indent="0" lvl="0">
               <a:lnSpc>
-                <a:spcPts val="4575"/>
+                <a:spcPts val="4941"/>
               </a:lnSpc>
               <a:spcBef>
                 <a:spcPct val="0"/>
               </a:spcBef>
             </a:pPr>
             <a:r>
-              <a:rPr lang="en-US" b="true" sz="3750" strike="noStrike" u="none">
+              <a:rPr lang="en-US" b="true" sz="4050" strike="noStrike" u="none">
                 <a:solidFill>
                   <a:srgbClr val="0A2A66"/>
                 </a:solidFill>
@@ -7137,300 +6951,14 @@
                 <a:cs typeface="DM Sans Bold"/>
                 <a:sym typeface="DM Sans Bold"/>
               </a:rPr>
-              <a:t>Can you use it?</a:t>
-            </a:r>
-          </a:p>
-        </p:txBody>
-      </p:sp>
-      <p:sp>
-        <p:nvSpPr>
-          <p:cNvPr name="TextBox 17" id="17"/>
-          <p:cNvSpPr txBox="true"/>
-          <p:nvPr/>
-        </p:nvSpPr>
-        <p:spPr>
-          <a:xfrm rot="0">
-            <a:off x="609600" y="2676525"/>
-            <a:ext cx="10972800" cy="280797"/>
-          </a:xfrm>
-          <a:prstGeom prst="rect">
-            <a:avLst/>
-          </a:prstGeom>
-        </p:spPr>
-        <p:txBody>
-          <a:bodyPr anchor="t" rtlCol="false" tIns="0" lIns="0" bIns="0" rIns="0">
-            <a:spAutoFit/>
-          </a:bodyPr>
-          <a:lstStyle/>
-          <a:p>
-            <a:pPr algn="l" marL="0" indent="0" lvl="0">
-              <a:lnSpc>
-                <a:spcPts val="2379"/>
-              </a:lnSpc>
-              <a:spcBef>
-                <a:spcPct val="0"/>
-              </a:spcBef>
-            </a:pPr>
-            <a:r>
-              <a:rPr lang="en-US" sz="1950" strike="noStrike" u="none">
-                <a:solidFill>
-                  <a:srgbClr val="0A2A66"/>
-                </a:solidFill>
-                <a:latin typeface="DM Sans"/>
-                <a:ea typeface="DM Sans"/>
-                <a:cs typeface="DM Sans"/>
-                <a:sym typeface="DM Sans"/>
-              </a:rPr>
-              <a:t>Dunlo connects discovery to practice with Khan Academy.</a:t>
-            </a:r>
-          </a:p>
-        </p:txBody>
-      </p:sp>
-      <p:sp>
-        <p:nvSpPr>
-          <p:cNvPr name="TextBox 18" id="18"/>
-          <p:cNvSpPr txBox="true"/>
-          <p:nvPr/>
-        </p:nvSpPr>
-        <p:spPr>
-          <a:xfrm rot="0">
-            <a:off x="609600" y="6457950"/>
-            <a:ext cx="9525000" cy="196596"/>
-          </a:xfrm>
-          <a:prstGeom prst="rect">
-            <a:avLst/>
-          </a:prstGeom>
-        </p:spPr>
-        <p:txBody>
-          <a:bodyPr anchor="t" rtlCol="false" tIns="0" lIns="0" bIns="0" rIns="0">
-            <a:spAutoFit/>
-          </a:bodyPr>
-          <a:lstStyle/>
-          <a:p>
-            <a:pPr algn="l" marL="0" indent="0" lvl="0">
-              <a:lnSpc>
-                <a:spcPts val="1647"/>
-              </a:lnSpc>
-              <a:spcBef>
-                <a:spcPct val="0"/>
-              </a:spcBef>
-            </a:pPr>
-            <a:r>
-              <a:rPr lang="en-US" sz="1350" strike="noStrike" u="none">
-                <a:solidFill>
-                  <a:srgbClr val="0A2A66"/>
-                </a:solidFill>
-                <a:latin typeface="DM Sans"/>
-                <a:ea typeface="DM Sans"/>
-                <a:cs typeface="DM Sans"/>
-                <a:sym typeface="DM Sans"/>
-              </a:rPr>
-              <a:t>University of the Philippines Manila</a:t>
-            </a:r>
-          </a:p>
-        </p:txBody>
-      </p:sp>
-      <p:sp>
-        <p:nvSpPr>
-          <p:cNvPr name="TextBox 19" id="19"/>
-          <p:cNvSpPr txBox="true"/>
-          <p:nvPr/>
-        </p:nvSpPr>
-        <p:spPr>
-          <a:xfrm rot="0">
-            <a:off x="285750" y="3810000"/>
-            <a:ext cx="2857500" cy="576072"/>
-          </a:xfrm>
-          <a:prstGeom prst="rect">
-            <a:avLst/>
-          </a:prstGeom>
-        </p:spPr>
-        <p:txBody>
-          <a:bodyPr anchor="t" rtlCol="false" tIns="0" lIns="0" bIns="0" rIns="0">
-            <a:spAutoFit/>
-          </a:bodyPr>
-          <a:lstStyle/>
-          <a:p>
-            <a:pPr algn="ctr" marL="0" indent="0" lvl="0">
-              <a:lnSpc>
-                <a:spcPts val="2379"/>
-              </a:lnSpc>
-              <a:spcBef>
-                <a:spcPct val="0"/>
-              </a:spcBef>
-            </a:pPr>
-            <a:r>
-              <a:rPr lang="en-US" sz="1950" strike="noStrike" u="none">
-                <a:solidFill>
-                  <a:srgbClr val="0A2A66"/>
-                </a:solidFill>
-                <a:latin typeface="DM Sans"/>
-                <a:ea typeface="DM Sans"/>
-                <a:cs typeface="DM Sans"/>
-                <a:sym typeface="DM Sans"/>
-              </a:rPr>
-              <a:t>Explore</a:t>
-            </a:r>
-          </a:p>
-          <a:p>
-            <a:pPr algn="ctr" marL="0" indent="0" lvl="0">
-              <a:lnSpc>
-                <a:spcPts val="2379"/>
-              </a:lnSpc>
-              <a:spcBef>
-                <a:spcPct val="0"/>
-              </a:spcBef>
-            </a:pPr>
-            <a:r>
-              <a:rPr lang="en-US" sz="1950" strike="noStrike" u="none">
-                <a:solidFill>
-                  <a:srgbClr val="0A2A66"/>
-                </a:solidFill>
-                <a:latin typeface="DM Sans"/>
-                <a:ea typeface="DM Sans"/>
-                <a:cs typeface="DM Sans"/>
-                <a:sym typeface="DM Sans"/>
-              </a:rPr>
-              <a:t>an idea</a:t>
-            </a:r>
-          </a:p>
-        </p:txBody>
-      </p:sp>
-      <p:sp>
-        <p:nvSpPr>
-          <p:cNvPr name="TextBox 20" id="20"/>
-          <p:cNvSpPr txBox="true"/>
-          <p:nvPr/>
-        </p:nvSpPr>
-        <p:spPr>
-          <a:xfrm rot="0">
-            <a:off x="3619500" y="5629275"/>
-            <a:ext cx="4191000" cy="576072"/>
-          </a:xfrm>
-          <a:prstGeom prst="rect">
-            <a:avLst/>
-          </a:prstGeom>
-        </p:spPr>
-        <p:txBody>
-          <a:bodyPr anchor="t" rtlCol="false" tIns="0" lIns="0" bIns="0" rIns="0">
-            <a:spAutoFit/>
-          </a:bodyPr>
-          <a:lstStyle/>
-          <a:p>
-            <a:pPr algn="ctr" marL="0" indent="0" lvl="0">
-              <a:lnSpc>
-                <a:spcPts val="2379"/>
-              </a:lnSpc>
-              <a:spcBef>
-                <a:spcPct val="0"/>
-              </a:spcBef>
-            </a:pPr>
-            <a:r>
-              <a:rPr lang="en-US" sz="1950" strike="noStrike" u="none">
-                <a:solidFill>
-                  <a:srgbClr val="0A2A66"/>
-                </a:solidFill>
-                <a:latin typeface="DM Sans"/>
-                <a:ea typeface="DM Sans"/>
-                <a:cs typeface="DM Sans"/>
-                <a:sym typeface="DM Sans"/>
-              </a:rPr>
-              <a:t>Practise with</a:t>
-            </a:r>
-          </a:p>
-          <a:p>
-            <a:pPr algn="ctr" marL="0" indent="0" lvl="0">
-              <a:lnSpc>
-                <a:spcPts val="2379"/>
-              </a:lnSpc>
-              <a:spcBef>
-                <a:spcPct val="0"/>
-              </a:spcBef>
-            </a:pPr>
-            <a:r>
-              <a:rPr lang="en-US" sz="1950" strike="noStrike" u="none">
-                <a:solidFill>
-                  <a:srgbClr val="0A2A66"/>
-                </a:solidFill>
-                <a:latin typeface="DM Sans"/>
-                <a:ea typeface="DM Sans"/>
-                <a:cs typeface="DM Sans"/>
-                <a:sym typeface="DM Sans"/>
-              </a:rPr>
-              <a:t>Khan Academy</a:t>
-            </a:r>
-          </a:p>
-        </p:txBody>
-      </p:sp>
-      <p:sp>
-        <p:nvSpPr>
-          <p:cNvPr name="TextBox 21" id="21"/>
-          <p:cNvSpPr txBox="true"/>
-          <p:nvPr/>
-        </p:nvSpPr>
-        <p:spPr>
-          <a:xfrm rot="0">
-            <a:off x="8286750" y="4648200"/>
-            <a:ext cx="3238500" cy="576072"/>
-          </a:xfrm>
-          <a:prstGeom prst="rect">
-            <a:avLst/>
-          </a:prstGeom>
-        </p:spPr>
-        <p:txBody>
-          <a:bodyPr anchor="t" rtlCol="false" tIns="0" lIns="0" bIns="0" rIns="0">
-            <a:spAutoFit/>
-          </a:bodyPr>
-          <a:lstStyle/>
-          <a:p>
-            <a:pPr algn="ctr" marL="0" indent="0" lvl="0">
-              <a:lnSpc>
-                <a:spcPts val="2379"/>
-              </a:lnSpc>
-              <a:spcBef>
-                <a:spcPct val="0"/>
-              </a:spcBef>
-            </a:pPr>
-            <a:r>
-              <a:rPr lang="en-US" sz="1950" strike="noStrike" u="none">
-                <a:solidFill>
-                  <a:srgbClr val="0A2A66"/>
-                </a:solidFill>
-                <a:latin typeface="DM Sans"/>
-                <a:ea typeface="DM Sans"/>
-                <a:cs typeface="DM Sans"/>
-                <a:sym typeface="DM Sans"/>
-              </a:rPr>
-              <a:t>Return for</a:t>
-            </a:r>
-          </a:p>
-          <a:p>
-            <a:pPr algn="ctr" marL="0" indent="0" lvl="0">
-              <a:lnSpc>
-                <a:spcPts val="2379"/>
-              </a:lnSpc>
-              <a:spcBef>
-                <a:spcPct val="0"/>
-              </a:spcBef>
-            </a:pPr>
-            <a:r>
-              <a:rPr lang="en-US" sz="1950" strike="noStrike" u="none">
-                <a:solidFill>
-                  <a:srgbClr val="0A2A66"/>
-                </a:solidFill>
-                <a:latin typeface="DM Sans"/>
-                <a:ea typeface="DM Sans"/>
-                <a:cs typeface="DM Sans"/>
-                <a:sym typeface="DM Sans"/>
-              </a:rPr>
-              <a:t>a fresh question</a:t>
-            </a:r>
-          </a:p>
-        </p:txBody>
-      </p:sp>
-      <p:sp>
-        <p:nvSpPr>
-          <p:cNvPr name="Freeform 22" id="22" descr="Dunlo"/>
+              <a:t>The next question doesn’t.</a:t>
+            </a:r>
+          </a:p>
+        </p:txBody>
+      </p:sp>
+      <p:sp>
+        <p:nvSpPr>
+          <p:cNvPr name="Freeform 11" id="11" descr="Dunlo"/>
           <p:cNvSpPr/>
           <p:nvPr/>
         </p:nvSpPr>
@@ -7476,110 +7004,6 @@
             </a:blip>
             <a:stretch>
               <a:fillRect l="0" t="0" r="0" b="0"/>
-            </a:stretch>
-          </a:blipFill>
-        </p:spPr>
-      </p:sp>
-      <p:sp>
-        <p:nvSpPr>
-          <p:cNvPr name="Freeform 23" id="23" descr="A smooth route through focused study and return"/>
-          <p:cNvSpPr/>
-          <p:nvPr/>
-        </p:nvSpPr>
-        <p:spPr>
-          <a:xfrm flipH="false" flipV="false" rot="0">
-            <a:off x="1524000" y="4095750"/>
-            <a:ext cx="9715500" cy="1428750"/>
-          </a:xfrm>
-          <a:custGeom>
-            <a:avLst/>
-            <a:gdLst/>
-            <a:ahLst/>
-            <a:cxnLst/>
-            <a:rect r="r" b="b" t="t" l="l"/>
-            <a:pathLst>
-              <a:path h="1428750" w="9715500">
-                <a:moveTo>
-                  <a:pt x="0" y="0"/>
-                </a:moveTo>
-                <a:lnTo>
-                  <a:pt x="9715500" y="0"/>
-                </a:lnTo>
-                <a:lnTo>
-                  <a:pt x="9715500" y="1428750"/>
-                </a:lnTo>
-                <a:lnTo>
-                  <a:pt x="0" y="1428750"/>
-                </a:lnTo>
-                <a:lnTo>
-                  <a:pt x="0" y="0"/>
-                </a:lnTo>
-                <a:close/>
-              </a:path>
-            </a:pathLst>
-          </a:custGeom>
-          <a:blipFill>
-            <a:blip r:embed="rId9">
-              <a:extLst>
-                <a:ext uri="{96DAC541-7B7A-43D3-8B79-37D633B846F1}">
-                  <asvg:svgBlip xmlns:asvg="http://schemas.microsoft.com/office/drawing/2016/SVG/main" r:embed="rId10"/>
-                </a:ext>
-              </a:extLst>
-            </a:blip>
-            <a:stretch>
-              <a:fillRect l="0" t="0" r="0" b="0"/>
-            </a:stretch>
-          </a:blipFill>
-        </p:spPr>
-      </p:sp>
-      <p:sp>
-        <p:nvSpPr>
-          <p:cNvPr name="Freeform 24" id="24" descr="Learning destination"/>
-          <p:cNvSpPr/>
-          <p:nvPr/>
-        </p:nvSpPr>
-        <p:spPr>
-          <a:xfrm flipH="false" flipV="false" rot="0">
-            <a:off x="9734550" y="3829050"/>
-            <a:ext cx="342900" cy="457755"/>
-          </a:xfrm>
-          <a:custGeom>
-            <a:avLst/>
-            <a:gdLst/>
-            <a:ahLst/>
-            <a:cxnLst/>
-            <a:rect r="r" b="b" t="t" l="l"/>
-            <a:pathLst>
-              <a:path h="457755" w="342900">
-                <a:moveTo>
-                  <a:pt x="0" y="0"/>
-                </a:moveTo>
-                <a:lnTo>
-                  <a:pt x="342900" y="0"/>
-                </a:lnTo>
-                <a:lnTo>
-                  <a:pt x="342900" y="457755"/>
-                </a:lnTo>
-                <a:lnTo>
-                  <a:pt x="0" y="457755"/>
-                </a:lnTo>
-                <a:lnTo>
-                  <a:pt x="0" y="0"/>
-                </a:lnTo>
-                <a:close/>
-              </a:path>
-            </a:pathLst>
-          </a:custGeom>
-          <a:blipFill>
-            <a:blip r:embed="rId11">
-              <a:extLst>
-                <a:ext uri="{96DAC541-7B7A-43D3-8B79-37D633B846F1}">
-                  <asvg:svgBlip xmlns:asvg="http://schemas.microsoft.com/office/drawing/2016/SVG/main" r:embed="rId12"/>
-                </a:ext>
-              </a:extLst>
-            </a:blip>
-            <a:stretch>
-              <a:fillRect l="-60" t="0" r="-60" b="0"/>
             </a:stretch>
           </a:blipFill>
         </p:spPr>
@@ -8535,8 +7959,8 @@
         </p:nvSpPr>
         <p:spPr>
           <a:xfrm rot="0">
-            <a:off x="2028825" y="5143500"/>
-            <a:ext cx="8134350" cy="328041"/>
+            <a:off x="609600" y="5067300"/>
+            <a:ext cx="10972800" cy="299656"/>
           </a:xfrm>
           <a:prstGeom prst="rect">
             <a:avLst/>
@@ -8550,14 +7974,14 @@
           <a:p>
             <a:pPr algn="ctr" marL="0" indent="0" lvl="0">
               <a:lnSpc>
-                <a:spcPts val="2562"/>
+                <a:spcPts val="2470"/>
               </a:lnSpc>
               <a:spcBef>
                 <a:spcPct val="0"/>
               </a:spcBef>
             </a:pPr>
             <a:r>
-              <a:rPr lang="en-US" sz="2100" strike="noStrike" u="none">
+              <a:rPr lang="en-US" sz="2025" strike="noStrike" u="none">
                 <a:solidFill>
                   <a:srgbClr val="FFFFFF"/>
                 </a:solidFill>
@@ -8566,7 +7990,7 @@
                 <a:cs typeface="DM Sans"/>
                 <a:sym typeface="DM Sans"/>
               </a:rPr>
-              <a:t>Your place and your learning tools stay together</a:t>
+              <a:t>Saved ideas and later questions turn a quick visit into a path back.</a:t>
             </a:r>
           </a:p>
         </p:txBody>
@@ -8579,8 +8003,8 @@
         </p:nvSpPr>
         <p:spPr>
           <a:xfrm rot="0">
-            <a:off x="609600" y="6057900"/>
-            <a:ext cx="10972800" cy="196787"/>
+            <a:off x="609600" y="6067425"/>
+            <a:ext cx="10972800" cy="215456"/>
           </a:xfrm>
           <a:prstGeom prst="rect">
             <a:avLst/>
@@ -8594,14 +8018,14 @@
           <a:p>
             <a:pPr algn="ctr" marL="0" indent="0" lvl="0">
               <a:lnSpc>
-                <a:spcPts val="1555"/>
+                <a:spcPts val="1738"/>
               </a:lnSpc>
               <a:spcBef>
                 <a:spcPct val="0"/>
               </a:spcBef>
             </a:pPr>
             <a:r>
-              <a:rPr lang="en-US" sz="1275" strike="noStrike" u="none">
+              <a:rPr lang="en-US" sz="1425" strike="noStrike" u="none">
                 <a:solidFill>
                   <a:srgbClr val="0A2A66"/>
                 </a:solidFill>
@@ -8609,9 +8033,9 @@
                 <a:ea typeface="DM Sans"/>
                 <a:cs typeface="DM Sans"/>
                 <a:sym typeface="DM Sans"/>
-                <a:hlinkClick r:id="rId7" tooltip="https://pubmed.ncbi.nlm.nih.gov/23576743/"/>
+                <a:hlinkClick r:id="rId7" tooltip="https://doi.org/10.1038/s44159-022-00089-1"/>
               </a:rPr>
-              <a:t>Learning basis: retrieval practice</a:t>
+              <a:t>Learning design: recalling an idea and spacing practice · Carpenter, Pan &amp; Butler (2022)</a:t>
             </a:r>
           </a:p>
         </p:txBody>
@@ -9364,8 +8788,8 @@
         </p:nvSpPr>
         <p:spPr>
           <a:xfrm rot="0">
-            <a:off x="609600" y="3981450"/>
-            <a:ext cx="4191000" cy="280988"/>
+            <a:off x="609600" y="3857625"/>
+            <a:ext cx="5000625" cy="566738"/>
           </a:xfrm>
           <a:prstGeom prst="rect">
             <a:avLst/>
@@ -9395,7 +8819,29 @@
                 <a:cs typeface="DM Sans"/>
                 <a:sym typeface="DM Sans"/>
               </a:rPr>
-              <a:t>A direct link into the experience</a:t>
+              <a:t>Public topic links will let learners</a:t>
+            </a:r>
+          </a:p>
+          <a:p>
+            <a:pPr algn="ctr" marL="0" indent="0" lvl="0">
+              <a:lnSpc>
+                <a:spcPts val="2287"/>
+              </a:lnSpc>
+              <a:spcBef>
+                <a:spcPct val="0"/>
+              </a:spcBef>
+            </a:pPr>
+            <a:r>
+              <a:rPr lang="en-US" sz="1875" strike="noStrike" u="none">
+                <a:solidFill>
+                  <a:srgbClr val="0A2A66"/>
+                </a:solidFill>
+                <a:latin typeface="DM Sans"/>
+                <a:ea typeface="DM Sans"/>
+                <a:cs typeface="DM Sans"/>
+                <a:sym typeface="DM Sans"/>
+              </a:rPr>
+              <a:t>open an idea without a Dunlo account.</a:t>
             </a:r>
           </a:p>
         </p:txBody>
@@ -9571,8 +9017,8 @@
         </p:nvSpPr>
         <p:spPr>
           <a:xfrm rot="0">
-            <a:off x="6610350" y="3981450"/>
-            <a:ext cx="4972050" cy="280988"/>
+            <a:off x="6610350" y="3857625"/>
+            <a:ext cx="4972050" cy="566738"/>
           </a:xfrm>
           <a:prstGeom prst="rect">
             <a:avLst/>
@@ -9602,7 +9048,29 @@
                 <a:cs typeface="DM Sans"/>
                 <a:sym typeface="DM Sans"/>
               </a:rPr>
-              <a:t>A useful starting point for someone else</a:t>
+              <a:t>Save and share a specific challenge</a:t>
+            </a:r>
+          </a:p>
+          <a:p>
+            <a:pPr algn="ctr" marL="0" indent="0" lvl="0">
+              <a:lnSpc>
+                <a:spcPts val="2287"/>
+              </a:lnSpc>
+              <a:spcBef>
+                <a:spcPct val="0"/>
+              </a:spcBef>
+            </a:pPr>
+            <a:r>
+              <a:rPr lang="en-US" sz="1875" strike="noStrike" u="none">
+                <a:solidFill>
+                  <a:srgbClr val="0A2A66"/>
+                </a:solidFill>
+                <a:latin typeface="DM Sans"/>
+                <a:ea typeface="DM Sans"/>
+                <a:cs typeface="DM Sans"/>
+                <a:sym typeface="DM Sans"/>
+              </a:rPr>
+              <a:t>to give someone a useful starting point.</a:t>
             </a:r>
           </a:p>
         </p:txBody>
@@ -9665,7 +9133,7 @@
                 <a:cs typeface="DM Sans"/>
                 <a:sym typeface="DM Sans"/>
               </a:rPr>
-              <a:t>Public demonstrations</a:t>
+              <a:t>Launch with short demo posts</a:t>
             </a:r>
           </a:p>
         </p:txBody>
@@ -9872,7 +9340,7 @@
                 <a:cs typeface="DM Sans"/>
                 <a:sym typeface="DM Sans"/>
               </a:rPr>
-              <a:t>Topic pages and challenge links</a:t>
+              <a:t>Link each post to the matching idea</a:t>
             </a:r>
           </a:p>
         </p:txBody>
@@ -9885,8 +9353,8 @@
         </p:nvSpPr>
         <p:spPr>
           <a:xfrm rot="0">
-            <a:off x="609600" y="6200775"/>
-            <a:ext cx="10572750" cy="196596"/>
+            <a:off x="609600" y="6191250"/>
+            <a:ext cx="10572750" cy="234315"/>
           </a:xfrm>
           <a:prstGeom prst="rect">
             <a:avLst/>
@@ -9900,14 +9368,14 @@
           <a:p>
             <a:pPr algn="l" marL="0" indent="0" lvl="0">
               <a:lnSpc>
-                <a:spcPts val="1647"/>
+                <a:spcPts val="1830"/>
               </a:lnSpc>
               <a:spcBef>
                 <a:spcPct val="0"/>
               </a:spcBef>
             </a:pPr>
             <a:r>
-              <a:rPr lang="en-US" sz="1350" strike="noStrike" u="none">
+              <a:rPr lang="en-US" sz="1500" strike="noStrike" u="none">
                 <a:solidFill>
                   <a:srgbClr val="0A2A66"/>
                 </a:solidFill>
@@ -9916,7 +9384,7 @@
                 <a:cs typeface="DM Sans"/>
                 <a:sym typeface="DM Sans"/>
               </a:rPr>
-              <a:t>School and community use can extend the public model.</a:t>
+              <a:t>Start online through public sharing; future school or community use can extend this model.</a:t>
             </a:r>
           </a:p>
         </p:txBody>
@@ -10298,7 +9766,7 @@
                 <a:cs typeface="DM Sans Bold"/>
                 <a:sym typeface="DM Sans Bold"/>
               </a:rPr>
-              <a:t>Grow through reviewed learning paths</a:t>
+              <a:t>A practical launch and growth plan</a:t>
             </a:r>
           </a:p>
         </p:txBody>
@@ -10330,8 +9798,354 @@
         </p:nvSpPr>
         <p:spPr>
           <a:xfrm rot="0">
-            <a:off x="762000" y="2552700"/>
-            <a:ext cx="2895600" cy="280797"/>
+            <a:off x="762000" y="2371725"/>
+            <a:ext cx="2895600" cy="824103"/>
+          </a:xfrm>
+          <a:prstGeom prst="rect">
+            <a:avLst/>
+          </a:prstGeom>
+        </p:spPr>
+        <p:txBody>
+          <a:bodyPr anchor="t" rtlCol="false" tIns="0" lIns="0" bIns="0" rIns="0">
+            <a:spAutoFit/>
+          </a:bodyPr>
+          <a:lstStyle/>
+          <a:p>
+            <a:pPr algn="ctr" marL="0" indent="0" lvl="0">
+              <a:lnSpc>
+                <a:spcPts val="2196"/>
+              </a:lnSpc>
+              <a:spcBef>
+                <a:spcPct val="0"/>
+              </a:spcBef>
+            </a:pPr>
+            <a:r>
+              <a:rPr lang="en-US" sz="1800" strike="noStrike" u="none">
+                <a:solidFill>
+                  <a:srgbClr val="0A2A66"/>
+                </a:solidFill>
+                <a:latin typeface="DM Sans"/>
+                <a:ea typeface="DM Sans"/>
+                <a:cs typeface="DM Sans"/>
+                <a:sym typeface="DM Sans"/>
+              </a:rPr>
+              <a:t>NOV 2026</a:t>
+            </a:r>
+          </a:p>
+          <a:p>
+            <a:pPr algn="ctr" marL="0" indent="0" lvl="0">
+              <a:lnSpc>
+                <a:spcPts val="2196"/>
+              </a:lnSpc>
+              <a:spcBef>
+                <a:spcPct val="0"/>
+              </a:spcBef>
+            </a:pPr>
+            <a:r>
+              <a:rPr lang="en-US" sz="1800" strike="noStrike" u="none">
+                <a:solidFill>
+                  <a:srgbClr val="0A2A66"/>
+                </a:solidFill>
+                <a:latin typeface="DM Sans"/>
+                <a:ea typeface="DM Sans"/>
+                <a:cs typeface="DM Sans"/>
+                <a:sym typeface="DM Sans"/>
+              </a:rPr>
+              <a:t>Review content</a:t>
+            </a:r>
+          </a:p>
+          <a:p>
+            <a:pPr algn="ctr" marL="0" indent="0" lvl="0">
+              <a:lnSpc>
+                <a:spcPts val="2196"/>
+              </a:lnSpc>
+              <a:spcBef>
+                <a:spcPct val="0"/>
+              </a:spcBef>
+            </a:pPr>
+            <a:r>
+              <a:rPr lang="en-US" sz="1800" strike="noStrike" u="none">
+                <a:solidFill>
+                  <a:srgbClr val="0A2A66"/>
+                </a:solidFill>
+                <a:latin typeface="DM Sans"/>
+                <a:ea typeface="DM Sans"/>
+                <a:cs typeface="DM Sans"/>
+                <a:sym typeface="DM Sans"/>
+              </a:rPr>
+              <a:t>and launch publicly</a:t>
+            </a:r>
+          </a:p>
+        </p:txBody>
+      </p:sp>
+      <p:sp>
+        <p:nvSpPr>
+          <p:cNvPr name="AutoShape 12" id="12"/>
+          <p:cNvSpPr/>
+          <p:nvPr/>
+        </p:nvSpPr>
+        <p:spPr>
+          <a:xfrm rot="0">
+            <a:off x="4495800" y="2333625"/>
+            <a:ext cx="3200400" cy="885825"/>
+          </a:xfrm>
+          <a:prstGeom prst="rect">
+            <a:avLst/>
+          </a:prstGeom>
+          <a:solidFill>
+            <a:srgbClr val="F0EFFF"/>
+          </a:solidFill>
+        </p:spPr>
+      </p:sp>
+      <p:sp>
+        <p:nvSpPr>
+          <p:cNvPr name="TextBox 13" id="13"/>
+          <p:cNvSpPr txBox="true"/>
+          <p:nvPr/>
+        </p:nvSpPr>
+        <p:spPr>
+          <a:xfrm rot="0">
+            <a:off x="4362450" y="2371725"/>
+            <a:ext cx="3467100" cy="824103"/>
+          </a:xfrm>
+          <a:prstGeom prst="rect">
+            <a:avLst/>
+          </a:prstGeom>
+        </p:spPr>
+        <p:txBody>
+          <a:bodyPr anchor="t" rtlCol="false" tIns="0" lIns="0" bIns="0" rIns="0">
+            <a:spAutoFit/>
+          </a:bodyPr>
+          <a:lstStyle/>
+          <a:p>
+            <a:pPr algn="ctr" marL="0" indent="0" lvl="0">
+              <a:lnSpc>
+                <a:spcPts val="2196"/>
+              </a:lnSpc>
+              <a:spcBef>
+                <a:spcPct val="0"/>
+              </a:spcBef>
+            </a:pPr>
+            <a:r>
+              <a:rPr lang="en-US" sz="1800" strike="noStrike" u="none">
+                <a:solidFill>
+                  <a:srgbClr val="0A2A66"/>
+                </a:solidFill>
+                <a:latin typeface="DM Sans"/>
+                <a:ea typeface="DM Sans"/>
+                <a:cs typeface="DM Sans"/>
+                <a:sym typeface="DM Sans"/>
+              </a:rPr>
+              <a:t>DEC 2026–FEB 2027</a:t>
+            </a:r>
+          </a:p>
+          <a:p>
+            <a:pPr algn="ctr" marL="0" indent="0" lvl="0">
+              <a:lnSpc>
+                <a:spcPts val="2196"/>
+              </a:lnSpc>
+              <a:spcBef>
+                <a:spcPct val="0"/>
+              </a:spcBef>
+            </a:pPr>
+            <a:r>
+              <a:rPr lang="en-US" sz="1800" strike="noStrike" u="none">
+                <a:solidFill>
+                  <a:srgbClr val="0A2A66"/>
+                </a:solidFill>
+                <a:latin typeface="DM Sans"/>
+                <a:ea typeface="DM Sans"/>
+                <a:cs typeface="DM Sans"/>
+                <a:sym typeface="DM Sans"/>
+              </a:rPr>
+              <a:t>Gather feedback</a:t>
+            </a:r>
+          </a:p>
+          <a:p>
+            <a:pPr algn="ctr" marL="0" indent="0" lvl="0">
+              <a:lnSpc>
+                <a:spcPts val="2196"/>
+              </a:lnSpc>
+              <a:spcBef>
+                <a:spcPct val="0"/>
+              </a:spcBef>
+            </a:pPr>
+            <a:r>
+              <a:rPr lang="en-US" sz="1800" strike="noStrike" u="none">
+                <a:solidFill>
+                  <a:srgbClr val="0A2A66"/>
+                </a:solidFill>
+                <a:latin typeface="DM Sans"/>
+                <a:ea typeface="DM Sans"/>
+                <a:cs typeface="DM Sans"/>
+                <a:sym typeface="DM Sans"/>
+              </a:rPr>
+              <a:t>and refine the flow</a:t>
+            </a:r>
+          </a:p>
+        </p:txBody>
+      </p:sp>
+      <p:sp>
+        <p:nvSpPr>
+          <p:cNvPr name="AutoShape 14" id="14"/>
+          <p:cNvSpPr/>
+          <p:nvPr/>
+        </p:nvSpPr>
+        <p:spPr>
+          <a:xfrm rot="0">
+            <a:off x="8382000" y="2333625"/>
+            <a:ext cx="3200400" cy="885825"/>
+          </a:xfrm>
+          <a:prstGeom prst="rect">
+            <a:avLst/>
+          </a:prstGeom>
+          <a:solidFill>
+            <a:srgbClr val="D9F2EA"/>
+          </a:solidFill>
+        </p:spPr>
+      </p:sp>
+      <p:sp>
+        <p:nvSpPr>
+          <p:cNvPr name="TextBox 15" id="15"/>
+          <p:cNvSpPr txBox="true"/>
+          <p:nvPr/>
+        </p:nvSpPr>
+        <p:spPr>
+          <a:xfrm rot="0">
+            <a:off x="8248650" y="2371725"/>
+            <a:ext cx="3467100" cy="824103"/>
+          </a:xfrm>
+          <a:prstGeom prst="rect">
+            <a:avLst/>
+          </a:prstGeom>
+        </p:spPr>
+        <p:txBody>
+          <a:bodyPr anchor="t" rtlCol="false" tIns="0" lIns="0" bIns="0" rIns="0">
+            <a:spAutoFit/>
+          </a:bodyPr>
+          <a:lstStyle/>
+          <a:p>
+            <a:pPr algn="ctr" marL="0" indent="0" lvl="0">
+              <a:lnSpc>
+                <a:spcPts val="2196"/>
+              </a:lnSpc>
+              <a:spcBef>
+                <a:spcPct val="0"/>
+              </a:spcBef>
+            </a:pPr>
+            <a:r>
+              <a:rPr lang="en-US" sz="1800" strike="noStrike" u="none">
+                <a:solidFill>
+                  <a:srgbClr val="0A2A66"/>
+                </a:solidFill>
+                <a:latin typeface="DM Sans"/>
+                <a:ea typeface="DM Sans"/>
+                <a:cs typeface="DM Sans"/>
+                <a:sym typeface="DM Sans"/>
+              </a:rPr>
+              <a:t>MAR 2027</a:t>
+            </a:r>
+          </a:p>
+          <a:p>
+            <a:pPr algn="ctr" marL="0" indent="0" lvl="0">
+              <a:lnSpc>
+                <a:spcPts val="2196"/>
+              </a:lnSpc>
+              <a:spcBef>
+                <a:spcPct val="0"/>
+              </a:spcBef>
+            </a:pPr>
+            <a:r>
+              <a:rPr lang="en-US" sz="1800" strike="noStrike" u="none">
+                <a:solidFill>
+                  <a:srgbClr val="0A2A66"/>
+                </a:solidFill>
+                <a:latin typeface="DM Sans"/>
+                <a:ea typeface="DM Sans"/>
+                <a:cs typeface="DM Sans"/>
+                <a:sym typeface="DM Sans"/>
+              </a:rPr>
+              <a:t>Evaluate use</a:t>
+            </a:r>
+          </a:p>
+          <a:p>
+            <a:pPr algn="ctr" marL="0" indent="0" lvl="0">
+              <a:lnSpc>
+                <a:spcPts val="2196"/>
+              </a:lnSpc>
+              <a:spcBef>
+                <a:spcPct val="0"/>
+              </a:spcBef>
+            </a:pPr>
+            <a:r>
+              <a:rPr lang="en-US" sz="1800" strike="noStrike" u="none">
+                <a:solidFill>
+                  <a:srgbClr val="0A2A66"/>
+                </a:solidFill>
+                <a:latin typeface="DM Sans"/>
+                <a:ea typeface="DM Sans"/>
+                <a:cs typeface="DM Sans"/>
+                <a:sym typeface="DM Sans"/>
+              </a:rPr>
+              <a:t>and plan continuation</a:t>
+            </a:r>
+          </a:p>
+        </p:txBody>
+      </p:sp>
+      <p:sp>
+        <p:nvSpPr>
+          <p:cNvPr name="TextBox 16" id="16"/>
+          <p:cNvSpPr txBox="true"/>
+          <p:nvPr/>
+        </p:nvSpPr>
+        <p:spPr>
+          <a:xfrm rot="0">
+            <a:off x="609600" y="3905250"/>
+            <a:ext cx="10972800" cy="374904"/>
+          </a:xfrm>
+          <a:prstGeom prst="rect">
+            <a:avLst/>
+          </a:prstGeom>
+        </p:spPr>
+        <p:txBody>
+          <a:bodyPr anchor="t" rtlCol="false" tIns="0" lIns="0" bIns="0" rIns="0">
+            <a:spAutoFit/>
+          </a:bodyPr>
+          <a:lstStyle/>
+          <a:p>
+            <a:pPr algn="ctr" marL="0" indent="0" lvl="0">
+              <a:lnSpc>
+                <a:spcPts val="2928"/>
+              </a:lnSpc>
+              <a:spcBef>
+                <a:spcPct val="0"/>
+              </a:spcBef>
+            </a:pPr>
+            <a:r>
+              <a:rPr lang="en-US" sz="2400" strike="noStrike" u="none">
+                <a:solidFill>
+                  <a:srgbClr val="0A2A66"/>
+                </a:solidFill>
+                <a:latin typeface="DM Sans"/>
+                <a:ea typeface="DM Sans"/>
+                <a:cs typeface="DM Sans"/>
+                <a:sym typeface="DM Sans"/>
+              </a:rPr>
+              <a:t>Expand through reviewed learning sequences</a:t>
+            </a:r>
+          </a:p>
+        </p:txBody>
+      </p:sp>
+      <p:sp>
+        <p:nvSpPr>
+          <p:cNvPr name="TextBox 17" id="17"/>
+          <p:cNvSpPr txBox="true"/>
+          <p:nvPr/>
+        </p:nvSpPr>
+        <p:spPr>
+          <a:xfrm rot="0">
+            <a:off x="609600" y="4467225"/>
+            <a:ext cx="10972800" cy="576072"/>
           </a:xfrm>
           <a:prstGeom prst="rect">
             <a:avLst/>
@@ -10361,50 +10175,9 @@
                 <a:cs typeface="DM Sans"/>
                 <a:sym typeface="DM Sans"/>
               </a:rPr>
-              <a:t>More subjects</a:t>
-            </a:r>
-          </a:p>
-        </p:txBody>
-      </p:sp>
-      <p:sp>
-        <p:nvSpPr>
-          <p:cNvPr name="AutoShape 12" id="12"/>
-          <p:cNvSpPr/>
-          <p:nvPr/>
-        </p:nvSpPr>
-        <p:spPr>
-          <a:xfrm rot="0">
-            <a:off x="4495800" y="2333625"/>
-            <a:ext cx="3200400" cy="885825"/>
-          </a:xfrm>
-          <a:prstGeom prst="rect">
-            <a:avLst/>
-          </a:prstGeom>
-          <a:solidFill>
-            <a:srgbClr val="F0EFFF"/>
-          </a:solidFill>
-        </p:spPr>
-      </p:sp>
-      <p:sp>
-        <p:nvSpPr>
-          <p:cNvPr name="TextBox 13" id="13"/>
-          <p:cNvSpPr txBox="true"/>
-          <p:nvPr/>
-        </p:nvSpPr>
-        <p:spPr>
-          <a:xfrm rot="0">
-            <a:off x="4648200" y="2552700"/>
-            <a:ext cx="2895600" cy="280797"/>
-          </a:xfrm>
-          <a:prstGeom prst="rect">
-            <a:avLst/>
-          </a:prstGeom>
-        </p:spPr>
-        <p:txBody>
-          <a:bodyPr anchor="t" rtlCol="false" tIns="0" lIns="0" bIns="0" rIns="0">
-            <a:spAutoFit/>
-          </a:bodyPr>
-          <a:lstStyle/>
+              <a:t>Each new topic will include an interactive or clip, a matching Khan activity,</a:t>
+            </a:r>
+          </a:p>
           <a:p>
             <a:pPr algn="ctr" marL="0" indent="0" lvl="0">
               <a:lnSpc>
@@ -10424,40 +10197,21 @@
                 <a:cs typeface="DM Sans"/>
                 <a:sym typeface="DM Sans"/>
               </a:rPr>
-              <a:t>Filipino content</a:t>
-            </a:r>
-          </a:p>
-        </p:txBody>
-      </p:sp>
-      <p:sp>
-        <p:nvSpPr>
-          <p:cNvPr name="AutoShape 14" id="14"/>
-          <p:cNvSpPr/>
+              <a:t>worked support and fresh questions.</a:t>
+            </a:r>
+          </a:p>
+        </p:txBody>
+      </p:sp>
+      <p:sp>
+        <p:nvSpPr>
+          <p:cNvPr name="TextBox 18" id="18"/>
+          <p:cNvSpPr txBox="true"/>
           <p:nvPr/>
         </p:nvSpPr>
         <p:spPr>
           <a:xfrm rot="0">
-            <a:off x="8382000" y="2333625"/>
-            <a:ext cx="3200400" cy="885825"/>
-          </a:xfrm>
-          <a:prstGeom prst="rect">
-            <a:avLst/>
-          </a:prstGeom>
-          <a:solidFill>
-            <a:srgbClr val="D9F2EA"/>
-          </a:solidFill>
-        </p:spPr>
-      </p:sp>
-      <p:sp>
-        <p:nvSpPr>
-          <p:cNvPr name="TextBox 15" id="15"/>
-          <p:cNvSpPr txBox="true"/>
-          <p:nvPr/>
-        </p:nvSpPr>
-        <p:spPr>
-          <a:xfrm rot="0">
-            <a:off x="8534400" y="2552700"/>
-            <a:ext cx="2895600" cy="280797"/>
+            <a:off x="609600" y="5286375"/>
+            <a:ext cx="10972800" cy="280988"/>
           </a:xfrm>
           <a:prstGeom prst="rect">
             <a:avLst/>
@@ -10471,14 +10225,14 @@
           <a:p>
             <a:pPr algn="ctr" marL="0" indent="0" lvl="0">
               <a:lnSpc>
-                <a:spcPts val="2379"/>
+                <a:spcPts val="2287"/>
               </a:lnSpc>
               <a:spcBef>
                 <a:spcPct val="0"/>
               </a:spcBef>
             </a:pPr>
             <a:r>
-              <a:rPr lang="en-US" sz="1950" strike="noStrike" u="none">
+              <a:rPr lang="en-US" sz="1875" strike="noStrike" u="none">
                 <a:solidFill>
                   <a:srgbClr val="0A2A66"/>
                 </a:solidFill>
@@ -10487,21 +10241,21 @@
                 <a:cs typeface="DM Sans"/>
                 <a:sym typeface="DM Sans"/>
               </a:rPr>
-              <a:t>Access options</a:t>
-            </a:r>
-          </a:p>
-        </p:txBody>
-      </p:sp>
-      <p:sp>
-        <p:nvSpPr>
-          <p:cNvPr name="TextBox 16" id="16"/>
+              <a:t>Track which ideas learners open, where they stop and how fresh answers change.</a:t>
+            </a:r>
+          </a:p>
+        </p:txBody>
+      </p:sp>
+      <p:sp>
+        <p:nvSpPr>
+          <p:cNvPr name="TextBox 19" id="19"/>
           <p:cNvSpPr txBox="true"/>
           <p:nvPr/>
         </p:nvSpPr>
         <p:spPr>
           <a:xfrm rot="0">
-            <a:off x="609600" y="3752850"/>
-            <a:ext cx="10972800" cy="374904"/>
+            <a:off x="609600" y="6010275"/>
+            <a:ext cx="10668000" cy="243649"/>
           </a:xfrm>
           <a:prstGeom prst="rect">
             <a:avLst/>
@@ -10515,14 +10269,14 @@
           <a:p>
             <a:pPr algn="ctr" marL="0" indent="0" lvl="0">
               <a:lnSpc>
-                <a:spcPts val="2928"/>
+                <a:spcPts val="1921"/>
               </a:lnSpc>
               <a:spcBef>
                 <a:spcPct val="0"/>
               </a:spcBef>
             </a:pPr>
             <a:r>
-              <a:rPr lang="en-US" sz="2400" strike="noStrike" u="none">
+              <a:rPr lang="en-US" sz="1575" strike="noStrike" u="none">
                 <a:solidFill>
                   <a:srgbClr val="0A2A66"/>
                 </a:solidFill>
@@ -10531,139 +10285,7 @@
                 <a:cs typeface="DM Sans"/>
                 <a:sym typeface="DM Sans"/>
               </a:rPr>
-              <a:t>A reusable content sequence</a:t>
-            </a:r>
-          </a:p>
-        </p:txBody>
-      </p:sp>
-      <p:sp>
-        <p:nvSpPr>
-          <p:cNvPr name="TextBox 17" id="17"/>
-          <p:cNvSpPr txBox="true"/>
-          <p:nvPr/>
-        </p:nvSpPr>
-        <p:spPr>
-          <a:xfrm rot="0">
-            <a:off x="609600" y="4391025"/>
-            <a:ext cx="10972800" cy="271653"/>
-          </a:xfrm>
-          <a:prstGeom prst="rect">
-            <a:avLst/>
-          </a:prstGeom>
-        </p:spPr>
-        <p:txBody>
-          <a:bodyPr anchor="t" rtlCol="false" tIns="0" lIns="0" bIns="0" rIns="0">
-            <a:spAutoFit/>
-          </a:bodyPr>
-          <a:lstStyle/>
-          <a:p>
-            <a:pPr algn="ctr" marL="0" indent="0" lvl="0">
-              <a:lnSpc>
-                <a:spcPts val="2196"/>
-              </a:lnSpc>
-              <a:spcBef>
-                <a:spcPct val="0"/>
-              </a:spcBef>
-            </a:pPr>
-            <a:r>
-              <a:rPr lang="en-US" sz="1800" strike="noStrike" u="none">
-                <a:solidFill>
-                  <a:srgbClr val="0A2A66"/>
-                </a:solidFill>
-                <a:latin typeface="DM Sans"/>
-                <a:ea typeface="DM Sans"/>
-                <a:cs typeface="DM Sans"/>
-                <a:sym typeface="DM Sans"/>
-              </a:rPr>
-              <a:t>Interactive idea + Khan mapping + useful support + fresh practice</a:t>
-            </a:r>
-          </a:p>
-        </p:txBody>
-      </p:sp>
-      <p:sp>
-        <p:nvSpPr>
-          <p:cNvPr name="TextBox 18" id="18"/>
-          <p:cNvSpPr txBox="true"/>
-          <p:nvPr/>
-        </p:nvSpPr>
-        <p:spPr>
-          <a:xfrm rot="0">
-            <a:off x="609600" y="5362575"/>
-            <a:ext cx="10972800" cy="271653"/>
-          </a:xfrm>
-          <a:prstGeom prst="rect">
-            <a:avLst/>
-          </a:prstGeom>
-        </p:spPr>
-        <p:txBody>
-          <a:bodyPr anchor="t" rtlCol="false" tIns="0" lIns="0" bIns="0" rIns="0">
-            <a:spAutoFit/>
-          </a:bodyPr>
-          <a:lstStyle/>
-          <a:p>
-            <a:pPr algn="ctr" marL="0" indent="0" lvl="0">
-              <a:lnSpc>
-                <a:spcPts val="2196"/>
-              </a:lnSpc>
-              <a:spcBef>
-                <a:spcPct val="0"/>
-              </a:spcBef>
-            </a:pPr>
-            <a:r>
-              <a:rPr lang="en-US" sz="1800" strike="noStrike" u="none">
-                <a:solidFill>
-                  <a:srgbClr val="0A2A66"/>
-                </a:solidFill>
-                <a:latin typeface="DM Sans"/>
-                <a:ea typeface="DM Sans"/>
-                <a:cs typeface="DM Sans"/>
-                <a:sym typeface="DM Sans"/>
-              </a:rPr>
-              <a:t>Next: review new content and localization before release.</a:t>
-            </a:r>
-          </a:p>
-        </p:txBody>
-      </p:sp>
-      <p:sp>
-        <p:nvSpPr>
-          <p:cNvPr name="TextBox 19" id="19"/>
-          <p:cNvSpPr txBox="true"/>
-          <p:nvPr/>
-        </p:nvSpPr>
-        <p:spPr>
-          <a:xfrm rot="0">
-            <a:off x="609600" y="6010275"/>
-            <a:ext cx="10972800" cy="234315"/>
-          </a:xfrm>
-          <a:prstGeom prst="rect">
-            <a:avLst/>
-          </a:prstGeom>
-        </p:spPr>
-        <p:txBody>
-          <a:bodyPr anchor="t" rtlCol="false" tIns="0" lIns="0" bIns="0" rIns="0">
-            <a:spAutoFit/>
-          </a:bodyPr>
-          <a:lstStyle/>
-          <a:p>
-            <a:pPr algn="ctr" marL="0" indent="0" lvl="0">
-              <a:lnSpc>
-                <a:spcPts val="1830"/>
-              </a:lnSpc>
-              <a:spcBef>
-                <a:spcPct val="0"/>
-              </a:spcBef>
-            </a:pPr>
-            <a:r>
-              <a:rPr lang="en-US" sz="1500" strike="noStrike" u="none">
-                <a:solidFill>
-                  <a:srgbClr val="0A2A66"/>
-                </a:solidFill>
-                <a:latin typeface="DM Sans"/>
-                <a:ea typeface="DM Sans"/>
-                <a:cs typeface="DM Sans"/>
-                <a:sym typeface="DM Sans"/>
-              </a:rPr>
-              <a:t>Original offline mini-packs are a later extension.</a:t>
+              <a:t>Next extensions: more subjects, reviewed Filipino content and original offline mini-packs.</a:t>
             </a:r>
           </a:p>
         </p:txBody>
@@ -14679,8 +14301,8 @@
         </p:nvSpPr>
         <p:spPr>
           <a:xfrm rot="0">
-            <a:off x="609600" y="1209675"/>
-            <a:ext cx="10972800" cy="534162"/>
+            <a:off x="762000" y="1752600"/>
+            <a:ext cx="10668000" cy="590169"/>
           </a:xfrm>
           <a:prstGeom prst="rect">
             <a:avLst/>
@@ -14694,14 +14316,14 @@
           <a:p>
             <a:pPr algn="l" marL="0" indent="0" lvl="0">
               <a:lnSpc>
-                <a:spcPts val="4209"/>
+                <a:spcPts val="4758"/>
               </a:lnSpc>
               <a:spcBef>
                 <a:spcPct val="0"/>
               </a:spcBef>
             </a:pPr>
             <a:r>
-              <a:rPr lang="en-US" b="true" sz="3450" strike="noStrike" u="none">
+              <a:rPr lang="en-US" b="true" sz="3900" strike="noStrike" u="none">
                 <a:solidFill>
                   <a:srgbClr val="0A2A66"/>
                 </a:solidFill>
@@ -14710,7 +14332,7 @@
                 <a:cs typeface="DM Sans Bold"/>
                 <a:sym typeface="DM Sans Bold"/>
               </a:rPr>
-              <a:t>The implementation journey</a:t>
+              <a:t>Turn curiosity into progress.</a:t>
             </a:r>
           </a:p>
         </p:txBody>
@@ -14723,8 +14345,8 @@
         </p:nvSpPr>
         <p:spPr>
           <a:xfrm rot="0">
-            <a:off x="609600" y="4686300"/>
-            <a:ext cx="2857500" cy="566738"/>
+            <a:off x="762000" y="2828925"/>
+            <a:ext cx="10477500" cy="670751"/>
           </a:xfrm>
           <a:prstGeom prst="rect">
             <a:avLst/>
@@ -14738,14 +14360,14 @@
           <a:p>
             <a:pPr algn="l" marL="0" indent="0" lvl="0">
               <a:lnSpc>
-                <a:spcPts val="2287"/>
+                <a:spcPts val="2653"/>
               </a:lnSpc>
               <a:spcBef>
                 <a:spcPct val="0"/>
               </a:spcBef>
             </a:pPr>
             <a:r>
-              <a:rPr lang="en-US" sz="1875" strike="noStrike" u="none">
+              <a:rPr lang="en-US" sz="2175" strike="noStrike" u="none">
                 <a:solidFill>
                   <a:srgbClr val="0A2A66"/>
                 </a:solidFill>
@@ -14754,20 +14376,20 @@
                 <a:cs typeface="DM Sans"/>
                 <a:sym typeface="DM Sans"/>
               </a:rPr>
-              <a:t>NOVEMBER 2026</a:t>
+              <a:t>Dunlo uses short-form discovery to bring learners into Khan practice,</a:t>
             </a:r>
           </a:p>
           <a:p>
             <a:pPr algn="l" marL="0" indent="0" lvl="0">
               <a:lnSpc>
-                <a:spcPts val="2287"/>
+                <a:spcPts val="2653"/>
               </a:lnSpc>
               <a:spcBef>
                 <a:spcPct val="0"/>
               </a:spcBef>
             </a:pPr>
             <a:r>
-              <a:rPr lang="en-US" sz="1875" strike="noStrike" u="none">
+              <a:rPr lang="en-US" sz="2175" strike="noStrike" u="none">
                 <a:solidFill>
                   <a:srgbClr val="0A2A66"/>
                 </a:solidFill>
@@ -14776,7 +14398,7 @@
                 <a:cs typeface="DM Sans"/>
                 <a:sym typeface="DM Sans"/>
               </a:rPr>
-              <a:t>Prepare and launch</a:t>
+              <a:t>then helps them apply the idea and return to it.</a:t>
             </a:r>
           </a:p>
         </p:txBody>
@@ -14789,8 +14411,8 @@
         </p:nvSpPr>
         <p:spPr>
           <a:xfrm rot="0">
-            <a:off x="4457700" y="5048250"/>
-            <a:ext cx="3619500" cy="566738"/>
+            <a:off x="762000" y="4238625"/>
+            <a:ext cx="10477500" cy="346520"/>
           </a:xfrm>
           <a:prstGeom prst="rect">
             <a:avLst/>
@@ -14804,14 +14426,59 @@
           <a:p>
             <a:pPr algn="l" marL="0" indent="0" lvl="0">
               <a:lnSpc>
-                <a:spcPts val="2287"/>
+                <a:spcPts val="2836"/>
               </a:lnSpc>
               <a:spcBef>
                 <a:spcPct val="0"/>
               </a:spcBef>
             </a:pPr>
             <a:r>
-              <a:rPr lang="en-US" sz="1875" strike="noStrike" u="none">
+              <a:rPr lang="en-US" b="true" sz="2325" strike="noStrike" u="none">
+                <a:solidFill>
+                  <a:srgbClr val="0A2A66"/>
+                </a:solidFill>
+                <a:latin typeface="DM Sans Bold"/>
+                <a:ea typeface="DM Sans Bold"/>
+                <a:cs typeface="DM Sans Bold"/>
+                <a:sym typeface="DM Sans Bold"/>
+                <a:hlinkClick r:id="rId7" tooltip="https://dunlo.vercel.app"/>
+              </a:rPr>
+              <a:t>Explore Dunlo · dunlo.vercel.app</a:t>
+            </a:r>
+          </a:p>
+        </p:txBody>
+      </p:sp>
+      <p:sp>
+        <p:nvSpPr>
+          <p:cNvPr name="TextBox 12" id="12"/>
+          <p:cNvSpPr txBox="true"/>
+          <p:nvPr/>
+        </p:nvSpPr>
+        <p:spPr>
+          <a:xfrm rot="0">
+            <a:off x="762000" y="5676900"/>
+            <a:ext cx="10477500" cy="491109"/>
+          </a:xfrm>
+          <a:prstGeom prst="rect">
+            <a:avLst/>
+          </a:prstGeom>
+        </p:spPr>
+        <p:txBody>
+          <a:bodyPr anchor="t" rtlCol="false" tIns="0" lIns="0" bIns="0" rIns="0">
+            <a:spAutoFit/>
+          </a:bodyPr>
+          <a:lstStyle/>
+          <a:p>
+            <a:pPr algn="l" marL="0" indent="0" lvl="0">
+              <a:lnSpc>
+                <a:spcPts val="2013"/>
+              </a:lnSpc>
+              <a:spcBef>
+                <a:spcPct val="0"/>
+              </a:spcBef>
+            </a:pPr>
+            <a:r>
+              <a:rPr lang="en-US" sz="1650" strike="noStrike" u="none">
                 <a:solidFill>
                   <a:srgbClr val="0A2A66"/>
                 </a:solidFill>
@@ -14820,20 +14487,20 @@
                 <a:cs typeface="DM Sans"/>
                 <a:sym typeface="DM Sans"/>
               </a:rPr>
-              <a:t>DECEMBER–FEBRUARY</a:t>
+              <a:t>Matthew Labrador · Paul Recio · Harry Gomez</a:t>
             </a:r>
           </a:p>
           <a:p>
             <a:pPr algn="l" marL="0" indent="0" lvl="0">
               <a:lnSpc>
-                <a:spcPts val="2287"/>
+                <a:spcPts val="2013"/>
               </a:lnSpc>
               <a:spcBef>
                 <a:spcPct val="0"/>
               </a:spcBef>
             </a:pPr>
             <a:r>
-              <a:rPr lang="en-US" sz="1875" strike="noStrike" u="none">
+              <a:rPr lang="en-US" sz="1650" strike="noStrike" u="none">
                 <a:solidFill>
                   <a:srgbClr val="0A2A66"/>
                 </a:solidFill>
@@ -14842,73 +14509,7 @@
                 <a:cs typeface="DM Sans"/>
                 <a:sym typeface="DM Sans"/>
               </a:rPr>
-              <a:t>Gather feedback and refine</a:t>
-            </a:r>
-          </a:p>
-        </p:txBody>
-      </p:sp>
-      <p:sp>
-        <p:nvSpPr>
-          <p:cNvPr name="TextBox 12" id="12"/>
-          <p:cNvSpPr txBox="true"/>
-          <p:nvPr/>
-        </p:nvSpPr>
-        <p:spPr>
-          <a:xfrm rot="0">
-            <a:off x="8858250" y="4686300"/>
-            <a:ext cx="2762250" cy="852488"/>
-          </a:xfrm>
-          <a:prstGeom prst="rect">
-            <a:avLst/>
-          </a:prstGeom>
-        </p:spPr>
-        <p:txBody>
-          <a:bodyPr anchor="t" rtlCol="false" tIns="0" lIns="0" bIns="0" rIns="0">
-            <a:spAutoFit/>
-          </a:bodyPr>
-          <a:lstStyle/>
-          <a:p>
-            <a:pPr algn="l" marL="0" indent="0" lvl="0">
-              <a:lnSpc>
-                <a:spcPts val="2287"/>
-              </a:lnSpc>
-              <a:spcBef>
-                <a:spcPct val="0"/>
-              </a:spcBef>
-            </a:pPr>
-            <a:r>
-              <a:rPr lang="en-US" sz="1875" strike="noStrike" u="none">
-                <a:solidFill>
-                  <a:srgbClr val="0A2A66"/>
-                </a:solidFill>
-                <a:latin typeface="DM Sans"/>
-                <a:ea typeface="DM Sans"/>
-                <a:cs typeface="DM Sans"/>
-                <a:sym typeface="DM Sans"/>
-              </a:rPr>
-              <a:t>MARCH 2027</a:t>
-            </a:r>
-          </a:p>
-          <a:p>
-            <a:pPr algn="l" marL="0" indent="0" lvl="0">
-              <a:lnSpc>
-                <a:spcPts val="2287"/>
-              </a:lnSpc>
-              <a:spcBef>
-                <a:spcPct val="0"/>
-              </a:spcBef>
-            </a:pPr>
-            <a:r>
-              <a:rPr lang="en-US" sz="1875" strike="noStrike" u="none">
-                <a:solidFill>
-                  <a:srgbClr val="0A2A66"/>
-                </a:solidFill>
-                <a:latin typeface="DM Sans"/>
-                <a:ea typeface="DM Sans"/>
-                <a:cs typeface="DM Sans"/>
-                <a:sym typeface="DM Sans"/>
-              </a:rPr>
-              <a:t>Evaluate and plan continuation</a:t>
+              <a:t>Coach: Justin Mesias · University of the Philippines Manila</a:t>
             </a:r>
           </a:p>
         </p:txBody>
@@ -14952,119 +14553,15 @@
             </a:pathLst>
           </a:custGeom>
           <a:blipFill>
-            <a:blip r:embed="rId7">
+            <a:blip r:embed="rId8">
               <a:extLst>
                 <a:ext uri="{96DAC541-7B7A-43D3-8B79-37D633B846F1}">
-                  <asvg:svgBlip xmlns:asvg="http://schemas.microsoft.com/office/drawing/2016/SVG/main" r:embed="rId8"/>
+                  <asvg:svgBlip xmlns:asvg="http://schemas.microsoft.com/office/drawing/2016/SVG/main" r:embed="rId9"/>
                 </a:ext>
               </a:extLst>
             </a:blip>
             <a:stretch>
               <a:fillRect l="0" t="0" r="0" b="0"/>
-            </a:stretch>
-          </a:blipFill>
-        </p:spPr>
-      </p:sp>
-      <p:sp>
-        <p:nvSpPr>
-          <p:cNvPr name="Freeform 14" id="14" descr="A smooth route through focused study and return"/>
-          <p:cNvSpPr/>
-          <p:nvPr/>
-        </p:nvSpPr>
-        <p:spPr>
-          <a:xfrm flipH="false" flipV="false" rot="0">
-            <a:off x="1619250" y="3238500"/>
-            <a:ext cx="9525000" cy="1400735"/>
-          </a:xfrm>
-          <a:custGeom>
-            <a:avLst/>
-            <a:gdLst/>
-            <a:ahLst/>
-            <a:cxnLst/>
-            <a:rect r="r" b="b" t="t" l="l"/>
-            <a:pathLst>
-              <a:path h="1400735" w="9525000">
-                <a:moveTo>
-                  <a:pt x="0" y="0"/>
-                </a:moveTo>
-                <a:lnTo>
-                  <a:pt x="9525000" y="0"/>
-                </a:lnTo>
-                <a:lnTo>
-                  <a:pt x="9525000" y="1400735"/>
-                </a:lnTo>
-                <a:lnTo>
-                  <a:pt x="0" y="1400735"/>
-                </a:lnTo>
-                <a:lnTo>
-                  <a:pt x="0" y="0"/>
-                </a:lnTo>
-                <a:close/>
-              </a:path>
-            </a:pathLst>
-          </a:custGeom>
-          <a:blipFill>
-            <a:blip r:embed="rId9">
-              <a:extLst>
-                <a:ext uri="{96DAC541-7B7A-43D3-8B79-37D633B846F1}">
-                  <asvg:svgBlip xmlns:asvg="http://schemas.microsoft.com/office/drawing/2016/SVG/main" r:embed="rId10"/>
-                </a:ext>
-              </a:extLst>
-            </a:blip>
-            <a:stretch>
-              <a:fillRect l="0" t="0" r="0" b="0"/>
-            </a:stretch>
-          </a:blipFill>
-        </p:spPr>
-      </p:sp>
-      <p:sp>
-        <p:nvSpPr>
-          <p:cNvPr name="Freeform 15" id="15" descr="Learning destination"/>
-          <p:cNvSpPr/>
-          <p:nvPr/>
-        </p:nvSpPr>
-        <p:spPr>
-          <a:xfrm flipH="false" flipV="false" rot="0">
-            <a:off x="9667875" y="2971800"/>
-            <a:ext cx="342900" cy="457755"/>
-          </a:xfrm>
-          <a:custGeom>
-            <a:avLst/>
-            <a:gdLst/>
-            <a:ahLst/>
-            <a:cxnLst/>
-            <a:rect r="r" b="b" t="t" l="l"/>
-            <a:pathLst>
-              <a:path h="457755" w="342900">
-                <a:moveTo>
-                  <a:pt x="0" y="0"/>
-                </a:moveTo>
-                <a:lnTo>
-                  <a:pt x="342900" y="0"/>
-                </a:lnTo>
-                <a:lnTo>
-                  <a:pt x="342900" y="457755"/>
-                </a:lnTo>
-                <a:lnTo>
-                  <a:pt x="0" y="457755"/>
-                </a:lnTo>
-                <a:lnTo>
-                  <a:pt x="0" y="0"/>
-                </a:lnTo>
-                <a:close/>
-              </a:path>
-            </a:pathLst>
-          </a:custGeom>
-          <a:blipFill>
-            <a:blip r:embed="rId11">
-              <a:extLst>
-                <a:ext uri="{96DAC541-7B7A-43D3-8B79-37D633B846F1}">
-                  <asvg:svgBlip xmlns:asvg="http://schemas.microsoft.com/office/drawing/2016/SVG/main" r:embed="rId12"/>
-                </a:ext>
-              </a:extLst>
-            </a:blip>
-            <a:stretch>
-              <a:fillRect l="-60" t="0" r="-60" b="0"/>
             </a:stretch>
           </a:blipFill>
         </p:spPr>
@@ -15370,7 +14867,7 @@
                 <a:cs typeface="DM Sans Bold"/>
                 <a:sym typeface="DM Sans Bold"/>
               </a:rPr>
-              <a:t>Keep the learning going</a:t>
+              <a:t>Research behind the learning design</a:t>
             </a:r>
           </a:p>
         </p:txBody>
@@ -15383,8 +14880,8 @@
         </p:nvSpPr>
         <p:spPr>
           <a:xfrm rot="0">
-            <a:off x="609600" y="2143125"/>
-            <a:ext cx="5429250" cy="604456"/>
+            <a:off x="609600" y="1847850"/>
+            <a:ext cx="5095875" cy="738759"/>
           </a:xfrm>
           <a:prstGeom prst="rect">
             <a:avLst/>
@@ -15398,14 +14895,14 @@
           <a:p>
             <a:pPr algn="l" marL="0" indent="0" lvl="0">
               <a:lnSpc>
-                <a:spcPts val="2470"/>
+                <a:spcPts val="2013"/>
               </a:lnSpc>
               <a:spcBef>
                 <a:spcPct val="0"/>
               </a:spcBef>
             </a:pPr>
             <a:r>
-              <a:rPr lang="en-US" sz="2025" strike="noStrike" u="none">
+              <a:rPr lang="en-US" sz="1650" strike="noStrike" u="none">
                 <a:solidFill>
                   <a:srgbClr val="0A2A66"/>
                 </a:solidFill>
@@ -15413,21 +14910,22 @@
                 <a:ea typeface="DM Sans"/>
                 <a:cs typeface="DM Sans"/>
                 <a:sym typeface="DM Sans"/>
+                <a:hlinkClick r:id="rId7" tooltip="https://www.psychologicalscience.org/journals/pspi/1529100612453266/"/>
               </a:rPr>
-              <a:t>Relevant Khan practice</a:t>
+              <a:t>Dunlosky et al. (2013)</a:t>
             </a:r>
           </a:p>
           <a:p>
             <a:pPr algn="l" marL="0" indent="0" lvl="0">
               <a:lnSpc>
-                <a:spcPts val="2470"/>
+                <a:spcPts val="2013"/>
               </a:lnSpc>
               <a:spcBef>
                 <a:spcPct val="0"/>
               </a:spcBef>
             </a:pPr>
             <a:r>
-              <a:rPr lang="en-US" sz="2025" strike="noStrike" u="none">
+              <a:rPr lang="en-US" sz="1650" strike="noStrike" u="none">
                 <a:solidFill>
                   <a:srgbClr val="0A2A66"/>
                 </a:solidFill>
@@ -15435,43 +14933,22 @@
                 <a:ea typeface="DM Sans"/>
                 <a:cs typeface="DM Sans"/>
                 <a:sym typeface="DM Sans"/>
+                <a:hlinkClick r:id="rId8" tooltip="https://www.psychologicalscience.org/journals/pspi/1529100612453266/"/>
               </a:rPr>
-              <a:t>A useful activity for the same idea.</a:t>
-            </a:r>
-          </a:p>
-        </p:txBody>
-      </p:sp>
-      <p:sp>
-        <p:nvSpPr>
-          <p:cNvPr name="TextBox 11" id="11"/>
-          <p:cNvSpPr txBox="true"/>
-          <p:nvPr/>
-        </p:nvSpPr>
-        <p:spPr>
-          <a:xfrm rot="0">
-            <a:off x="609600" y="3248025"/>
-            <a:ext cx="5429250" cy="604456"/>
-          </a:xfrm>
-          <a:prstGeom prst="rect">
-            <a:avLst/>
-          </a:prstGeom>
-        </p:spPr>
-        <p:txBody>
-          <a:bodyPr anchor="t" rtlCol="false" tIns="0" lIns="0" bIns="0" rIns="0">
-            <a:spAutoFit/>
-          </a:bodyPr>
-          <a:lstStyle/>
+              <a:t>Improving students’ learning with effective</a:t>
+            </a:r>
+          </a:p>
           <a:p>
             <a:pPr algn="l" marL="0" indent="0" lvl="0">
               <a:lnSpc>
-                <a:spcPts val="2470"/>
+                <a:spcPts val="2013"/>
               </a:lnSpc>
               <a:spcBef>
                 <a:spcPct val="0"/>
               </a:spcBef>
             </a:pPr>
             <a:r>
-              <a:rPr lang="en-US" sz="2025" strike="noStrike" u="none">
+              <a:rPr lang="en-US" sz="1650" strike="noStrike" u="none">
                 <a:solidFill>
                   <a:srgbClr val="0A2A66"/>
                 </a:solidFill>
@@ -15479,21 +14956,44 @@
                 <a:ea typeface="DM Sans"/>
                 <a:cs typeface="DM Sans"/>
                 <a:sym typeface="DM Sans"/>
+                <a:hlinkClick r:id="rId9" tooltip="https://www.psychologicalscience.org/journals/pspi/1529100612453266/"/>
               </a:rPr>
-              <a:t>Independent application</a:t>
-            </a:r>
-          </a:p>
+              <a:t>learning techniques. PSPI, 14(1).</a:t>
+            </a:r>
+          </a:p>
+        </p:txBody>
+      </p:sp>
+      <p:sp>
+        <p:nvSpPr>
+          <p:cNvPr name="TextBox 11" id="11"/>
+          <p:cNvSpPr txBox="true"/>
+          <p:nvPr/>
+        </p:nvSpPr>
+        <p:spPr>
+          <a:xfrm rot="0">
+            <a:off x="609600" y="3209925"/>
+            <a:ext cx="5095875" cy="738759"/>
+          </a:xfrm>
+          <a:prstGeom prst="rect">
+            <a:avLst/>
+          </a:prstGeom>
+        </p:spPr>
+        <p:txBody>
+          <a:bodyPr anchor="t" rtlCol="false" tIns="0" lIns="0" bIns="0" rIns="0">
+            <a:spAutoFit/>
+          </a:bodyPr>
+          <a:lstStyle/>
           <a:p>
             <a:pPr algn="l" marL="0" indent="0" lvl="0">
               <a:lnSpc>
-                <a:spcPts val="2470"/>
+                <a:spcPts val="2013"/>
               </a:lnSpc>
               <a:spcBef>
                 <a:spcPct val="0"/>
               </a:spcBef>
             </a:pPr>
             <a:r>
-              <a:rPr lang="en-US" sz="2025" strike="noStrike" u="none">
+              <a:rPr lang="en-US" sz="1650" strike="noStrike" u="none">
                 <a:solidFill>
                   <a:srgbClr val="0A2A66"/>
                 </a:solidFill>
@@ -15501,43 +15001,22 @@
                 <a:ea typeface="DM Sans"/>
                 <a:cs typeface="DM Sans"/>
                 <a:sym typeface="DM Sans"/>
+                <a:hlinkClick r:id="rId10" tooltip="https://doi.org/10.1038/s44159-022-00089-1"/>
               </a:rPr>
-              <a:t>Fresh questions after the explanation.</a:t>
-            </a:r>
-          </a:p>
-        </p:txBody>
-      </p:sp>
-      <p:sp>
-        <p:nvSpPr>
-          <p:cNvPr name="TextBox 12" id="12"/>
-          <p:cNvSpPr txBox="true"/>
-          <p:nvPr/>
-        </p:nvSpPr>
-        <p:spPr>
-          <a:xfrm rot="0">
-            <a:off x="6486525" y="4305300"/>
-            <a:ext cx="5095875" cy="234315"/>
-          </a:xfrm>
-          <a:prstGeom prst="rect">
-            <a:avLst/>
-          </a:prstGeom>
-        </p:spPr>
-        <p:txBody>
-          <a:bodyPr anchor="t" rtlCol="false" tIns="0" lIns="0" bIns="0" rIns="0">
-            <a:spAutoFit/>
-          </a:bodyPr>
-          <a:lstStyle/>
+              <a:t>Carpenter, Pan &amp; Butler (2022)</a:t>
+            </a:r>
+          </a:p>
           <a:p>
             <a:pPr algn="l" marL="0" indent="0" lvl="0">
               <a:lnSpc>
-                <a:spcPts val="1830"/>
+                <a:spcPts val="2013"/>
               </a:lnSpc>
               <a:spcBef>
                 <a:spcPct val="0"/>
               </a:spcBef>
             </a:pPr>
             <a:r>
-              <a:rPr lang="en-US" sz="1500" strike="noStrike" u="none">
+              <a:rPr lang="en-US" sz="1650" strike="noStrike" u="none">
                 <a:solidFill>
                   <a:srgbClr val="0A2A66"/>
                 </a:solidFill>
@@ -15545,44 +15024,22 @@
                 <a:ea typeface="DM Sans"/>
                 <a:cs typeface="DM Sans"/>
                 <a:sym typeface="DM Sans"/>
-                <a:hlinkClick r:id="rId7" tooltip="https://pubmed.ncbi.nlm.nih.gov/23576743/"/>
+                <a:hlinkClick r:id="rId11" tooltip="https://doi.org/10.1038/s44159-022-00089-1"/>
               </a:rPr>
-              <a:t>Learning evidence: retrieval research</a:t>
-            </a:r>
-          </a:p>
-        </p:txBody>
-      </p:sp>
-      <p:sp>
-        <p:nvSpPr>
-          <p:cNvPr name="TextBox 13" id="13"/>
-          <p:cNvSpPr txBox="true"/>
-          <p:nvPr/>
-        </p:nvSpPr>
-        <p:spPr>
-          <a:xfrm rot="0">
-            <a:off x="6486525" y="2228850"/>
-            <a:ext cx="5095875" cy="234315"/>
-          </a:xfrm>
-          <a:prstGeom prst="rect">
-            <a:avLst/>
-          </a:prstGeom>
-        </p:spPr>
-        <p:txBody>
-          <a:bodyPr anchor="t" rtlCol="false" tIns="0" lIns="0" bIns="0" rIns="0">
-            <a:spAutoFit/>
-          </a:bodyPr>
-          <a:lstStyle/>
+              <a:t>The science of effective learning with spacing</a:t>
+            </a:r>
+          </a:p>
           <a:p>
             <a:pPr algn="l" marL="0" indent="0" lvl="0">
               <a:lnSpc>
-                <a:spcPts val="1830"/>
+                <a:spcPts val="2013"/>
               </a:lnSpc>
               <a:spcBef>
                 <a:spcPct val="0"/>
               </a:spcBef>
             </a:pPr>
             <a:r>
-              <a:rPr lang="en-US" sz="1500" strike="noStrike" u="none">
+              <a:rPr lang="en-US" sz="1650" strike="noStrike" u="none">
                 <a:solidFill>
                   <a:srgbClr val="0A2A66"/>
                 </a:solidFill>
@@ -15590,23 +15047,23 @@
                 <a:ea typeface="DM Sans"/>
                 <a:cs typeface="DM Sans"/>
                 <a:sym typeface="DM Sans"/>
-                <a:hlinkClick r:id="rId8" tooltip="https://enactus.ph/2026-national-competition/khan-academy-challenge"/>
+                <a:hlinkClick r:id="rId12" tooltip="https://doi.org/10.1038/s44159-022-00089-1"/>
               </a:rPr>
-              <a:t>KEIC 2026: challenge and mechanics</a:t>
-            </a:r>
-          </a:p>
-        </p:txBody>
-      </p:sp>
-      <p:sp>
-        <p:nvSpPr>
-          <p:cNvPr name="TextBox 14" id="14"/>
+              <a:t>and retrieval practice. Nature Reviews Psychology.</a:t>
+            </a:r>
+          </a:p>
+        </p:txBody>
+      </p:sp>
+      <p:sp>
+        <p:nvSpPr>
+          <p:cNvPr name="TextBox 12" id="12"/>
           <p:cNvSpPr txBox="true"/>
           <p:nvPr/>
         </p:nvSpPr>
         <p:spPr>
           <a:xfrm rot="0">
-            <a:off x="6486525" y="3238500"/>
-            <a:ext cx="5095875" cy="234315"/>
+            <a:off x="6429375" y="4572000"/>
+            <a:ext cx="5095875" cy="986409"/>
           </a:xfrm>
           <a:prstGeom prst="rect">
             <a:avLst/>
@@ -15620,14 +15077,14 @@
           <a:p>
             <a:pPr algn="l" marL="0" indent="0" lvl="0">
               <a:lnSpc>
-                <a:spcPts val="1830"/>
+                <a:spcPts val="2013"/>
               </a:lnSpc>
               <a:spcBef>
                 <a:spcPct val="0"/>
               </a:spcBef>
             </a:pPr>
             <a:r>
-              <a:rPr lang="en-US" sz="1500" strike="noStrike" u="none">
+              <a:rPr lang="en-US" sz="1650" strike="noStrike" u="none">
                 <a:solidFill>
                   <a:srgbClr val="0A2A66"/>
                 </a:solidFill>
@@ -15635,44 +15092,22 @@
                 <a:ea typeface="DM Sans"/>
                 <a:cs typeface="DM Sans"/>
                 <a:sym typeface="DM Sans"/>
-                <a:hlinkClick r:id="rId9" tooltip="https://support.khanacademy.org/hc/en-us/articles/202262954-Can-I-use-Khan-Academy-s-videos-name-materials-links-in-my-project"/>
+                <a:hlinkClick r:id="rId13" tooltip="https://doi.org/10.1006/ijhc.2002.1017"/>
               </a:rPr>
-              <a:t>Khan Academy: content and attribution</a:t>
-            </a:r>
-          </a:p>
-        </p:txBody>
-      </p:sp>
-      <p:sp>
-        <p:nvSpPr>
-          <p:cNvPr name="TextBox 15" id="15"/>
-          <p:cNvSpPr txBox="true"/>
-          <p:nvPr/>
-        </p:nvSpPr>
-        <p:spPr>
-          <a:xfrm rot="0">
-            <a:off x="609600" y="4352925"/>
-            <a:ext cx="5429250" cy="604456"/>
-          </a:xfrm>
-          <a:prstGeom prst="rect">
-            <a:avLst/>
-          </a:prstGeom>
-        </p:spPr>
-        <p:txBody>
-          <a:bodyPr anchor="t" rtlCol="false" tIns="0" lIns="0" bIns="0" rIns="0">
-            <a:spAutoFit/>
-          </a:bodyPr>
-          <a:lstStyle/>
+              <a:t>Tversky, Morrison &amp; Bétrancourt (2002)</a:t>
+            </a:r>
+          </a:p>
           <a:p>
             <a:pPr algn="l" marL="0" indent="0" lvl="0">
               <a:lnSpc>
-                <a:spcPts val="2470"/>
+                <a:spcPts val="2013"/>
               </a:lnSpc>
               <a:spcBef>
                 <a:spcPct val="0"/>
               </a:spcBef>
             </a:pPr>
             <a:r>
-              <a:rPr lang="en-US" sz="2025" strike="noStrike" u="none">
+              <a:rPr lang="en-US" sz="1650" strike="noStrike" u="none">
                 <a:solidFill>
                   <a:srgbClr val="0A2A66"/>
                 </a:solidFill>
@@ -15680,21 +15115,22 @@
                 <a:ea typeface="DM Sans"/>
                 <a:cs typeface="DM Sans"/>
                 <a:sym typeface="DM Sans"/>
+                <a:hlinkClick r:id="rId14" tooltip="https://doi.org/10.1006/ijhc.2002.1017"/>
               </a:rPr>
-              <a:t>Later review</a:t>
+              <a:t>Animation: can it facilitate?</a:t>
             </a:r>
           </a:p>
           <a:p>
             <a:pPr algn="l" marL="0" indent="0" lvl="0">
               <a:lnSpc>
-                <a:spcPts val="2470"/>
+                <a:spcPts val="2013"/>
               </a:lnSpc>
               <a:spcBef>
                 <a:spcPct val="0"/>
               </a:spcBef>
             </a:pPr>
             <a:r>
-              <a:rPr lang="en-US" sz="2025" strike="noStrike" u="none">
+              <a:rPr lang="en-US" sz="1650" strike="noStrike" u="none">
                 <a:solidFill>
                   <a:srgbClr val="0A2A66"/>
                 </a:solidFill>
@@ -15702,43 +15138,22 @@
                 <a:ea typeface="DM Sans"/>
                 <a:cs typeface="DM Sans"/>
                 <a:sym typeface="DM Sans"/>
+                <a:hlinkClick r:id="rId15" tooltip="https://doi.org/10.1006/ijhc.2002.1017"/>
               </a:rPr>
-              <a:t>A clear reason to return.</a:t>
-            </a:r>
-          </a:p>
-        </p:txBody>
-      </p:sp>
-      <p:sp>
-        <p:nvSpPr>
-          <p:cNvPr name="TextBox 16" id="16"/>
-          <p:cNvSpPr txBox="true"/>
-          <p:nvPr/>
-        </p:nvSpPr>
-        <p:spPr>
-          <a:xfrm rot="0">
-            <a:off x="609600" y="5734050"/>
-            <a:ext cx="10668000" cy="462915"/>
-          </a:xfrm>
-          <a:prstGeom prst="rect">
-            <a:avLst/>
-          </a:prstGeom>
-        </p:spPr>
-        <p:txBody>
-          <a:bodyPr anchor="t" rtlCol="false" tIns="0" lIns="0" bIns="0" rIns="0">
-            <a:spAutoFit/>
-          </a:bodyPr>
-          <a:lstStyle/>
+              <a:t>International Journal of</a:t>
+            </a:r>
+          </a:p>
           <a:p>
             <a:pPr algn="l" marL="0" indent="0" lvl="0">
               <a:lnSpc>
-                <a:spcPts val="1830"/>
+                <a:spcPts val="2013"/>
               </a:lnSpc>
               <a:spcBef>
                 <a:spcPct val="0"/>
               </a:spcBef>
             </a:pPr>
             <a:r>
-              <a:rPr lang="en-US" sz="1500" strike="noStrike" u="none">
+              <a:rPr lang="en-US" sz="1650" strike="noStrike" u="none">
                 <a:solidFill>
                   <a:srgbClr val="0A2A66"/>
                 </a:solidFill>
@@ -15746,21 +15161,44 @@
                 <a:ea typeface="DM Sans"/>
                 <a:cs typeface="DM Sans"/>
                 <a:sym typeface="DM Sans"/>
+                <a:hlinkClick r:id="rId16" tooltip="https://doi.org/10.1006/ijhc.2002.1017"/>
               </a:rPr>
-              <a:t>Matthew Labrador · Paul Recio · Harry Gomez</a:t>
-            </a:r>
-          </a:p>
+              <a:t>Human-Computer Studies, 57(4).</a:t>
+            </a:r>
+          </a:p>
+        </p:txBody>
+      </p:sp>
+      <p:sp>
+        <p:nvSpPr>
+          <p:cNvPr name="TextBox 13" id="13"/>
+          <p:cNvSpPr txBox="true"/>
+          <p:nvPr/>
+        </p:nvSpPr>
+        <p:spPr>
+          <a:xfrm rot="0">
+            <a:off x="6429375" y="1847850"/>
+            <a:ext cx="5095875" cy="986409"/>
+          </a:xfrm>
+          <a:prstGeom prst="rect">
+            <a:avLst/>
+          </a:prstGeom>
+        </p:spPr>
+        <p:txBody>
+          <a:bodyPr anchor="t" rtlCol="false" tIns="0" lIns="0" bIns="0" rIns="0">
+            <a:spAutoFit/>
+          </a:bodyPr>
+          <a:lstStyle/>
           <a:p>
             <a:pPr algn="l" marL="0" indent="0" lvl="0">
               <a:lnSpc>
-                <a:spcPts val="1830"/>
+                <a:spcPts val="2013"/>
               </a:lnSpc>
               <a:spcBef>
                 <a:spcPct val="0"/>
               </a:spcBef>
             </a:pPr>
             <a:r>
-              <a:rPr lang="en-US" sz="1500" strike="noStrike" u="none">
+              <a:rPr lang="en-US" sz="1650" strike="noStrike" u="none">
                 <a:solidFill>
                   <a:srgbClr val="0A2A66"/>
                 </a:solidFill>
@@ -15768,8 +15206,374 @@
                 <a:ea typeface="DM Sans"/>
                 <a:cs typeface="DM Sans"/>
                 <a:sym typeface="DM Sans"/>
+                <a:hlinkClick r:id="rId17" tooltip="https://eric.ed.gov/?id=EJ678596"/>
               </a:rPr>
-              <a:t>Coach: Justin Mesias · University of the Philippines Manila</a:t>
+              <a:t>Atkinson, Renkl &amp; Merrill (2003)</a:t>
+            </a:r>
+          </a:p>
+          <a:p>
+            <a:pPr algn="l" marL="0" indent="0" lvl="0">
+              <a:lnSpc>
+                <a:spcPts val="2013"/>
+              </a:lnSpc>
+              <a:spcBef>
+                <a:spcPct val="0"/>
+              </a:spcBef>
+            </a:pPr>
+            <a:r>
+              <a:rPr lang="en-US" sz="1650" strike="noStrike" u="none">
+                <a:solidFill>
+                  <a:srgbClr val="0A2A66"/>
+                </a:solidFill>
+                <a:latin typeface="DM Sans"/>
+                <a:ea typeface="DM Sans"/>
+                <a:cs typeface="DM Sans"/>
+                <a:sym typeface="DM Sans"/>
+                <a:hlinkClick r:id="rId18" tooltip="https://eric.ed.gov/?id=EJ678596"/>
+              </a:rPr>
+              <a:t>Transitioning from studying examples</a:t>
+            </a:r>
+          </a:p>
+          <a:p>
+            <a:pPr algn="l" marL="0" indent="0" lvl="0">
+              <a:lnSpc>
+                <a:spcPts val="2013"/>
+              </a:lnSpc>
+              <a:spcBef>
+                <a:spcPct val="0"/>
+              </a:spcBef>
+            </a:pPr>
+            <a:r>
+              <a:rPr lang="en-US" sz="1650" strike="noStrike" u="none">
+                <a:solidFill>
+                  <a:srgbClr val="0A2A66"/>
+                </a:solidFill>
+                <a:latin typeface="DM Sans"/>
+                <a:ea typeface="DM Sans"/>
+                <a:cs typeface="DM Sans"/>
+                <a:sym typeface="DM Sans"/>
+                <a:hlinkClick r:id="rId19" tooltip="https://eric.ed.gov/?id=EJ678596"/>
+              </a:rPr>
+              <a:t>to solving problems.</a:t>
+            </a:r>
+          </a:p>
+          <a:p>
+            <a:pPr algn="l" marL="0" indent="0" lvl="0">
+              <a:lnSpc>
+                <a:spcPts val="2013"/>
+              </a:lnSpc>
+              <a:spcBef>
+                <a:spcPct val="0"/>
+              </a:spcBef>
+            </a:pPr>
+            <a:r>
+              <a:rPr lang="en-US" sz="1650" strike="noStrike" u="none">
+                <a:solidFill>
+                  <a:srgbClr val="0A2A66"/>
+                </a:solidFill>
+                <a:latin typeface="DM Sans"/>
+                <a:ea typeface="DM Sans"/>
+                <a:cs typeface="DM Sans"/>
+                <a:sym typeface="DM Sans"/>
+                <a:hlinkClick r:id="rId20" tooltip="https://eric.ed.gov/?id=EJ678596"/>
+              </a:rPr>
+              <a:t>Journal of Educational Psychology, 95(4).</a:t>
+            </a:r>
+          </a:p>
+        </p:txBody>
+      </p:sp>
+      <p:sp>
+        <p:nvSpPr>
+          <p:cNvPr name="TextBox 14" id="14"/>
+          <p:cNvSpPr txBox="true"/>
+          <p:nvPr/>
+        </p:nvSpPr>
+        <p:spPr>
+          <a:xfrm rot="0">
+            <a:off x="6429375" y="3209925"/>
+            <a:ext cx="5095875" cy="986409"/>
+          </a:xfrm>
+          <a:prstGeom prst="rect">
+            <a:avLst/>
+          </a:prstGeom>
+        </p:spPr>
+        <p:txBody>
+          <a:bodyPr anchor="t" rtlCol="false" tIns="0" lIns="0" bIns="0" rIns="0">
+            <a:spAutoFit/>
+          </a:bodyPr>
+          <a:lstStyle/>
+          <a:p>
+            <a:pPr algn="l" marL="0" indent="0" lvl="0">
+              <a:lnSpc>
+                <a:spcPts val="2013"/>
+              </a:lnSpc>
+              <a:spcBef>
+                <a:spcPct val="0"/>
+              </a:spcBef>
+            </a:pPr>
+            <a:r>
+              <a:rPr lang="en-US" sz="1650" strike="noStrike" u="none">
+                <a:solidFill>
+                  <a:srgbClr val="0A2A66"/>
+                </a:solidFill>
+                <a:latin typeface="DM Sans"/>
+                <a:ea typeface="DM Sans"/>
+                <a:cs typeface="DM Sans"/>
+                <a:sym typeface="DM Sans"/>
+                <a:hlinkClick r:id="rId21" tooltip="https://doi.org/10.1080/00461520.2014.965823"/>
+              </a:rPr>
+              <a:t>Chi &amp; Wylie (2014)</a:t>
+            </a:r>
+          </a:p>
+          <a:p>
+            <a:pPr algn="l" marL="0" indent="0" lvl="0">
+              <a:lnSpc>
+                <a:spcPts val="2013"/>
+              </a:lnSpc>
+              <a:spcBef>
+                <a:spcPct val="0"/>
+              </a:spcBef>
+            </a:pPr>
+            <a:r>
+              <a:rPr lang="en-US" sz="1650" strike="noStrike" u="none">
+                <a:solidFill>
+                  <a:srgbClr val="0A2A66"/>
+                </a:solidFill>
+                <a:latin typeface="DM Sans"/>
+                <a:ea typeface="DM Sans"/>
+                <a:cs typeface="DM Sans"/>
+                <a:sym typeface="DM Sans"/>
+                <a:hlinkClick r:id="rId22" tooltip="https://doi.org/10.1080/00461520.2014.965823"/>
+              </a:rPr>
+              <a:t>The ICAP framework: linking cognitive</a:t>
+            </a:r>
+          </a:p>
+          <a:p>
+            <a:pPr algn="l" marL="0" indent="0" lvl="0">
+              <a:lnSpc>
+                <a:spcPts val="2013"/>
+              </a:lnSpc>
+              <a:spcBef>
+                <a:spcPct val="0"/>
+              </a:spcBef>
+            </a:pPr>
+            <a:r>
+              <a:rPr lang="en-US" sz="1650" strike="noStrike" u="none">
+                <a:solidFill>
+                  <a:srgbClr val="0A2A66"/>
+                </a:solidFill>
+                <a:latin typeface="DM Sans"/>
+                <a:ea typeface="DM Sans"/>
+                <a:cs typeface="DM Sans"/>
+                <a:sym typeface="DM Sans"/>
+                <a:hlinkClick r:id="rId23" tooltip="https://doi.org/10.1080/00461520.2014.965823"/>
+              </a:rPr>
+              <a:t>engagement to active learning outcomes.</a:t>
+            </a:r>
+          </a:p>
+          <a:p>
+            <a:pPr algn="l" marL="0" indent="0" lvl="0">
+              <a:lnSpc>
+                <a:spcPts val="2013"/>
+              </a:lnSpc>
+              <a:spcBef>
+                <a:spcPct val="0"/>
+              </a:spcBef>
+            </a:pPr>
+            <a:r>
+              <a:rPr lang="en-US" sz="1650" strike="noStrike" u="none">
+                <a:solidFill>
+                  <a:srgbClr val="0A2A66"/>
+                </a:solidFill>
+                <a:latin typeface="DM Sans"/>
+                <a:ea typeface="DM Sans"/>
+                <a:cs typeface="DM Sans"/>
+                <a:sym typeface="DM Sans"/>
+                <a:hlinkClick r:id="rId24" tooltip="https://doi.org/10.1080/00461520.2014.965823"/>
+              </a:rPr>
+              <a:t>Educational Psychologist, 49(4).</a:t>
+            </a:r>
+          </a:p>
+        </p:txBody>
+      </p:sp>
+      <p:sp>
+        <p:nvSpPr>
+          <p:cNvPr name="TextBox 15" id="15"/>
+          <p:cNvSpPr txBox="true"/>
+          <p:nvPr/>
+        </p:nvSpPr>
+        <p:spPr>
+          <a:xfrm rot="0">
+            <a:off x="609600" y="4572000"/>
+            <a:ext cx="5095875" cy="986409"/>
+          </a:xfrm>
+          <a:prstGeom prst="rect">
+            <a:avLst/>
+          </a:prstGeom>
+        </p:spPr>
+        <p:txBody>
+          <a:bodyPr anchor="t" rtlCol="false" tIns="0" lIns="0" bIns="0" rIns="0">
+            <a:spAutoFit/>
+          </a:bodyPr>
+          <a:lstStyle/>
+          <a:p>
+            <a:pPr algn="l" marL="0" indent="0" lvl="0">
+              <a:lnSpc>
+                <a:spcPts val="2013"/>
+              </a:lnSpc>
+              <a:spcBef>
+                <a:spcPct val="0"/>
+              </a:spcBef>
+            </a:pPr>
+            <a:r>
+              <a:rPr lang="en-US" sz="1650" strike="noStrike" u="none">
+                <a:solidFill>
+                  <a:srgbClr val="0A2A66"/>
+                </a:solidFill>
+                <a:latin typeface="DM Sans"/>
+                <a:ea typeface="DM Sans"/>
+                <a:cs typeface="DM Sans"/>
+                <a:sym typeface="DM Sans"/>
+                <a:hlinkClick r:id="rId25" tooltip="https://pubmed.ncbi.nlm.nih.gov/33683913/"/>
+              </a:rPr>
+              <a:t>Yang et al. (2021)</a:t>
+            </a:r>
+          </a:p>
+          <a:p>
+            <a:pPr algn="l" marL="0" indent="0" lvl="0">
+              <a:lnSpc>
+                <a:spcPts val="2013"/>
+              </a:lnSpc>
+              <a:spcBef>
+                <a:spcPct val="0"/>
+              </a:spcBef>
+            </a:pPr>
+            <a:r>
+              <a:rPr lang="en-US" sz="1650" strike="noStrike" u="none">
+                <a:solidFill>
+                  <a:srgbClr val="0A2A66"/>
+                </a:solidFill>
+                <a:latin typeface="DM Sans"/>
+                <a:ea typeface="DM Sans"/>
+                <a:cs typeface="DM Sans"/>
+                <a:sym typeface="DM Sans"/>
+                <a:hlinkClick r:id="rId26" tooltip="https://pubmed.ncbi.nlm.nih.gov/33683913/"/>
+              </a:rPr>
+              <a:t>Testing (quizzing) boosts classroom learning:</a:t>
+            </a:r>
+          </a:p>
+          <a:p>
+            <a:pPr algn="l" marL="0" indent="0" lvl="0">
+              <a:lnSpc>
+                <a:spcPts val="2013"/>
+              </a:lnSpc>
+              <a:spcBef>
+                <a:spcPct val="0"/>
+              </a:spcBef>
+            </a:pPr>
+            <a:r>
+              <a:rPr lang="en-US" sz="1650" strike="noStrike" u="none">
+                <a:solidFill>
+                  <a:srgbClr val="0A2A66"/>
+                </a:solidFill>
+                <a:latin typeface="DM Sans"/>
+                <a:ea typeface="DM Sans"/>
+                <a:cs typeface="DM Sans"/>
+                <a:sym typeface="DM Sans"/>
+                <a:hlinkClick r:id="rId27" tooltip="https://pubmed.ncbi.nlm.nih.gov/33683913/"/>
+              </a:rPr>
+              <a:t>a systematic and meta-analytic review.</a:t>
+            </a:r>
+          </a:p>
+          <a:p>
+            <a:pPr algn="l" marL="0" indent="0" lvl="0">
+              <a:lnSpc>
+                <a:spcPts val="2013"/>
+              </a:lnSpc>
+              <a:spcBef>
+                <a:spcPct val="0"/>
+              </a:spcBef>
+            </a:pPr>
+            <a:r>
+              <a:rPr lang="en-US" sz="1650" strike="noStrike" u="none">
+                <a:solidFill>
+                  <a:srgbClr val="0A2A66"/>
+                </a:solidFill>
+                <a:latin typeface="DM Sans"/>
+                <a:ea typeface="DM Sans"/>
+                <a:cs typeface="DM Sans"/>
+                <a:sym typeface="DM Sans"/>
+                <a:hlinkClick r:id="rId28" tooltip="https://pubmed.ncbi.nlm.nih.gov/33683913/"/>
+              </a:rPr>
+              <a:t>Psychological Bulletin, 147(4).</a:t>
+            </a:r>
+          </a:p>
+        </p:txBody>
+      </p:sp>
+      <p:sp>
+        <p:nvSpPr>
+          <p:cNvPr name="TextBox 16" id="16"/>
+          <p:cNvSpPr txBox="true"/>
+          <p:nvPr/>
+        </p:nvSpPr>
+        <p:spPr>
+          <a:xfrm rot="0">
+            <a:off x="609600" y="6019800"/>
+            <a:ext cx="10477500" cy="396621"/>
+          </a:xfrm>
+          <a:prstGeom prst="rect">
+            <a:avLst/>
+          </a:prstGeom>
+        </p:spPr>
+        <p:txBody>
+          <a:bodyPr anchor="t" rtlCol="false" tIns="0" lIns="0" bIns="0" rIns="0">
+            <a:spAutoFit/>
+          </a:bodyPr>
+          <a:lstStyle/>
+          <a:p>
+            <a:pPr algn="l" marL="0" indent="0" lvl="0">
+              <a:lnSpc>
+                <a:spcPts val="1647"/>
+              </a:lnSpc>
+              <a:spcBef>
+                <a:spcPct val="0"/>
+              </a:spcBef>
+            </a:pPr>
+            <a:r>
+              <a:rPr lang="en-US" sz="1350" strike="noStrike" u="none">
+                <a:solidFill>
+                  <a:srgbClr val="0A2A66"/>
+                </a:solidFill>
+                <a:latin typeface="DM Sans"/>
+                <a:ea typeface="DM Sans"/>
+                <a:cs typeface="DM Sans"/>
+                <a:sym typeface="DM Sans"/>
+                <a:hlinkClick r:id="rId29" tooltip="https://pubmed.ncbi.nlm.nih.gov/23576743/"/>
+              </a:rPr>
+              <a:t>Szpunar, Khan &amp; Schacter (2013) · Interpolated memory tests reduce mind wandering</a:t>
+            </a:r>
+          </a:p>
+          <a:p>
+            <a:pPr algn="l" marL="0" indent="0" lvl="0">
+              <a:lnSpc>
+                <a:spcPts val="1647"/>
+              </a:lnSpc>
+              <a:spcBef>
+                <a:spcPct val="0"/>
+              </a:spcBef>
+            </a:pPr>
+            <a:r>
+              <a:rPr lang="en-US" sz="1350" strike="noStrike" u="none">
+                <a:solidFill>
+                  <a:srgbClr val="0A2A66"/>
+                </a:solidFill>
+                <a:latin typeface="DM Sans"/>
+                <a:ea typeface="DM Sans"/>
+                <a:cs typeface="DM Sans"/>
+                <a:sym typeface="DM Sans"/>
+                <a:hlinkClick r:id="rId30" tooltip="https://pubmed.ncbi.nlm.nih.gov/23576743/"/>
+              </a:rPr>
+              <a:t>and improve learning of online lectures. PNAS, 110(16).</a:t>
             </a:r>
           </a:p>
         </p:txBody>
@@ -15837,10 +15641,10 @@
             </a:pathLst>
           </a:custGeom>
           <a:blipFill>
-            <a:blip r:embed="rId10">
+            <a:blip r:embed="rId31">
               <a:extLst>
                 <a:ext uri="{96DAC541-7B7A-43D3-8B79-37D633B846F1}">
-                  <asvg:svgBlip xmlns:asvg="http://schemas.microsoft.com/office/drawing/2016/SVG/main" r:embed="rId11"/>
+                  <asvg:svgBlip xmlns:asvg="http://schemas.microsoft.com/office/drawing/2016/SVG/main" r:embed="rId32"/>
                 </a:ext>
               </a:extLst>
             </a:blip>
@@ -16151,7 +15955,7 @@
                 <a:cs typeface="DM Sans Bold"/>
                 <a:sym typeface="DM Sans Bold"/>
               </a:rPr>
-              <a:t>Starting is only the first step</a:t>
+              <a:t>Dunlo turns discovery into practice</a:t>
             </a:r>
           </a:p>
         </p:txBody>
@@ -16195,7 +15999,7 @@
                 <a:cs typeface="DM Sans"/>
                 <a:sym typeface="DM Sans"/>
               </a:rPr>
-              <a:t>An interesting explanation needs a useful continuation.</a:t>
+              <a:t>A short-form learning feed with a clear path into Khan Academy.</a:t>
             </a:r>
           </a:p>
         </p:txBody>
@@ -16258,7 +16062,7 @@
                 <a:cs typeface="DM Sans"/>
                 <a:sym typeface="DM Sans"/>
               </a:rPr>
-              <a:t>Where do I begin?</a:t>
+              <a:t>Easy to start</a:t>
             </a:r>
           </a:p>
         </p:txBody>
@@ -16271,8 +16075,8 @@
         </p:nvSpPr>
         <p:spPr>
           <a:xfrm rot="0">
-            <a:off x="838200" y="3638550"/>
-            <a:ext cx="4191000" cy="271653"/>
+            <a:off x="838200" y="3486150"/>
+            <a:ext cx="4191000" cy="547878"/>
           </a:xfrm>
           <a:prstGeom prst="rect">
             <a:avLst/>
@@ -16302,31 +16106,9 @@
                 <a:cs typeface="DM Sans"/>
                 <a:sym typeface="DM Sans"/>
               </a:rPr>
-              <a:t>Choose an approachable idea.</a:t>
-            </a:r>
-          </a:p>
-        </p:txBody>
-      </p:sp>
-      <p:sp>
-        <p:nvSpPr>
-          <p:cNvPr name="TextBox 14" id="14"/>
-          <p:cNvSpPr txBox="true"/>
-          <p:nvPr/>
-        </p:nvSpPr>
-        <p:spPr>
-          <a:xfrm rot="0">
-            <a:off x="838200" y="4371975"/>
-            <a:ext cx="4191000" cy="271653"/>
-          </a:xfrm>
-          <a:prstGeom prst="rect">
-            <a:avLst/>
-          </a:prstGeom>
-        </p:spPr>
-        <p:txBody>
-          <a:bodyPr anchor="t" rtlCol="false" tIns="0" lIns="0" bIns="0" rIns="0">
-            <a:spAutoFit/>
-          </a:bodyPr>
-          <a:lstStyle/>
+              <a:t>Young learners can start with one idea</a:t>
+            </a:r>
+          </a:p>
           <a:p>
             <a:pPr algn="ctr" marL="0" indent="0" lvl="0">
               <a:lnSpc>
@@ -16346,7 +16128,73 @@
                 <a:cs typeface="DM Sans"/>
                 <a:sym typeface="DM Sans"/>
               </a:rPr>
-              <a:t>Play with it. Follow your curiosity.</a:t>
+              <a:t>in a familiar, scrollable feed.</a:t>
+            </a:r>
+          </a:p>
+        </p:txBody>
+      </p:sp>
+      <p:sp>
+        <p:nvSpPr>
+          <p:cNvPr name="TextBox 14" id="14"/>
+          <p:cNvSpPr txBox="true"/>
+          <p:nvPr/>
+        </p:nvSpPr>
+        <p:spPr>
+          <a:xfrm rot="0">
+            <a:off x="838200" y="4248150"/>
+            <a:ext cx="4191000" cy="547878"/>
+          </a:xfrm>
+          <a:prstGeom prst="rect">
+            <a:avLst/>
+          </a:prstGeom>
+        </p:spPr>
+        <p:txBody>
+          <a:bodyPr anchor="t" rtlCol="false" tIns="0" lIns="0" bIns="0" rIns="0">
+            <a:spAutoFit/>
+          </a:bodyPr>
+          <a:lstStyle/>
+          <a:p>
+            <a:pPr algn="ctr" marL="0" indent="0" lvl="0">
+              <a:lnSpc>
+                <a:spcPts val="2196"/>
+              </a:lnSpc>
+              <a:spcBef>
+                <a:spcPct val="0"/>
+              </a:spcBef>
+            </a:pPr>
+            <a:r>
+              <a:rPr lang="en-US" sz="1800" strike="noStrike" u="none">
+                <a:solidFill>
+                  <a:srgbClr val="0A2A66"/>
+                </a:solidFill>
+                <a:latin typeface="DM Sans"/>
+                <a:ea typeface="DM Sans"/>
+                <a:cs typeface="DM Sans"/>
+                <a:sym typeface="DM Sans"/>
+              </a:rPr>
+              <a:t>Try an interactive model or Khan clip.</a:t>
+            </a:r>
+          </a:p>
+          <a:p>
+            <a:pPr algn="ctr" marL="0" indent="0" lvl="0">
+              <a:lnSpc>
+                <a:spcPts val="2196"/>
+              </a:lnSpc>
+              <a:spcBef>
+                <a:spcPct val="0"/>
+              </a:spcBef>
+            </a:pPr>
+            <a:r>
+              <a:rPr lang="en-US" sz="1800" strike="noStrike" u="none">
+                <a:solidFill>
+                  <a:srgbClr val="0A2A66"/>
+                </a:solidFill>
+                <a:latin typeface="DM Sans"/>
+                <a:ea typeface="DM Sans"/>
+                <a:cs typeface="DM Sans"/>
+                <a:sym typeface="DM Sans"/>
+              </a:rPr>
+              <a:t>Make a prediction and see why.</a:t>
             </a:r>
           </a:p>
         </p:txBody>
@@ -16522,8 +16370,8 @@
         </p:nvSpPr>
         <p:spPr>
           <a:xfrm rot="0">
-            <a:off x="609600" y="5543550"/>
-            <a:ext cx="10972800" cy="196787"/>
+            <a:off x="609600" y="5676900"/>
+            <a:ext cx="10972800" cy="262318"/>
           </a:xfrm>
           <a:prstGeom prst="rect">
             <a:avLst/>
@@ -16537,14 +16385,14 @@
           <a:p>
             <a:pPr algn="ctr" marL="0" indent="0" lvl="0">
               <a:lnSpc>
-                <a:spcPts val="1555"/>
+                <a:spcPts val="2104"/>
               </a:lnSpc>
               <a:spcBef>
                 <a:spcPct val="0"/>
               </a:spcBef>
             </a:pPr>
             <a:r>
-              <a:rPr lang="en-US" sz="1275" strike="noStrike" u="none">
+              <a:rPr lang="en-US" sz="1725" strike="noStrike" u="none">
                 <a:solidFill>
                   <a:srgbClr val="0A2A66"/>
                 </a:solidFill>
@@ -16552,9 +16400,8 @@
                 <a:ea typeface="DM Sans"/>
                 <a:cs typeface="DM Sans"/>
                 <a:sym typeface="DM Sans"/>
-                <a:hlinkClick r:id="rId7" tooltip="https://enactus.ph/2026-national-competition/khan-academy-challenge#looking-for"/>
               </a:rPr>
-              <a:t>KEIC focus: reach, meaningful engagement and lasting impact</a:t>
+              <a:t>The familiar feed opens the door. Connected practice gives that curiosity somewhere to go.</a:t>
             </a:r>
           </a:p>
         </p:txBody>
@@ -16617,7 +16464,7 @@
                 <a:cs typeface="DM Sans"/>
                 <a:sym typeface="DM Sans"/>
               </a:rPr>
-              <a:t>What comes next?</a:t>
+              <a:t>Clear to continue</a:t>
             </a:r>
           </a:p>
         </p:txBody>
@@ -16630,8 +16477,8 @@
         </p:nvSpPr>
         <p:spPr>
           <a:xfrm rot="0">
-            <a:off x="7162800" y="3638550"/>
-            <a:ext cx="4191000" cy="271653"/>
+            <a:off x="7162800" y="3486150"/>
+            <a:ext cx="4191000" cy="547878"/>
           </a:xfrm>
           <a:prstGeom prst="rect">
             <a:avLst/>
@@ -16661,31 +16508,9 @@
                 <a:cs typeface="DM Sans"/>
                 <a:sym typeface="DM Sans"/>
               </a:rPr>
-              <a:t>Find the relevant practice.</a:t>
-            </a:r>
-          </a:p>
-        </p:txBody>
-      </p:sp>
-      <p:sp>
-        <p:nvSpPr>
-          <p:cNvPr name="TextBox 24" id="24"/>
-          <p:cNvSpPr txBox="true"/>
-          <p:nvPr/>
-        </p:nvSpPr>
-        <p:spPr>
-          <a:xfrm rot="0">
-            <a:off x="7162800" y="4371975"/>
-            <a:ext cx="4191000" cy="271653"/>
-          </a:xfrm>
-          <a:prstGeom prst="rect">
-            <a:avLst/>
-          </a:prstGeom>
-        </p:spPr>
-        <p:txBody>
-          <a:bodyPr anchor="t" rtlCol="false" tIns="0" lIns="0" bIns="0" rIns="0">
-            <a:spAutoFit/>
-          </a:bodyPr>
-          <a:lstStyle/>
+              <a:t>Each idea points to a matching</a:t>
+            </a:r>
+          </a:p>
           <a:p>
             <a:pPr algn="ctr" marL="0" indent="0" lvl="0">
               <a:lnSpc>
@@ -16705,7 +16530,73 @@
                 <a:cs typeface="DM Sans"/>
                 <a:sym typeface="DM Sans"/>
               </a:rPr>
-              <a:t>Get help, then return to the idea.</a:t>
+              <a:t>Khan Academy exercise.</a:t>
+            </a:r>
+          </a:p>
+        </p:txBody>
+      </p:sp>
+      <p:sp>
+        <p:nvSpPr>
+          <p:cNvPr name="TextBox 24" id="24"/>
+          <p:cNvSpPr txBox="true"/>
+          <p:nvPr/>
+        </p:nvSpPr>
+        <p:spPr>
+          <a:xfrm rot="0">
+            <a:off x="7162800" y="4248150"/>
+            <a:ext cx="4191000" cy="547878"/>
+          </a:xfrm>
+          <a:prstGeom prst="rect">
+            <a:avLst/>
+          </a:prstGeom>
+        </p:spPr>
+        <p:txBody>
+          <a:bodyPr anchor="t" rtlCol="false" tIns="0" lIns="0" bIns="0" rIns="0">
+            <a:spAutoFit/>
+          </a:bodyPr>
+          <a:lstStyle/>
+          <a:p>
+            <a:pPr algn="ctr" marL="0" indent="0" lvl="0">
+              <a:lnSpc>
+                <a:spcPts val="2196"/>
+              </a:lnSpc>
+              <a:spcBef>
+                <a:spcPct val="0"/>
+              </a:spcBef>
+            </a:pPr>
+            <a:r>
+              <a:rPr lang="en-US" sz="1800" strike="noStrike" u="none">
+                <a:solidFill>
+                  <a:srgbClr val="0A2A66"/>
+                </a:solidFill>
+                <a:latin typeface="DM Sans"/>
+                <a:ea typeface="DM Sans"/>
+                <a:cs typeface="DM Sans"/>
+                <a:sym typeface="DM Sans"/>
+              </a:rPr>
+              <a:t>Return to Dunlo for a fresh question.</a:t>
+            </a:r>
+          </a:p>
+          <a:p>
+            <a:pPr algn="ctr" marL="0" indent="0" lvl="0">
+              <a:lnSpc>
+                <a:spcPts val="2196"/>
+              </a:lnSpc>
+              <a:spcBef>
+                <a:spcPct val="0"/>
+              </a:spcBef>
+            </a:pPr>
+            <a:r>
+              <a:rPr lang="en-US" sz="1800" strike="noStrike" u="none">
+                <a:solidFill>
+                  <a:srgbClr val="0A2A66"/>
+                </a:solidFill>
+                <a:latin typeface="DM Sans"/>
+                <a:ea typeface="DM Sans"/>
+                <a:cs typeface="DM Sans"/>
+                <a:sym typeface="DM Sans"/>
+              </a:rPr>
+              <a:t>Save the idea to revisit later.</a:t>
             </a:r>
           </a:p>
         </p:txBody>
@@ -16773,10 +16664,10 @@
             </a:pathLst>
           </a:custGeom>
           <a:blipFill>
-            <a:blip r:embed="rId8">
+            <a:blip r:embed="rId7">
               <a:extLst>
                 <a:ext uri="{96DAC541-7B7A-43D3-8B79-37D633B846F1}">
-                  <asvg:svgBlip xmlns:asvg="http://schemas.microsoft.com/office/drawing/2016/SVG/main" r:embed="rId9"/>
+                  <asvg:svgBlip xmlns:asvg="http://schemas.microsoft.com/office/drawing/2016/SVG/main" r:embed="rId8"/>
                 </a:ext>
               </a:extLst>
             </a:blip>
@@ -17087,7 +16978,7 @@
                 <a:cs typeface="DM Sans Bold"/>
                 <a:sym typeface="DM Sans Bold"/>
               </a:rPr>
-              <a:t>The learning journey</a:t>
+              <a:t>How one discovery becomes a learning session</a:t>
             </a:r>
           </a:p>
         </p:txBody>
@@ -17241,7 +17132,7 @@
                 <a:cs typeface="DM Sans"/>
                 <a:sym typeface="DM Sans"/>
               </a:rPr>
-              <a:t>Discover</a:t>
+              <a:t>Choose one</a:t>
             </a:r>
           </a:p>
           <a:p>
@@ -17263,7 +17154,7 @@
                 <a:cs typeface="DM Sans"/>
                 <a:sym typeface="DM Sans"/>
               </a:rPr>
-              <a:t>an idea</a:t>
+              <a:t>short idea</a:t>
             </a:r>
           </a:p>
         </p:txBody>
@@ -17580,7 +17471,7 @@
                 <a:cs typeface="DM Sans"/>
                 <a:sym typeface="DM Sans"/>
               </a:rPr>
-              <a:t>Understand</a:t>
+              <a:t>Predict, then</a:t>
             </a:r>
           </a:p>
           <a:p>
@@ -17602,7 +17493,7 @@
                 <a:cs typeface="DM Sans"/>
                 <a:sym typeface="DM Sans"/>
               </a:rPr>
-              <a:t>what changes</a:t>
+              <a:t>see why</a:t>
             </a:r>
           </a:p>
         </p:txBody>
@@ -18258,7 +18149,7 @@
                 <a:cs typeface="DM Sans"/>
                 <a:sym typeface="DM Sans"/>
               </a:rPr>
-              <a:t>Return and</a:t>
+              <a:t>Answer a fresh</a:t>
             </a:r>
           </a:p>
           <a:p>
@@ -18280,7 +18171,7 @@
                 <a:cs typeface="DM Sans"/>
                 <a:sym typeface="DM Sans"/>
               </a:rPr>
-              <a:t>try it again</a:t>
+              <a:t>question in Dunlo</a:t>
             </a:r>
           </a:p>
         </p:txBody>
@@ -18293,8 +18184,8 @@
         </p:nvSpPr>
         <p:spPr>
           <a:xfrm rot="0">
-            <a:off x="609600" y="5362575"/>
-            <a:ext cx="10972800" cy="262318"/>
+            <a:off x="609600" y="5295900"/>
+            <a:ext cx="10972800" cy="529018"/>
           </a:xfrm>
           <a:prstGeom prst="rect">
             <a:avLst/>
@@ -18323,8 +18214,32 @@
                 <a:ea typeface="DM Sans"/>
                 <a:cs typeface="DM Sans"/>
                 <a:sym typeface="DM Sans"/>
+                <a:hlinkClick r:id="rId7" tooltip="https://ies.ed.gov/ncee/wwc/practiceguide/1"/>
               </a:rPr>
-              <a:t>Useful support keeps the original learning goal within reach.</a:t>
+              <a:t>One topic stays connected across the feed, Khan practice and later review.</a:t>
+            </a:r>
+          </a:p>
+          <a:p>
+            <a:pPr algn="ctr" marL="0" indent="0" lvl="0">
+              <a:lnSpc>
+                <a:spcPts val="2104"/>
+              </a:lnSpc>
+              <a:spcBef>
+                <a:spcPct val="0"/>
+              </a:spcBef>
+            </a:pPr>
+            <a:r>
+              <a:rPr lang="en-US" sz="1725" strike="noStrike" u="none">
+                <a:solidFill>
+                  <a:srgbClr val="0A2A66"/>
+                </a:solidFill>
+                <a:latin typeface="DM Sans"/>
+                <a:ea typeface="DM Sans"/>
+                <a:cs typeface="DM Sans"/>
+                <a:sym typeface="DM Sans"/>
+                <a:hlinkClick r:id="rId8" tooltip="https://ies.ed.gov/ncee/wwc/practiceguide/1"/>
+              </a:rPr>
+              <a:t>Learning design: IES practice guide (2007).</a:t>
             </a:r>
           </a:p>
         </p:txBody>
@@ -18392,10 +18307,10 @@
             </a:pathLst>
           </a:custGeom>
           <a:blipFill>
-            <a:blip r:embed="rId7">
+            <a:blip r:embed="rId9">
               <a:extLst>
                 <a:ext uri="{96DAC541-7B7A-43D3-8B79-37D633B846F1}">
-                  <asvg:svgBlip xmlns:asvg="http://schemas.microsoft.com/office/drawing/2016/SVG/main" r:embed="rId8"/>
+                  <asvg:svgBlip xmlns:asvg="http://schemas.microsoft.com/office/drawing/2016/SVG/main" r:embed="rId10"/>
                 </a:ext>
               </a:extLst>
             </a:blip>
@@ -18649,7 +18564,615 @@
       </p:sp>
       <p:sp>
         <p:nvSpPr>
-          <p:cNvPr name="TextBox 9" id="9"/>
+          <p:cNvPr name="Freeform 9" id="9" descr="Dunlo"/>
+          <p:cNvSpPr/>
+          <p:nvPr/>
+        </p:nvSpPr>
+        <p:spPr>
+          <a:xfrm flipH="false" flipV="false" rot="0">
+            <a:off x="609600" y="38100"/>
+            <a:ext cx="1571625" cy="521160"/>
+          </a:xfrm>
+          <a:custGeom>
+            <a:avLst/>
+            <a:gdLst/>
+            <a:ahLst/>
+            <a:cxnLst/>
+            <a:rect r="r" b="b" t="t" l="l"/>
+            <a:pathLst>
+              <a:path h="521160" w="1571625">
+                <a:moveTo>
+                  <a:pt x="0" y="0"/>
+                </a:moveTo>
+                <a:lnTo>
+                  <a:pt x="1571625" y="0"/>
+                </a:lnTo>
+                <a:lnTo>
+                  <a:pt x="1571625" y="521160"/>
+                </a:lnTo>
+                <a:lnTo>
+                  <a:pt x="0" y="521160"/>
+                </a:lnTo>
+                <a:lnTo>
+                  <a:pt x="0" y="0"/>
+                </a:lnTo>
+                <a:close/>
+              </a:path>
+            </a:pathLst>
+          </a:custGeom>
+          <a:blipFill>
+            <a:blip r:embed="rId7">
+              <a:extLst>
+                <a:ext uri="{96DAC541-7B7A-43D3-8B79-37D633B846F1}">
+                  <asvg:svgBlip xmlns:asvg="http://schemas.microsoft.com/office/drawing/2016/SVG/main" r:embed="rId8"/>
+                </a:ext>
+              </a:extLst>
+            </a:blip>
+            <a:stretch>
+              <a:fillRect l="0" t="0" r="0" b="0"/>
+            </a:stretch>
+          </a:blipFill>
+        </p:spPr>
+      </p:sp>
+      <p:sp>
+        <p:nvSpPr>
+          <p:cNvPr name="TextBox 10" id="10"/>
+          <p:cNvSpPr txBox="true"/>
+          <p:nvPr/>
+        </p:nvSpPr>
+        <p:spPr>
+          <a:xfrm rot="0">
+            <a:off x="609600" y="866775"/>
+            <a:ext cx="10972800" cy="487299"/>
+          </a:xfrm>
+          <a:prstGeom prst="rect">
+            <a:avLst/>
+          </a:prstGeom>
+        </p:spPr>
+        <p:txBody>
+          <a:bodyPr anchor="t" rtlCol="false" tIns="0" lIns="0" bIns="0" rIns="0">
+            <a:spAutoFit/>
+          </a:bodyPr>
+          <a:lstStyle/>
+          <a:p>
+            <a:pPr algn="l" marL="0" indent="0" lvl="0">
+              <a:lnSpc>
+                <a:spcPts val="3843"/>
+              </a:lnSpc>
+              <a:spcBef>
+                <a:spcPct val="0"/>
+              </a:spcBef>
+            </a:pPr>
+            <a:r>
+              <a:rPr lang="en-US" b="true" sz="3150" strike="noStrike" u="none">
+                <a:solidFill>
+                  <a:srgbClr val="0A2A66"/>
+                </a:solidFill>
+                <a:latin typeface="DM Sans Bold"/>
+                <a:ea typeface="DM Sans Bold"/>
+                <a:cs typeface="DM Sans Bold"/>
+                <a:sym typeface="DM Sans Bold"/>
+              </a:rPr>
+              <a:t>Short-form content. Active learning.</a:t>
+            </a:r>
+          </a:p>
+        </p:txBody>
+      </p:sp>
+      <p:sp>
+        <p:nvSpPr>
+          <p:cNvPr name="TextBox 11" id="11"/>
+          <p:cNvSpPr txBox="true"/>
+          <p:nvPr/>
+        </p:nvSpPr>
+        <p:spPr>
+          <a:xfrm rot="0">
+            <a:off x="609600" y="1790700"/>
+            <a:ext cx="7000875" cy="604456"/>
+          </a:xfrm>
+          <a:prstGeom prst="rect">
+            <a:avLst/>
+          </a:prstGeom>
+        </p:spPr>
+        <p:txBody>
+          <a:bodyPr anchor="t" rtlCol="false" tIns="0" lIns="0" bIns="0" rIns="0">
+            <a:spAutoFit/>
+          </a:bodyPr>
+          <a:lstStyle/>
+          <a:p>
+            <a:pPr algn="l" marL="0" indent="0" lvl="0">
+              <a:lnSpc>
+                <a:spcPts val="2470"/>
+              </a:lnSpc>
+              <a:spcBef>
+                <a:spcPct val="0"/>
+              </a:spcBef>
+            </a:pPr>
+            <a:r>
+              <a:rPr lang="en-US" sz="2025" strike="noStrike" u="none">
+                <a:solidFill>
+                  <a:srgbClr val="0A2A66"/>
+                </a:solidFill>
+                <a:latin typeface="DM Sans"/>
+                <a:ea typeface="DM Sans"/>
+                <a:cs typeface="DM Sans"/>
+                <a:sym typeface="DM Sans"/>
+              </a:rPr>
+              <a:t>For learners used to mobile feeds,</a:t>
+            </a:r>
+          </a:p>
+          <a:p>
+            <a:pPr algn="l" marL="0" indent="0" lvl="0">
+              <a:lnSpc>
+                <a:spcPts val="2470"/>
+              </a:lnSpc>
+              <a:spcBef>
+                <a:spcPct val="0"/>
+              </a:spcBef>
+            </a:pPr>
+            <a:r>
+              <a:rPr lang="en-US" sz="2025" strike="noStrike" u="none">
+                <a:solidFill>
+                  <a:srgbClr val="0A2A66"/>
+                </a:solidFill>
+                <a:latin typeface="DM Sans"/>
+                <a:ea typeface="DM Sans"/>
+                <a:cs typeface="DM Sans"/>
+                <a:sym typeface="DM Sans"/>
+              </a:rPr>
+              <a:t>Dunlo makes one idea easy to start.</a:t>
+            </a:r>
+          </a:p>
+        </p:txBody>
+      </p:sp>
+      <p:sp>
+        <p:nvSpPr>
+          <p:cNvPr name="TextBox 12" id="12"/>
+          <p:cNvSpPr txBox="true"/>
+          <p:nvPr/>
+        </p:nvSpPr>
+        <p:spPr>
+          <a:xfrm rot="0">
+            <a:off x="609600" y="2838450"/>
+            <a:ext cx="7048500" cy="393573"/>
+          </a:xfrm>
+          <a:prstGeom prst="rect">
+            <a:avLst/>
+          </a:prstGeom>
+        </p:spPr>
+        <p:txBody>
+          <a:bodyPr anchor="t" rtlCol="false" tIns="0" lIns="0" bIns="0" rIns="0">
+            <a:spAutoFit/>
+          </a:bodyPr>
+          <a:lstStyle/>
+          <a:p>
+            <a:pPr algn="l" marL="0" indent="0" lvl="0">
+              <a:lnSpc>
+                <a:spcPts val="3111"/>
+              </a:lnSpc>
+              <a:spcBef>
+                <a:spcPct val="0"/>
+              </a:spcBef>
+            </a:pPr>
+            <a:r>
+              <a:rPr lang="en-US" b="true" sz="2550" strike="noStrike" u="none">
+                <a:solidFill>
+                  <a:srgbClr val="0A2A66"/>
+                </a:solidFill>
+                <a:latin typeface="DM Sans Bold"/>
+                <a:ea typeface="DM Sans Bold"/>
+                <a:cs typeface="DM Sans Bold"/>
+                <a:sym typeface="DM Sans Bold"/>
+              </a:rPr>
+              <a:t>Scroll. Try. Keep going.</a:t>
+            </a:r>
+          </a:p>
+        </p:txBody>
+      </p:sp>
+      <p:sp>
+        <p:nvSpPr>
+          <p:cNvPr name="TextBox 13" id="13"/>
+          <p:cNvSpPr txBox="true"/>
+          <p:nvPr/>
+        </p:nvSpPr>
+        <p:spPr>
+          <a:xfrm rot="0">
+            <a:off x="609600" y="3448050"/>
+            <a:ext cx="7048500" cy="604456"/>
+          </a:xfrm>
+          <a:prstGeom prst="rect">
+            <a:avLst/>
+          </a:prstGeom>
+        </p:spPr>
+        <p:txBody>
+          <a:bodyPr anchor="t" rtlCol="false" tIns="0" lIns="0" bIns="0" rIns="0">
+            <a:spAutoFit/>
+          </a:bodyPr>
+          <a:lstStyle/>
+          <a:p>
+            <a:pPr algn="l" marL="0" indent="0" lvl="0">
+              <a:lnSpc>
+                <a:spcPts val="2470"/>
+              </a:lnSpc>
+              <a:spcBef>
+                <a:spcPct val="0"/>
+              </a:spcBef>
+            </a:pPr>
+            <a:r>
+              <a:rPr lang="en-US" sz="2025" strike="noStrike" u="none">
+                <a:solidFill>
+                  <a:srgbClr val="0A2A66"/>
+                </a:solidFill>
+                <a:latin typeface="DM Sans"/>
+                <a:ea typeface="DM Sans"/>
+                <a:cs typeface="DM Sans"/>
+                <a:sym typeface="DM Sans"/>
+              </a:rPr>
+              <a:t>Move a slider or watch a focused Khan clip.</a:t>
+            </a:r>
+          </a:p>
+          <a:p>
+            <a:pPr algn="l" marL="0" indent="0" lvl="0">
+              <a:lnSpc>
+                <a:spcPts val="2470"/>
+              </a:lnSpc>
+              <a:spcBef>
+                <a:spcPct val="0"/>
+              </a:spcBef>
+            </a:pPr>
+            <a:r>
+              <a:rPr lang="en-US" sz="2025" strike="noStrike" u="none">
+                <a:solidFill>
+                  <a:srgbClr val="0A2A66"/>
+                </a:solidFill>
+                <a:latin typeface="DM Sans"/>
+                <a:ea typeface="DM Sans"/>
+                <a:cs typeface="DM Sans"/>
+                <a:sym typeface="DM Sans"/>
+              </a:rPr>
+              <a:t>Make a prediction and get an explanation.</a:t>
+            </a:r>
+          </a:p>
+        </p:txBody>
+      </p:sp>
+      <p:sp>
+        <p:nvSpPr>
+          <p:cNvPr name="TextBox 14" id="14"/>
+          <p:cNvSpPr txBox="true"/>
+          <p:nvPr/>
+        </p:nvSpPr>
+        <p:spPr>
+          <a:xfrm rot="0">
+            <a:off x="609600" y="4686300"/>
+            <a:ext cx="7334250" cy="604456"/>
+          </a:xfrm>
+          <a:prstGeom prst="rect">
+            <a:avLst/>
+          </a:prstGeom>
+        </p:spPr>
+        <p:txBody>
+          <a:bodyPr anchor="t" rtlCol="false" tIns="0" lIns="0" bIns="0" rIns="0">
+            <a:spAutoFit/>
+          </a:bodyPr>
+          <a:lstStyle/>
+          <a:p>
+            <a:pPr algn="l" marL="0" indent="0" lvl="0">
+              <a:lnSpc>
+                <a:spcPts val="2470"/>
+              </a:lnSpc>
+              <a:spcBef>
+                <a:spcPct val="0"/>
+              </a:spcBef>
+            </a:pPr>
+            <a:r>
+              <a:rPr lang="en-US" sz="2025" strike="noStrike" u="none">
+                <a:solidFill>
+                  <a:srgbClr val="0A2A66"/>
+                </a:solidFill>
+                <a:latin typeface="DM Sans"/>
+                <a:ea typeface="DM Sans"/>
+                <a:cs typeface="DM Sans"/>
+                <a:sym typeface="DM Sans"/>
+              </a:rPr>
+              <a:t>Follow the idea into a matching Khan exercise.</a:t>
+            </a:r>
+          </a:p>
+          <a:p>
+            <a:pPr algn="l" marL="0" indent="0" lvl="0">
+              <a:lnSpc>
+                <a:spcPts val="2470"/>
+              </a:lnSpc>
+              <a:spcBef>
+                <a:spcPct val="0"/>
+              </a:spcBef>
+            </a:pPr>
+            <a:r>
+              <a:rPr lang="en-US" sz="2025" strike="noStrike" u="none">
+                <a:solidFill>
+                  <a:srgbClr val="0A2A66"/>
+                </a:solidFill>
+                <a:latin typeface="DM Sans"/>
+                <a:ea typeface="DM Sans"/>
+                <a:cs typeface="DM Sans"/>
+                <a:sym typeface="DM Sans"/>
+              </a:rPr>
+              <a:t>Save it for a fresh question later.</a:t>
+            </a:r>
+          </a:p>
+        </p:txBody>
+      </p:sp>
+      <p:sp>
+        <p:nvSpPr>
+          <p:cNvPr name="TextBox 15" id="15"/>
+          <p:cNvSpPr txBox="true"/>
+          <p:nvPr/>
+        </p:nvSpPr>
+        <p:spPr>
+          <a:xfrm rot="0">
+            <a:off x="609600" y="6134100"/>
+            <a:ext cx="7620000" cy="196787"/>
+          </a:xfrm>
+          <a:prstGeom prst="rect">
+            <a:avLst/>
+          </a:prstGeom>
+        </p:spPr>
+        <p:txBody>
+          <a:bodyPr anchor="t" rtlCol="false" tIns="0" lIns="0" bIns="0" rIns="0">
+            <a:spAutoFit/>
+          </a:bodyPr>
+          <a:lstStyle/>
+          <a:p>
+            <a:pPr algn="l" marL="0" indent="0" lvl="0">
+              <a:lnSpc>
+                <a:spcPts val="1555"/>
+              </a:lnSpc>
+              <a:spcBef>
+                <a:spcPct val="0"/>
+              </a:spcBef>
+            </a:pPr>
+            <a:r>
+              <a:rPr lang="en-US" sz="1275" strike="noStrike" u="none">
+                <a:solidFill>
+                  <a:srgbClr val="0A2A66"/>
+                </a:solidFill>
+                <a:latin typeface="DM Sans"/>
+                <a:ea typeface="DM Sans"/>
+                <a:cs typeface="DM Sans"/>
+                <a:sym typeface="DM Sans"/>
+                <a:hlinkClick r:id="rId9" tooltip="https://dunlo.vercel.app/explore"/>
+              </a:rPr>
+              <a:t>Explore the working feed · dunlo.vercel.app/explore</a:t>
+            </a:r>
+          </a:p>
+        </p:txBody>
+      </p:sp>
+      <p:grpSp>
+        <p:nvGrpSpPr>
+          <p:cNvPr name="Group 16" id="16"/>
+          <p:cNvGrpSpPr/>
+          <p:nvPr/>
+        </p:nvGrpSpPr>
+        <p:grpSpPr>
+          <a:xfrm rot="0">
+            <a:off x="8477250" y="1495425"/>
+            <a:ext cx="2343150" cy="4972050"/>
+            <a:chOff x="0" y="0"/>
+            <a:chExt cx="925689" cy="1964267"/>
+          </a:xfrm>
+        </p:grpSpPr>
+        <p:sp>
+          <p:nvSpPr>
+            <p:cNvPr name="Freeform 17" id="17"/>
+            <p:cNvSpPr/>
+            <p:nvPr/>
+          </p:nvSpPr>
+          <p:spPr>
+            <a:xfrm flipH="false" flipV="false" rot="0">
+              <a:off x="0" y="0"/>
+              <a:ext cx="925689" cy="1964267"/>
+            </a:xfrm>
+            <a:custGeom>
+              <a:avLst/>
+              <a:gdLst/>
+              <a:ahLst/>
+              <a:cxnLst/>
+              <a:rect r="r" b="b" t="t" l="l"/>
+              <a:pathLst>
+                <a:path h="1964267" w="925689">
+                  <a:moveTo>
+                    <a:pt x="125554" y="0"/>
+                  </a:moveTo>
+                  <a:lnTo>
+                    <a:pt x="800134" y="0"/>
+                  </a:lnTo>
+                  <a:cubicBezTo>
+                    <a:pt x="833434" y="0"/>
+                    <a:pt x="865369" y="13228"/>
+                    <a:pt x="888915" y="36774"/>
+                  </a:cubicBezTo>
+                  <a:cubicBezTo>
+                    <a:pt x="912461" y="60320"/>
+                    <a:pt x="925689" y="92255"/>
+                    <a:pt x="925689" y="125554"/>
+                  </a:cubicBezTo>
+                  <a:lnTo>
+                    <a:pt x="925689" y="1838712"/>
+                  </a:lnTo>
+                  <a:cubicBezTo>
+                    <a:pt x="925689" y="1908054"/>
+                    <a:pt x="869476" y="1964267"/>
+                    <a:pt x="800134" y="1964267"/>
+                  </a:cubicBezTo>
+                  <a:lnTo>
+                    <a:pt x="125554" y="1964267"/>
+                  </a:lnTo>
+                  <a:cubicBezTo>
+                    <a:pt x="92255" y="1964267"/>
+                    <a:pt x="60320" y="1951039"/>
+                    <a:pt x="36774" y="1927493"/>
+                  </a:cubicBezTo>
+                  <a:cubicBezTo>
+                    <a:pt x="13228" y="1903947"/>
+                    <a:pt x="0" y="1872011"/>
+                    <a:pt x="0" y="1838712"/>
+                  </a:cubicBezTo>
+                  <a:lnTo>
+                    <a:pt x="0" y="125554"/>
+                  </a:lnTo>
+                  <a:cubicBezTo>
+                    <a:pt x="0" y="92255"/>
+                    <a:pt x="13228" y="60320"/>
+                    <a:pt x="36774" y="36774"/>
+                  </a:cubicBezTo>
+                  <a:cubicBezTo>
+                    <a:pt x="60320" y="13228"/>
+                    <a:pt x="92255" y="0"/>
+                    <a:pt x="125554" y="0"/>
+                  </a:cubicBezTo>
+                  <a:close/>
+                </a:path>
+              </a:pathLst>
+            </a:custGeom>
+            <a:solidFill>
+              <a:srgbClr val="15171B"/>
+            </a:solidFill>
+          </p:spPr>
+        </p:sp>
+        <p:sp>
+          <p:nvSpPr>
+            <p:cNvPr name="TextBox 18" id="18"/>
+            <p:cNvSpPr txBox="true"/>
+            <p:nvPr/>
+          </p:nvSpPr>
+          <p:spPr>
+            <a:xfrm>
+              <a:off x="0" y="0"/>
+              <a:ext cx="925689" cy="1964267"/>
+            </a:xfrm>
+            <a:prstGeom prst="rect">
+              <a:avLst/>
+            </a:prstGeom>
+          </p:spPr>
+          <p:txBody>
+            <a:bodyPr anchor="ctr" rtlCol="false" tIns="50800" lIns="50800" bIns="50800" rIns="50800"/>
+            <a:lstStyle/>
+            <a:p>
+              <a:pPr algn="ctr">
+                <a:lnSpc>
+                  <a:spcPts val="1372"/>
+                </a:lnSpc>
+              </a:pPr>
+            </a:p>
+          </p:txBody>
+        </p:sp>
+      </p:grpSp>
+      <p:grpSp>
+        <p:nvGrpSpPr>
+          <p:cNvPr name="Group 19" id="19"/>
+          <p:cNvGrpSpPr/>
+          <p:nvPr/>
+        </p:nvGrpSpPr>
+        <p:grpSpPr>
+          <a:xfrm rot="0">
+            <a:off x="9401175" y="1685925"/>
+            <a:ext cx="495300" cy="47625"/>
+            <a:chOff x="0" y="0"/>
+            <a:chExt cx="195674" cy="18815"/>
+          </a:xfrm>
+        </p:grpSpPr>
+        <p:sp>
+          <p:nvSpPr>
+            <p:cNvPr name="Freeform 20" id="20"/>
+            <p:cNvSpPr/>
+            <p:nvPr/>
+          </p:nvSpPr>
+          <p:spPr>
+            <a:xfrm flipH="false" flipV="false" rot="0">
+              <a:off x="0" y="0"/>
+              <a:ext cx="195674" cy="18815"/>
+            </a:xfrm>
+            <a:custGeom>
+              <a:avLst/>
+              <a:gdLst/>
+              <a:ahLst/>
+              <a:cxnLst/>
+              <a:rect r="r" b="b" t="t" l="l"/>
+              <a:pathLst>
+                <a:path h="18815" w="195674">
+                  <a:moveTo>
+                    <a:pt x="9407" y="0"/>
+                  </a:moveTo>
+                  <a:lnTo>
+                    <a:pt x="186267" y="0"/>
+                  </a:lnTo>
+                  <a:cubicBezTo>
+                    <a:pt x="191462" y="0"/>
+                    <a:pt x="195674" y="4212"/>
+                    <a:pt x="195674" y="9407"/>
+                  </a:cubicBezTo>
+                  <a:lnTo>
+                    <a:pt x="195674" y="9407"/>
+                  </a:lnTo>
+                  <a:cubicBezTo>
+                    <a:pt x="195674" y="14603"/>
+                    <a:pt x="191462" y="18815"/>
+                    <a:pt x="186267" y="18815"/>
+                  </a:cubicBezTo>
+                  <a:lnTo>
+                    <a:pt x="9407" y="18815"/>
+                  </a:lnTo>
+                  <a:cubicBezTo>
+                    <a:pt x="4212" y="18815"/>
+                    <a:pt x="0" y="14603"/>
+                    <a:pt x="0" y="9407"/>
+                  </a:cubicBezTo>
+                  <a:lnTo>
+                    <a:pt x="0" y="9407"/>
+                  </a:lnTo>
+                  <a:cubicBezTo>
+                    <a:pt x="0" y="4212"/>
+                    <a:pt x="4212" y="0"/>
+                    <a:pt x="9407" y="0"/>
+                  </a:cubicBezTo>
+                  <a:close/>
+                </a:path>
+              </a:pathLst>
+            </a:custGeom>
+            <a:solidFill>
+              <a:srgbClr val="555555"/>
+            </a:solidFill>
+          </p:spPr>
+        </p:sp>
+        <p:sp>
+          <p:nvSpPr>
+            <p:cNvPr name="TextBox 21" id="21"/>
+            <p:cNvSpPr txBox="true"/>
+            <p:nvPr/>
+          </p:nvSpPr>
+          <p:spPr>
+            <a:xfrm>
+              <a:off x="0" y="0"/>
+              <a:ext cx="195674" cy="18815"/>
+            </a:xfrm>
+            <a:prstGeom prst="rect">
+              <a:avLst/>
+            </a:prstGeom>
+          </p:spPr>
+          <p:txBody>
+            <a:bodyPr anchor="ctr" rtlCol="false" tIns="50800" lIns="50800" bIns="50800" rIns="50800"/>
+            <a:lstStyle/>
+            <a:p>
+              <a:pPr algn="ctr">
+                <a:lnSpc>
+                  <a:spcPts val="1372"/>
+                </a:lnSpc>
+              </a:pPr>
+            </a:p>
+          </p:txBody>
+        </p:sp>
+      </p:grpSp>
+      <p:sp>
+        <p:nvSpPr>
+          <p:cNvPr name="TextBox 22" id="22"/>
           <p:cNvSpPr txBox="true"/>
           <p:nvPr/>
         </p:nvSpPr>
@@ -18693,7 +19216,420 @@
       </p:sp>
       <p:sp>
         <p:nvSpPr>
-          <p:cNvPr name="TextBox 10" id="10"/>
+          <p:cNvPr name="Freeform 23" id="23" descr="Actual Dunlo mobile Explore screen, fully visible inside a phone mockup."/>
+          <p:cNvSpPr/>
+          <p:nvPr/>
+        </p:nvSpPr>
+        <p:spPr>
+          <a:xfrm flipH="false" flipV="false" rot="0">
+            <a:off x="8648700" y="1885950"/>
+            <a:ext cx="2000250" cy="4336675"/>
+          </a:xfrm>
+          <a:custGeom>
+            <a:avLst/>
+            <a:gdLst/>
+            <a:ahLst/>
+            <a:cxnLst/>
+            <a:rect r="r" b="b" t="t" l="l"/>
+            <a:pathLst>
+              <a:path h="4336675" w="2000250">
+                <a:moveTo>
+                  <a:pt x="0" y="0"/>
+                </a:moveTo>
+                <a:lnTo>
+                  <a:pt x="2000250" y="0"/>
+                </a:lnTo>
+                <a:lnTo>
+                  <a:pt x="2000250" y="4336675"/>
+                </a:lnTo>
+                <a:lnTo>
+                  <a:pt x="0" y="4336675"/>
+                </a:lnTo>
+                <a:lnTo>
+                  <a:pt x="0" y="0"/>
+                </a:lnTo>
+                <a:close/>
+              </a:path>
+            </a:pathLst>
+          </a:custGeom>
+          <a:blipFill>
+            <a:blip r:embed="rId10"/>
+            <a:stretch>
+              <a:fillRect l="-1" t="0" r="-1" b="0"/>
+            </a:stretch>
+          </a:blipFill>
+        </p:spPr>
+      </p:sp>
+      <p:grpSp>
+        <p:nvGrpSpPr>
+          <p:cNvPr name="Group 24" id="24"/>
+          <p:cNvGrpSpPr/>
+          <p:nvPr/>
+        </p:nvGrpSpPr>
+        <p:grpSpPr>
+          <a:xfrm rot="0">
+            <a:off x="9401175" y="6334125"/>
+            <a:ext cx="495300" cy="47625"/>
+            <a:chOff x="0" y="0"/>
+            <a:chExt cx="195674" cy="18815"/>
+          </a:xfrm>
+        </p:grpSpPr>
+        <p:sp>
+          <p:nvSpPr>
+            <p:cNvPr name="Freeform 25" id="25"/>
+            <p:cNvSpPr/>
+            <p:nvPr/>
+          </p:nvSpPr>
+          <p:spPr>
+            <a:xfrm flipH="false" flipV="false" rot="0">
+              <a:off x="0" y="0"/>
+              <a:ext cx="195674" cy="18815"/>
+            </a:xfrm>
+            <a:custGeom>
+              <a:avLst/>
+              <a:gdLst/>
+              <a:ahLst/>
+              <a:cxnLst/>
+              <a:rect r="r" b="b" t="t" l="l"/>
+              <a:pathLst>
+                <a:path h="18815" w="195674">
+                  <a:moveTo>
+                    <a:pt x="9407" y="0"/>
+                  </a:moveTo>
+                  <a:lnTo>
+                    <a:pt x="186267" y="0"/>
+                  </a:lnTo>
+                  <a:cubicBezTo>
+                    <a:pt x="191462" y="0"/>
+                    <a:pt x="195674" y="4212"/>
+                    <a:pt x="195674" y="9407"/>
+                  </a:cubicBezTo>
+                  <a:lnTo>
+                    <a:pt x="195674" y="9407"/>
+                  </a:lnTo>
+                  <a:cubicBezTo>
+                    <a:pt x="195674" y="14603"/>
+                    <a:pt x="191462" y="18815"/>
+                    <a:pt x="186267" y="18815"/>
+                  </a:cubicBezTo>
+                  <a:lnTo>
+                    <a:pt x="9407" y="18815"/>
+                  </a:lnTo>
+                  <a:cubicBezTo>
+                    <a:pt x="4212" y="18815"/>
+                    <a:pt x="0" y="14603"/>
+                    <a:pt x="0" y="9407"/>
+                  </a:cubicBezTo>
+                  <a:lnTo>
+                    <a:pt x="0" y="9407"/>
+                  </a:lnTo>
+                  <a:cubicBezTo>
+                    <a:pt x="0" y="4212"/>
+                    <a:pt x="4212" y="0"/>
+                    <a:pt x="9407" y="0"/>
+                  </a:cubicBezTo>
+                  <a:close/>
+                </a:path>
+              </a:pathLst>
+            </a:custGeom>
+            <a:solidFill>
+              <a:srgbClr val="555555"/>
+            </a:solidFill>
+          </p:spPr>
+        </p:sp>
+        <p:sp>
+          <p:nvSpPr>
+            <p:cNvPr name="TextBox 26" id="26"/>
+            <p:cNvSpPr txBox="true"/>
+            <p:nvPr/>
+          </p:nvSpPr>
+          <p:spPr>
+            <a:xfrm>
+              <a:off x="0" y="0"/>
+              <a:ext cx="195674" cy="18815"/>
+            </a:xfrm>
+            <a:prstGeom prst="rect">
+              <a:avLst/>
+            </a:prstGeom>
+          </p:spPr>
+          <p:txBody>
+            <a:bodyPr anchor="ctr" rtlCol="false" tIns="50800" lIns="50800" bIns="50800" rIns="50800"/>
+            <a:lstStyle/>
+            <a:p>
+              <a:pPr algn="ctr">
+                <a:lnSpc>
+                  <a:spcPts val="1372"/>
+                </a:lnSpc>
+              </a:pPr>
+            </a:p>
+          </p:txBody>
+        </p:sp>
+      </p:grpSp>
+    </p:spTree>
+  </p:cSld>
+  <p:clrMapOvr>
+    <a:masterClrMapping/>
+  </p:clrMapOvr>
+</p:sld>
+</file>
+
+<file path=ppt/slides/slide5.xml><?xml version="1.0" encoding="utf-8"?>
+<p:sld xmlns:p="http://schemas.openxmlformats.org/presentationml/2006/main" xmlns:a="http://schemas.openxmlformats.org/drawingml/2006/main" xmlns:r="http://schemas.openxmlformats.org/officeDocument/2006/relationships">
+  <p:cSld>
+    <p:spTree>
+      <p:nvGrpSpPr>
+        <p:cNvPr id="1" name=""/>
+        <p:cNvGrpSpPr/>
+        <p:nvPr/>
+      </p:nvGrpSpPr>
+      <p:grpSpPr>
+        <a:xfrm>
+          <a:off x="0" y="0"/>
+          <a:ext cx="0" cy="0"/>
+          <a:chOff x="0" y="0"/>
+          <a:chExt cx="0" cy="0"/>
+        </a:xfrm>
+      </p:grpSpPr>
+      <p:sp>
+        <p:nvSpPr>
+          <p:cNvPr name="AutoShape 2" id="2"/>
+          <p:cNvSpPr/>
+          <p:nvPr/>
+        </p:nvSpPr>
+        <p:spPr>
+          <a:xfrm rot="0">
+            <a:off x="0" y="0"/>
+            <a:ext cx="12192000" cy="6858000"/>
+          </a:xfrm>
+          <a:prstGeom prst="rect">
+            <a:avLst/>
+          </a:prstGeom>
+          <a:solidFill>
+            <a:srgbClr val="FFFFFF"/>
+          </a:solidFill>
+        </p:spPr>
+      </p:sp>
+      <p:grpSp>
+        <p:nvGrpSpPr>
+          <p:cNvPr name="Group 3" id="3"/>
+          <p:cNvGrpSpPr/>
+          <p:nvPr/>
+        </p:nvGrpSpPr>
+        <p:grpSpPr>
+          <a:xfrm rot="0">
+            <a:off x="0" y="0"/>
+            <a:ext cx="12192000" cy="6858000"/>
+            <a:chOff x="0" y="0"/>
+            <a:chExt cx="16256000" cy="9144000"/>
+          </a:xfrm>
+        </p:grpSpPr>
+        <p:sp>
+          <p:nvSpPr>
+            <p:cNvPr name="Freeform 4" id="4"/>
+            <p:cNvSpPr/>
+            <p:nvPr/>
+          </p:nvSpPr>
+          <p:spPr>
+            <a:xfrm flipH="false" flipV="false" rot="0">
+              <a:off x="0" y="0"/>
+              <a:ext cx="16256000" cy="9144000"/>
+            </a:xfrm>
+            <a:custGeom>
+              <a:avLst/>
+              <a:gdLst/>
+              <a:ahLst/>
+              <a:cxnLst/>
+              <a:rect r="r" b="b" t="t" l="l"/>
+              <a:pathLst>
+                <a:path h="9144000" w="16256000">
+                  <a:moveTo>
+                    <a:pt x="0" y="0"/>
+                  </a:moveTo>
+                  <a:lnTo>
+                    <a:pt x="16256000" y="0"/>
+                  </a:lnTo>
+                  <a:lnTo>
+                    <a:pt x="16256000" y="9144000"/>
+                  </a:lnTo>
+                  <a:lnTo>
+                    <a:pt x="0" y="9144000"/>
+                  </a:lnTo>
+                  <a:lnTo>
+                    <a:pt x="0" y="0"/>
+                  </a:lnTo>
+                  <a:close/>
+                </a:path>
+              </a:pathLst>
+            </a:custGeom>
+            <a:blipFill>
+              <a:blip r:embed="rId3"/>
+              <a:stretch>
+                <a:fillRect l="0" t="0" r="0" b="0"/>
+              </a:stretch>
+            </a:blipFill>
+          </p:spPr>
+        </p:sp>
+      </p:grpSp>
+      <p:grpSp>
+        <p:nvGrpSpPr>
+          <p:cNvPr name="Group 5" id="5"/>
+          <p:cNvGrpSpPr/>
+          <p:nvPr/>
+        </p:nvGrpSpPr>
+        <p:grpSpPr>
+          <a:xfrm rot="0">
+            <a:off x="0" y="0"/>
+            <a:ext cx="12192000" cy="6858000"/>
+            <a:chOff x="0" y="0"/>
+            <a:chExt cx="16256000" cy="9144000"/>
+          </a:xfrm>
+        </p:grpSpPr>
+        <p:sp>
+          <p:nvSpPr>
+            <p:cNvPr name="Freeform 6" id="6"/>
+            <p:cNvSpPr/>
+            <p:nvPr/>
+          </p:nvSpPr>
+          <p:spPr>
+            <a:xfrm flipH="false" flipV="false" rot="0">
+              <a:off x="0" y="0"/>
+              <a:ext cx="16256000" cy="9144000"/>
+            </a:xfrm>
+            <a:custGeom>
+              <a:avLst/>
+              <a:gdLst/>
+              <a:ahLst/>
+              <a:cxnLst/>
+              <a:rect r="r" b="b" t="t" l="l"/>
+              <a:pathLst>
+                <a:path h="9144000" w="16256000">
+                  <a:moveTo>
+                    <a:pt x="0" y="0"/>
+                  </a:moveTo>
+                  <a:lnTo>
+                    <a:pt x="16256000" y="0"/>
+                  </a:lnTo>
+                  <a:lnTo>
+                    <a:pt x="16256000" y="9144000"/>
+                  </a:lnTo>
+                  <a:lnTo>
+                    <a:pt x="0" y="9144000"/>
+                  </a:lnTo>
+                  <a:lnTo>
+                    <a:pt x="0" y="0"/>
+                  </a:lnTo>
+                  <a:close/>
+                </a:path>
+              </a:pathLst>
+            </a:custGeom>
+            <a:blipFill>
+              <a:blip r:embed="rId4">
+                <a:extLst>
+                  <a:ext uri="{96DAC541-7B7A-43D3-8B79-37D633B846F1}">
+                    <asvg:svgBlip xmlns:asvg="http://schemas.microsoft.com/office/drawing/2016/SVG/main" r:embed="rId5"/>
+                  </a:ext>
+                </a:extLst>
+              </a:blip>
+              <a:stretch>
+                <a:fillRect l="0" t="0" r="0" b="0"/>
+              </a:stretch>
+            </a:blipFill>
+          </p:spPr>
+        </p:sp>
+        <p:sp>
+          <p:nvSpPr>
+            <p:cNvPr name="Freeform 7" id="7"/>
+            <p:cNvSpPr/>
+            <p:nvPr/>
+          </p:nvSpPr>
+          <p:spPr>
+            <a:xfrm flipH="false" flipV="false" rot="0">
+              <a:off x="11887200" y="0"/>
+              <a:ext cx="3556000" cy="690065"/>
+            </a:xfrm>
+            <a:custGeom>
+              <a:avLst/>
+              <a:gdLst/>
+              <a:ahLst/>
+              <a:cxnLst/>
+              <a:rect r="r" b="b" t="t" l="l"/>
+              <a:pathLst>
+                <a:path h="690065" w="3556000">
+                  <a:moveTo>
+                    <a:pt x="0" y="0"/>
+                  </a:moveTo>
+                  <a:lnTo>
+                    <a:pt x="3556000" y="0"/>
+                  </a:lnTo>
+                  <a:lnTo>
+                    <a:pt x="3556000" y="690065"/>
+                  </a:lnTo>
+                  <a:lnTo>
+                    <a:pt x="0" y="690065"/>
+                  </a:lnTo>
+                  <a:lnTo>
+                    <a:pt x="0" y="0"/>
+                  </a:lnTo>
+                  <a:close/>
+                </a:path>
+              </a:pathLst>
+            </a:custGeom>
+            <a:blipFill>
+              <a:blip r:embed="rId6"/>
+              <a:stretch>
+                <a:fillRect l="0" t="0" r="0" b="-16460"/>
+              </a:stretch>
+            </a:blipFill>
+          </p:spPr>
+        </p:sp>
+      </p:grpSp>
+      <p:sp>
+        <p:nvSpPr>
+          <p:cNvPr name="TextBox 8" id="8"/>
+          <p:cNvSpPr txBox="true"/>
+          <p:nvPr/>
+        </p:nvSpPr>
+        <p:spPr>
+          <a:xfrm rot="0">
+            <a:off x="11239500" y="6353175"/>
+            <a:ext cx="428625" cy="168592"/>
+          </a:xfrm>
+          <a:prstGeom prst="rect">
+            <a:avLst/>
+          </a:prstGeom>
+        </p:spPr>
+        <p:txBody>
+          <a:bodyPr anchor="t" rtlCol="false" tIns="0" lIns="0" bIns="0" rIns="0">
+            <a:spAutoFit/>
+          </a:bodyPr>
+          <a:lstStyle/>
+          <a:p>
+            <a:pPr algn="l" marL="0" indent="0" lvl="0">
+              <a:lnSpc>
+                <a:spcPts val="1372"/>
+              </a:lnSpc>
+              <a:spcBef>
+                <a:spcPct val="0"/>
+              </a:spcBef>
+            </a:pPr>
+            <a:r>
+              <a:rPr lang="en-US" sz="1125" strike="noStrike" u="none">
+                <a:solidFill>
+                  <a:srgbClr val="0A2A66"/>
+                </a:solidFill>
+                <a:latin typeface="DM Sans"/>
+                <a:ea typeface="DM Sans"/>
+                <a:cs typeface="DM Sans"/>
+                <a:sym typeface="DM Sans"/>
+              </a:rPr>
+              <a:t>05</a:t>
+            </a:r>
+          </a:p>
+        </p:txBody>
+      </p:sp>
+      <p:sp>
+        <p:nvSpPr>
+          <p:cNvPr name="TextBox 9" id="9"/>
           <p:cNvSpPr txBox="true"/>
           <p:nvPr/>
         </p:nvSpPr>
@@ -18730,21 +19666,21 @@
                 <a:cs typeface="DM Sans Bold"/>
                 <a:sym typeface="DM Sans Bold"/>
               </a:rPr>
-              <a:t>Explore a short learning feed</a:t>
-            </a:r>
-          </a:p>
-        </p:txBody>
-      </p:sp>
-      <p:sp>
-        <p:nvSpPr>
-          <p:cNvPr name="TextBox 11" id="11"/>
+              <a:t>Make the relationship visible</a:t>
+            </a:r>
+          </a:p>
+        </p:txBody>
+      </p:sp>
+      <p:sp>
+        <p:nvSpPr>
+          <p:cNvPr name="TextBox 10" id="10"/>
           <p:cNvSpPr txBox="true"/>
           <p:nvPr/>
         </p:nvSpPr>
         <p:spPr>
           <a:xfrm rot="0">
-            <a:off x="609600" y="1838325"/>
-            <a:ext cx="7048500" cy="280797"/>
+            <a:off x="6667500" y="2209800"/>
+            <a:ext cx="4572000" cy="159258"/>
           </a:xfrm>
           <a:prstGeom prst="rect">
             <a:avLst/>
@@ -18758,14 +19694,14 @@
           <a:p>
             <a:pPr algn="l" marL="0" indent="0" lvl="0">
               <a:lnSpc>
-                <a:spcPts val="2379"/>
+                <a:spcPts val="1281"/>
               </a:lnSpc>
               <a:spcBef>
                 <a:spcPct val="0"/>
               </a:spcBef>
             </a:pPr>
             <a:r>
-              <a:rPr lang="en-US" sz="1950" strike="noStrike" u="none">
+              <a:rPr lang="en-US" sz="1050" strike="noStrike" u="none">
                 <a:solidFill>
                   <a:srgbClr val="0A2A66"/>
                 </a:solidFill>
@@ -18774,21 +19710,21 @@
                 <a:cs typeface="DM Sans"/>
                 <a:sym typeface="DM Sans"/>
               </a:rPr>
-              <a:t>One idea at a time. A clear way to keep going.</a:t>
-            </a:r>
-          </a:p>
-        </p:txBody>
-      </p:sp>
-      <p:sp>
-        <p:nvSpPr>
-          <p:cNvPr name="TextBox 12" id="12"/>
+              <a:t>FOUR AREAS</a:t>
+            </a:r>
+          </a:p>
+        </p:txBody>
+      </p:sp>
+      <p:sp>
+        <p:nvSpPr>
+          <p:cNvPr name="TextBox 11" id="11"/>
           <p:cNvSpPr txBox="true"/>
           <p:nvPr/>
         </p:nvSpPr>
         <p:spPr>
           <a:xfrm rot="0">
-            <a:off x="762000" y="2714625"/>
-            <a:ext cx="5524500" cy="374904"/>
+            <a:off x="6667500" y="2533650"/>
+            <a:ext cx="4572000" cy="346710"/>
           </a:xfrm>
           <a:prstGeom prst="rect">
             <a:avLst/>
@@ -18800,60 +19736,16 @@
           </a:bodyPr>
           <a:lstStyle/>
           <a:p>
-            <a:pPr algn="ctr" marL="0" indent="0" lvl="0">
+            <a:pPr algn="l" marL="0" indent="0" lvl="0">
               <a:lnSpc>
-                <a:spcPts val="2928"/>
+                <a:spcPts val="2745"/>
               </a:lnSpc>
               <a:spcBef>
                 <a:spcPct val="0"/>
               </a:spcBef>
             </a:pPr>
             <a:r>
-              <a:rPr lang="en-US" b="true" sz="2400" strike="noStrike" u="none">
-                <a:solidFill>
-                  <a:srgbClr val="0A2A66"/>
-                </a:solidFill>
-                <a:latin typeface="DM Sans Bold"/>
-                <a:ea typeface="DM Sans Bold"/>
-                <a:cs typeface="DM Sans Bold"/>
-                <a:sym typeface="DM Sans Bold"/>
-              </a:rPr>
-              <a:t>Play with the model</a:t>
-            </a:r>
-          </a:p>
-        </p:txBody>
-      </p:sp>
-      <p:sp>
-        <p:nvSpPr>
-          <p:cNvPr name="TextBox 13" id="13"/>
-          <p:cNvSpPr txBox="true"/>
-          <p:nvPr/>
-        </p:nvSpPr>
-        <p:spPr>
-          <a:xfrm rot="0">
-            <a:off x="762000" y="3286125"/>
-            <a:ext cx="5715000" cy="576072"/>
-          </a:xfrm>
-          <a:prstGeom prst="rect">
-            <a:avLst/>
-          </a:prstGeom>
-        </p:spPr>
-        <p:txBody>
-          <a:bodyPr anchor="t" rtlCol="false" tIns="0" lIns="0" bIns="0" rIns="0">
-            <a:spAutoFit/>
-          </a:bodyPr>
-          <a:lstStyle/>
-          <a:p>
-            <a:pPr algn="ctr" marL="0" indent="0" lvl="0">
-              <a:lnSpc>
-                <a:spcPts val="2379"/>
-              </a:lnSpc>
-              <a:spcBef>
-                <a:spcPct val="0"/>
-              </a:spcBef>
-            </a:pPr>
-            <a:r>
-              <a:rPr lang="en-US" sz="1950" strike="noStrike" u="none">
+              <a:rPr lang="en-US" sz="2250" strike="noStrike" u="none">
                 <a:solidFill>
                   <a:srgbClr val="0A2A66"/>
                 </a:solidFill>
@@ -18862,20 +19754,42 @@
                 <a:cs typeface="DM Sans"/>
                 <a:sym typeface="DM Sans"/>
               </a:rPr>
-              <a:t>Change a quantity.</a:t>
-            </a:r>
-          </a:p>
-          <a:p>
-            <a:pPr algn="ctr" marL="0" indent="0" lvl="0">
+              <a:t>x² + 3x + 4x + 12</a:t>
+            </a:r>
+          </a:p>
+        </p:txBody>
+      </p:sp>
+      <p:sp>
+        <p:nvSpPr>
+          <p:cNvPr name="TextBox 12" id="12"/>
+          <p:cNvSpPr txBox="true"/>
+          <p:nvPr/>
+        </p:nvSpPr>
+        <p:spPr>
+          <a:xfrm rot="0">
+            <a:off x="6667500" y="2952750"/>
+            <a:ext cx="4572000" cy="234315"/>
+          </a:xfrm>
+          <a:prstGeom prst="rect">
+            <a:avLst/>
+          </a:prstGeom>
+        </p:spPr>
+        <p:txBody>
+          <a:bodyPr anchor="t" rtlCol="false" tIns="0" lIns="0" bIns="0" rIns="0">
+            <a:spAutoFit/>
+          </a:bodyPr>
+          <a:lstStyle/>
+          <a:p>
+            <a:pPr algn="l" marL="0" indent="0" lvl="0">
               <a:lnSpc>
-                <a:spcPts val="2379"/>
+                <a:spcPts val="1830"/>
               </a:lnSpc>
               <a:spcBef>
                 <a:spcPct val="0"/>
               </a:spcBef>
             </a:pPr>
             <a:r>
-              <a:rPr lang="en-US" sz="1950" strike="noStrike" u="none">
+              <a:rPr lang="en-US" sz="1500" strike="noStrike" u="none">
                 <a:solidFill>
                   <a:srgbClr val="0A2A66"/>
                 </a:solidFill>
@@ -18884,21 +19798,184 @@
                 <a:cs typeface="DM Sans"/>
                 <a:sym typeface="DM Sans"/>
               </a:rPr>
-              <a:t>See the relationship.</a:t>
-            </a:r>
-          </a:p>
-        </p:txBody>
-      </p:sp>
-      <p:sp>
-        <p:nvSpPr>
-          <p:cNvPr name="TextBox 14" id="14"/>
+              <a:t>Each part keeps its meaning.</a:t>
+            </a:r>
+          </a:p>
+        </p:txBody>
+      </p:sp>
+      <p:sp>
+        <p:nvSpPr>
+          <p:cNvPr name="AutoShape 13" id="13"/>
+          <p:cNvSpPr/>
+          <p:nvPr/>
+        </p:nvSpPr>
+        <p:spPr>
+          <a:xfrm rot="0">
+            <a:off x="3990975" y="3838575"/>
+            <a:ext cx="238125" cy="38100"/>
+          </a:xfrm>
+          <a:prstGeom prst="rect">
+            <a:avLst/>
+          </a:prstGeom>
+          <a:solidFill>
+            <a:srgbClr val="CCD7E4"/>
+          </a:solidFill>
+        </p:spPr>
+      </p:sp>
+      <p:grpSp>
+        <p:nvGrpSpPr>
+          <p:cNvPr name="Group 14" id="14"/>
+          <p:cNvGrpSpPr/>
+          <p:nvPr/>
+        </p:nvGrpSpPr>
+        <p:grpSpPr>
+          <a:xfrm rot="1840140">
+            <a:off x="4171283" y="3802952"/>
+            <a:ext cx="171450" cy="28575"/>
+            <a:chOff x="0" y="0"/>
+            <a:chExt cx="228600" cy="38100"/>
+          </a:xfrm>
+        </p:grpSpPr>
+        <p:sp>
+          <p:nvSpPr>
+            <p:cNvPr name="Freeform 15" id="15"/>
+            <p:cNvSpPr/>
+            <p:nvPr/>
+          </p:nvSpPr>
+          <p:spPr>
+            <a:xfrm flipH="false" flipV="false" rot="0">
+              <a:off x="0" y="0"/>
+              <a:ext cx="228600" cy="38100"/>
+            </a:xfrm>
+            <a:custGeom>
+              <a:avLst/>
+              <a:gdLst/>
+              <a:ahLst/>
+              <a:cxnLst/>
+              <a:rect r="r" b="b" t="t" l="l"/>
+              <a:pathLst>
+                <a:path h="38100" w="228600">
+                  <a:moveTo>
+                    <a:pt x="19050" y="0"/>
+                  </a:moveTo>
+                  <a:lnTo>
+                    <a:pt x="209550" y="0"/>
+                  </a:lnTo>
+                  <a:cubicBezTo>
+                    <a:pt x="220091" y="0"/>
+                    <a:pt x="228600" y="8509"/>
+                    <a:pt x="228600" y="19050"/>
+                  </a:cubicBezTo>
+                  <a:cubicBezTo>
+                    <a:pt x="228600" y="29591"/>
+                    <a:pt x="220091" y="38100"/>
+                    <a:pt x="209550" y="38100"/>
+                  </a:cubicBezTo>
+                  <a:lnTo>
+                    <a:pt x="19050" y="38100"/>
+                  </a:lnTo>
+                  <a:cubicBezTo>
+                    <a:pt x="8509" y="38100"/>
+                    <a:pt x="0" y="29591"/>
+                    <a:pt x="0" y="19050"/>
+                  </a:cubicBezTo>
+                  <a:cubicBezTo>
+                    <a:pt x="0" y="8509"/>
+                    <a:pt x="8509" y="0"/>
+                    <a:pt x="19050" y="0"/>
+                  </a:cubicBezTo>
+                  <a:close/>
+                </a:path>
+              </a:pathLst>
+            </a:custGeom>
+            <a:solidFill>
+              <a:srgbClr val="CCD7E4"/>
+            </a:solidFill>
+          </p:spPr>
+        </p:sp>
+      </p:grpSp>
+      <p:grpSp>
+        <p:nvGrpSpPr>
+          <p:cNvPr name="Group 16" id="16"/>
+          <p:cNvGrpSpPr/>
+          <p:nvPr/>
+        </p:nvGrpSpPr>
+        <p:grpSpPr>
+          <a:xfrm rot="8959860">
+            <a:off x="4163187" y="3888676"/>
+            <a:ext cx="171450" cy="28575"/>
+            <a:chOff x="0" y="0"/>
+            <a:chExt cx="228600" cy="38100"/>
+          </a:xfrm>
+        </p:grpSpPr>
+        <p:sp>
+          <p:nvSpPr>
+            <p:cNvPr name="Freeform 17" id="17"/>
+            <p:cNvSpPr/>
+            <p:nvPr/>
+          </p:nvSpPr>
+          <p:spPr>
+            <a:xfrm flipH="false" flipV="false" rot="0">
+              <a:off x="0" y="0"/>
+              <a:ext cx="228600" cy="38100"/>
+            </a:xfrm>
+            <a:custGeom>
+              <a:avLst/>
+              <a:gdLst/>
+              <a:ahLst/>
+              <a:cxnLst/>
+              <a:rect r="r" b="b" t="t" l="l"/>
+              <a:pathLst>
+                <a:path h="38100" w="228600">
+                  <a:moveTo>
+                    <a:pt x="19050" y="0"/>
+                  </a:moveTo>
+                  <a:lnTo>
+                    <a:pt x="209550" y="0"/>
+                  </a:lnTo>
+                  <a:cubicBezTo>
+                    <a:pt x="220091" y="0"/>
+                    <a:pt x="228600" y="8509"/>
+                    <a:pt x="228600" y="19050"/>
+                  </a:cubicBezTo>
+                  <a:cubicBezTo>
+                    <a:pt x="228600" y="29591"/>
+                    <a:pt x="220091" y="38100"/>
+                    <a:pt x="209550" y="38100"/>
+                  </a:cubicBezTo>
+                  <a:lnTo>
+                    <a:pt x="19050" y="38100"/>
+                  </a:lnTo>
+                  <a:cubicBezTo>
+                    <a:pt x="8509" y="38100"/>
+                    <a:pt x="0" y="29591"/>
+                    <a:pt x="0" y="19050"/>
+                  </a:cubicBezTo>
+                  <a:cubicBezTo>
+                    <a:pt x="0" y="8509"/>
+                    <a:pt x="8509" y="0"/>
+                    <a:pt x="19050" y="0"/>
+                  </a:cubicBezTo>
+                  <a:close/>
+                </a:path>
+              </a:pathLst>
+            </a:custGeom>
+            <a:solidFill>
+              <a:srgbClr val="CCD7E4"/>
+            </a:solidFill>
+          </p:spPr>
+        </p:sp>
+      </p:grpSp>
+      <p:sp>
+        <p:nvSpPr>
+          <p:cNvPr name="TextBox 18" id="18"/>
           <p:cNvSpPr txBox="true"/>
           <p:nvPr/>
         </p:nvSpPr>
         <p:spPr>
           <a:xfrm rot="0">
-            <a:off x="762000" y="4324350"/>
-            <a:ext cx="5715000" cy="576072"/>
+            <a:off x="6667500" y="3562350"/>
+            <a:ext cx="4572000" cy="159258"/>
           </a:xfrm>
           <a:prstGeom prst="rect">
             <a:avLst/>
@@ -18910,16 +19987,16 @@
           </a:bodyPr>
           <a:lstStyle/>
           <a:p>
-            <a:pPr algn="ctr" marL="0" indent="0" lvl="0">
+            <a:pPr algn="l" marL="0" indent="0" lvl="0">
               <a:lnSpc>
-                <a:spcPts val="2379"/>
+                <a:spcPts val="1281"/>
               </a:lnSpc>
               <a:spcBef>
                 <a:spcPct val="0"/>
               </a:spcBef>
             </a:pPr>
             <a:r>
-              <a:rPr lang="en-US" sz="1950" strike="noStrike" u="none">
+              <a:rPr lang="en-US" sz="1050" strike="noStrike" u="none">
                 <a:solidFill>
                   <a:srgbClr val="0A2A66"/>
                 </a:solidFill>
@@ -18928,20 +20005,42 @@
                 <a:cs typeface="DM Sans"/>
                 <a:sym typeface="DM Sans"/>
               </a:rPr>
-              <a:t>Save, share or follow the idea</a:t>
-            </a:r>
-          </a:p>
-          <a:p>
-            <a:pPr algn="ctr" marL="0" indent="0" lvl="0">
+              <a:t>COMBINE</a:t>
+            </a:r>
+          </a:p>
+        </p:txBody>
+      </p:sp>
+      <p:sp>
+        <p:nvSpPr>
+          <p:cNvPr name="TextBox 19" id="19"/>
+          <p:cNvSpPr txBox="true"/>
+          <p:nvPr/>
+        </p:nvSpPr>
+        <p:spPr>
+          <a:xfrm rot="0">
+            <a:off x="6667500" y="3886200"/>
+            <a:ext cx="4572000" cy="346710"/>
+          </a:xfrm>
+          <a:prstGeom prst="rect">
+            <a:avLst/>
+          </a:prstGeom>
+        </p:spPr>
+        <p:txBody>
+          <a:bodyPr anchor="t" rtlCol="false" tIns="0" lIns="0" bIns="0" rIns="0">
+            <a:spAutoFit/>
+          </a:bodyPr>
+          <a:lstStyle/>
+          <a:p>
+            <a:pPr algn="l" marL="0" indent="0" lvl="0">
               <a:lnSpc>
-                <a:spcPts val="2379"/>
+                <a:spcPts val="2745"/>
               </a:lnSpc>
               <a:spcBef>
                 <a:spcPct val="0"/>
               </a:spcBef>
             </a:pPr>
             <a:r>
-              <a:rPr lang="en-US" sz="1950" strike="noStrike" u="none">
+              <a:rPr lang="en-US" sz="2250" strike="noStrike" u="none">
                 <a:solidFill>
                   <a:srgbClr val="0A2A66"/>
                 </a:solidFill>
@@ -18950,21 +20049,21 @@
                 <a:cs typeface="DM Sans"/>
                 <a:sym typeface="DM Sans"/>
               </a:rPr>
-              <a:t>Open a relevant Khan activity.</a:t>
-            </a:r>
-          </a:p>
-        </p:txBody>
-      </p:sp>
-      <p:sp>
-        <p:nvSpPr>
-          <p:cNvPr name="TextBox 15" id="15"/>
+              <a:t>3x + 4x = 7x</a:t>
+            </a:r>
+          </a:p>
+        </p:txBody>
+      </p:sp>
+      <p:sp>
+        <p:nvSpPr>
+          <p:cNvPr name="TextBox 20" id="20"/>
           <p:cNvSpPr txBox="true"/>
           <p:nvPr/>
         </p:nvSpPr>
         <p:spPr>
           <a:xfrm rot="0">
-            <a:off x="609600" y="6134100"/>
-            <a:ext cx="7620000" cy="196787"/>
+            <a:off x="6667500" y="4286250"/>
+            <a:ext cx="4572000" cy="234315"/>
           </a:xfrm>
           <a:prstGeom prst="rect">
             <a:avLst/>
@@ -18976,16 +20075,16 @@
           </a:bodyPr>
           <a:lstStyle/>
           <a:p>
-            <a:pPr algn="ctr" marL="0" indent="0" lvl="0">
+            <a:pPr algn="l" marL="0" indent="0" lvl="0">
               <a:lnSpc>
-                <a:spcPts val="1555"/>
+                <a:spcPts val="1830"/>
               </a:lnSpc>
               <a:spcBef>
                 <a:spcPct val="0"/>
               </a:spcBef>
             </a:pPr>
             <a:r>
-              <a:rPr lang="en-US" sz="1275" strike="noStrike" u="none">
+              <a:rPr lang="en-US" sz="1500" strike="noStrike" u="none">
                 <a:solidFill>
                   <a:srgbClr val="0A2A66"/>
                 </a:solidFill>
@@ -18993,16 +20092,404 @@
                 <a:ea typeface="DM Sans"/>
                 <a:cs typeface="DM Sans"/>
                 <a:sym typeface="DM Sans"/>
-                <a:hlinkClick r:id="rId7" tooltip="https://dunlo.vercel.app/explore"/>
               </a:rPr>
-              <a:t>Open Explore · dunlo.vercel.app/explore</a:t>
-            </a:r>
-          </a:p>
-        </p:txBody>
-      </p:sp>
-      <p:sp>
-        <p:nvSpPr>
-          <p:cNvPr name="Freeform 16" id="16" descr="Dunlo"/>
+              <a:t>The middle terms belong together.</a:t>
+            </a:r>
+          </a:p>
+        </p:txBody>
+      </p:sp>
+      <p:grpSp>
+        <p:nvGrpSpPr>
+          <p:cNvPr name="Group 21" id="21"/>
+          <p:cNvGrpSpPr/>
+          <p:nvPr/>
+        </p:nvGrpSpPr>
+        <p:grpSpPr>
+          <a:xfrm rot="1840140">
+            <a:off x="8057483" y="3802952"/>
+            <a:ext cx="171450" cy="28575"/>
+            <a:chOff x="0" y="0"/>
+            <a:chExt cx="228600" cy="38100"/>
+          </a:xfrm>
+        </p:grpSpPr>
+        <p:sp>
+          <p:nvSpPr>
+            <p:cNvPr name="Freeform 22" id="22"/>
+            <p:cNvSpPr/>
+            <p:nvPr/>
+          </p:nvSpPr>
+          <p:spPr>
+            <a:xfrm flipH="false" flipV="false" rot="0">
+              <a:off x="0" y="0"/>
+              <a:ext cx="228600" cy="38100"/>
+            </a:xfrm>
+            <a:custGeom>
+              <a:avLst/>
+              <a:gdLst/>
+              <a:ahLst/>
+              <a:cxnLst/>
+              <a:rect r="r" b="b" t="t" l="l"/>
+              <a:pathLst>
+                <a:path h="38100" w="228600">
+                  <a:moveTo>
+                    <a:pt x="19050" y="0"/>
+                  </a:moveTo>
+                  <a:lnTo>
+                    <a:pt x="209550" y="0"/>
+                  </a:lnTo>
+                  <a:cubicBezTo>
+                    <a:pt x="220091" y="0"/>
+                    <a:pt x="228600" y="8509"/>
+                    <a:pt x="228600" y="19050"/>
+                  </a:cubicBezTo>
+                  <a:cubicBezTo>
+                    <a:pt x="228600" y="29591"/>
+                    <a:pt x="220091" y="38100"/>
+                    <a:pt x="209550" y="38100"/>
+                  </a:cubicBezTo>
+                  <a:lnTo>
+                    <a:pt x="19050" y="38100"/>
+                  </a:lnTo>
+                  <a:cubicBezTo>
+                    <a:pt x="8509" y="38100"/>
+                    <a:pt x="0" y="29591"/>
+                    <a:pt x="0" y="19050"/>
+                  </a:cubicBezTo>
+                  <a:cubicBezTo>
+                    <a:pt x="0" y="8509"/>
+                    <a:pt x="8509" y="0"/>
+                    <a:pt x="19050" y="0"/>
+                  </a:cubicBezTo>
+                  <a:close/>
+                </a:path>
+              </a:pathLst>
+            </a:custGeom>
+            <a:solidFill>
+              <a:srgbClr val="CCD7E4"/>
+            </a:solidFill>
+          </p:spPr>
+        </p:sp>
+      </p:grpSp>
+      <p:grpSp>
+        <p:nvGrpSpPr>
+          <p:cNvPr name="Group 23" id="23"/>
+          <p:cNvGrpSpPr/>
+          <p:nvPr/>
+        </p:nvGrpSpPr>
+        <p:grpSpPr>
+          <a:xfrm rot="8959860">
+            <a:off x="8049387" y="3888676"/>
+            <a:ext cx="171450" cy="28575"/>
+            <a:chOff x="0" y="0"/>
+            <a:chExt cx="228600" cy="38100"/>
+          </a:xfrm>
+        </p:grpSpPr>
+        <p:sp>
+          <p:nvSpPr>
+            <p:cNvPr name="Freeform 24" id="24"/>
+            <p:cNvSpPr/>
+            <p:nvPr/>
+          </p:nvSpPr>
+          <p:spPr>
+            <a:xfrm flipH="false" flipV="false" rot="0">
+              <a:off x="0" y="0"/>
+              <a:ext cx="228600" cy="38100"/>
+            </a:xfrm>
+            <a:custGeom>
+              <a:avLst/>
+              <a:gdLst/>
+              <a:ahLst/>
+              <a:cxnLst/>
+              <a:rect r="r" b="b" t="t" l="l"/>
+              <a:pathLst>
+                <a:path h="38100" w="228600">
+                  <a:moveTo>
+                    <a:pt x="19050" y="0"/>
+                  </a:moveTo>
+                  <a:lnTo>
+                    <a:pt x="209550" y="0"/>
+                  </a:lnTo>
+                  <a:cubicBezTo>
+                    <a:pt x="220091" y="0"/>
+                    <a:pt x="228600" y="8509"/>
+                    <a:pt x="228600" y="19050"/>
+                  </a:cubicBezTo>
+                  <a:cubicBezTo>
+                    <a:pt x="228600" y="29591"/>
+                    <a:pt x="220091" y="38100"/>
+                    <a:pt x="209550" y="38100"/>
+                  </a:cubicBezTo>
+                  <a:lnTo>
+                    <a:pt x="19050" y="38100"/>
+                  </a:lnTo>
+                  <a:cubicBezTo>
+                    <a:pt x="8509" y="38100"/>
+                    <a:pt x="0" y="29591"/>
+                    <a:pt x="0" y="19050"/>
+                  </a:cubicBezTo>
+                  <a:cubicBezTo>
+                    <a:pt x="0" y="8509"/>
+                    <a:pt x="8509" y="0"/>
+                    <a:pt x="19050" y="0"/>
+                  </a:cubicBezTo>
+                  <a:close/>
+                </a:path>
+              </a:pathLst>
+            </a:custGeom>
+            <a:solidFill>
+              <a:srgbClr val="CCD7E4"/>
+            </a:solidFill>
+          </p:spPr>
+        </p:sp>
+      </p:grpSp>
+      <p:sp>
+        <p:nvSpPr>
+          <p:cNvPr name="TextBox 25" id="25"/>
+          <p:cNvSpPr txBox="true"/>
+          <p:nvPr/>
+        </p:nvSpPr>
+        <p:spPr>
+          <a:xfrm rot="0">
+            <a:off x="6667500" y="4895850"/>
+            <a:ext cx="4572000" cy="159258"/>
+          </a:xfrm>
+          <a:prstGeom prst="rect">
+            <a:avLst/>
+          </a:prstGeom>
+        </p:spPr>
+        <p:txBody>
+          <a:bodyPr anchor="t" rtlCol="false" tIns="0" lIns="0" bIns="0" rIns="0">
+            <a:spAutoFit/>
+          </a:bodyPr>
+          <a:lstStyle/>
+          <a:p>
+            <a:pPr algn="l" marL="0" indent="0" lvl="0">
+              <a:lnSpc>
+                <a:spcPts val="1281"/>
+              </a:lnSpc>
+              <a:spcBef>
+                <a:spcPct val="0"/>
+              </a:spcBef>
+            </a:pPr>
+            <a:r>
+              <a:rPr lang="en-US" sz="1050" strike="noStrike" u="none">
+                <a:solidFill>
+                  <a:srgbClr val="0A2A66"/>
+                </a:solidFill>
+                <a:latin typeface="DM Sans"/>
+                <a:ea typeface="DM Sans"/>
+                <a:cs typeface="DM Sans"/>
+                <a:sym typeface="DM Sans"/>
+              </a:rPr>
+              <a:t>RESULT</a:t>
+            </a:r>
+          </a:p>
+        </p:txBody>
+      </p:sp>
+      <p:sp>
+        <p:nvSpPr>
+          <p:cNvPr name="TextBox 26" id="26"/>
+          <p:cNvSpPr txBox="true"/>
+          <p:nvPr/>
+        </p:nvSpPr>
+        <p:spPr>
+          <a:xfrm rot="0">
+            <a:off x="6667500" y="5219700"/>
+            <a:ext cx="4572000" cy="346710"/>
+          </a:xfrm>
+          <a:prstGeom prst="rect">
+            <a:avLst/>
+          </a:prstGeom>
+        </p:spPr>
+        <p:txBody>
+          <a:bodyPr anchor="t" rtlCol="false" tIns="0" lIns="0" bIns="0" rIns="0">
+            <a:spAutoFit/>
+          </a:bodyPr>
+          <a:lstStyle/>
+          <a:p>
+            <a:pPr algn="l" marL="0" indent="0" lvl="0">
+              <a:lnSpc>
+                <a:spcPts val="2745"/>
+              </a:lnSpc>
+              <a:spcBef>
+                <a:spcPct val="0"/>
+              </a:spcBef>
+            </a:pPr>
+            <a:r>
+              <a:rPr lang="en-US" sz="2250" strike="noStrike" u="none">
+                <a:solidFill>
+                  <a:srgbClr val="0A2A66"/>
+                </a:solidFill>
+                <a:latin typeface="DM Sans"/>
+                <a:ea typeface="DM Sans"/>
+                <a:cs typeface="DM Sans"/>
+                <a:sym typeface="DM Sans"/>
+              </a:rPr>
+              <a:t>x² + 7x + 12</a:t>
+            </a:r>
+          </a:p>
+        </p:txBody>
+      </p:sp>
+      <p:sp>
+        <p:nvSpPr>
+          <p:cNvPr name="TextBox 27" id="27"/>
+          <p:cNvSpPr txBox="true"/>
+          <p:nvPr/>
+        </p:nvSpPr>
+        <p:spPr>
+          <a:xfrm rot="0">
+            <a:off x="6667500" y="5610225"/>
+            <a:ext cx="4572000" cy="234315"/>
+          </a:xfrm>
+          <a:prstGeom prst="rect">
+            <a:avLst/>
+          </a:prstGeom>
+        </p:spPr>
+        <p:txBody>
+          <a:bodyPr anchor="t" rtlCol="false" tIns="0" lIns="0" bIns="0" rIns="0">
+            <a:spAutoFit/>
+          </a:bodyPr>
+          <a:lstStyle/>
+          <a:p>
+            <a:pPr algn="l" marL="0" indent="0" lvl="0">
+              <a:lnSpc>
+                <a:spcPts val="1830"/>
+              </a:lnSpc>
+              <a:spcBef>
+                <a:spcPct val="0"/>
+              </a:spcBef>
+            </a:pPr>
+            <a:r>
+              <a:rPr lang="en-US" sz="1500" strike="noStrike" u="none">
+                <a:solidFill>
+                  <a:srgbClr val="0A2A66"/>
+                </a:solidFill>
+                <a:latin typeface="DM Sans"/>
+                <a:ea typeface="DM Sans"/>
+                <a:cs typeface="DM Sans"/>
+                <a:sym typeface="DM Sans"/>
+              </a:rPr>
+              <a:t>Then try a different question.</a:t>
+            </a:r>
+          </a:p>
+        </p:txBody>
+      </p:sp>
+      <p:sp>
+        <p:nvSpPr>
+          <p:cNvPr name="TextBox 28" id="28"/>
+          <p:cNvSpPr txBox="true"/>
+          <p:nvPr/>
+        </p:nvSpPr>
+        <p:spPr>
+          <a:xfrm rot="0">
+            <a:off x="609600" y="6191250"/>
+            <a:ext cx="9906000" cy="196596"/>
+          </a:xfrm>
+          <a:prstGeom prst="rect">
+            <a:avLst/>
+          </a:prstGeom>
+        </p:spPr>
+        <p:txBody>
+          <a:bodyPr anchor="t" rtlCol="false" tIns="0" lIns="0" bIns="0" rIns="0">
+            <a:spAutoFit/>
+          </a:bodyPr>
+          <a:lstStyle/>
+          <a:p>
+            <a:pPr algn="ctr" marL="0" indent="0" lvl="0">
+              <a:lnSpc>
+                <a:spcPts val="1647"/>
+              </a:lnSpc>
+              <a:spcBef>
+                <a:spcPct val="0"/>
+              </a:spcBef>
+            </a:pPr>
+            <a:r>
+              <a:rPr lang="en-US" sz="1350" strike="noStrike" u="none">
+                <a:solidFill>
+                  <a:srgbClr val="0A2A66"/>
+                </a:solidFill>
+                <a:latin typeface="DM Sans"/>
+                <a:ea typeface="DM Sans"/>
+                <a:cs typeface="DM Sans"/>
+                <a:sym typeface="DM Sans"/>
+                <a:hlinkClick r:id="rId7" tooltip="https://doi.org/10.1080/00461520.2014.965823"/>
+              </a:rPr>
+              <a:t>Original Dunlo interactive · Learning design: Chi &amp; Wylie (2014), ICAP framework</a:t>
+            </a:r>
+          </a:p>
+        </p:txBody>
+      </p:sp>
+      <p:sp>
+        <p:nvSpPr>
+          <p:cNvPr name="TextBox 29" id="29"/>
+          <p:cNvSpPr txBox="true"/>
+          <p:nvPr/>
+        </p:nvSpPr>
+        <p:spPr>
+          <a:xfrm rot="0">
+            <a:off x="609600" y="1600200"/>
+            <a:ext cx="10972800" cy="299656"/>
+          </a:xfrm>
+          <a:prstGeom prst="rect">
+            <a:avLst/>
+          </a:prstGeom>
+        </p:spPr>
+        <p:txBody>
+          <a:bodyPr anchor="t" rtlCol="false" tIns="0" lIns="0" bIns="0" rIns="0">
+            <a:spAutoFit/>
+          </a:bodyPr>
+          <a:lstStyle/>
+          <a:p>
+            <a:pPr algn="l" marL="0" indent="0" lvl="0">
+              <a:lnSpc>
+                <a:spcPts val="2470"/>
+              </a:lnSpc>
+              <a:spcBef>
+                <a:spcPct val="0"/>
+              </a:spcBef>
+            </a:pPr>
+            <a:r>
+              <a:rPr lang="en-US" sz="2025" strike="noStrike" u="none">
+                <a:solidFill>
+                  <a:srgbClr val="0A2A66"/>
+                </a:solidFill>
+                <a:latin typeface="DM Sans"/>
+                <a:ea typeface="DM Sans"/>
+                <a:cs typeface="DM Sans"/>
+                <a:sym typeface="DM Sans"/>
+              </a:rPr>
+              <a:t>Example: move the four areas to see why the middle terms combine.</a:t>
+            </a:r>
+          </a:p>
+        </p:txBody>
+      </p:sp>
+      <p:sp>
+        <p:nvSpPr>
+          <p:cNvPr name="AutoShape 30" id="30"/>
+          <p:cNvSpPr/>
+          <p:nvPr/>
+        </p:nvSpPr>
+        <p:spPr>
+          <a:xfrm>
+            <a:off x="609600" y="1381125"/>
+            <a:ext cx="10972800" cy="0"/>
+          </a:xfrm>
+          <a:prstGeom prst="line">
+            <a:avLst/>
+          </a:prstGeom>
+          <a:ln cap="flat" w="19050">
+            <a:solidFill>
+              <a:srgbClr val="CCD7E4"/>
+            </a:solidFill>
+            <a:prstDash val="solid"/>
+            <a:headEnd type="none" len="sm" w="sm"/>
+            <a:tailEnd type="none" len="sm" w="sm"/>
+          </a:ln>
+        </p:spPr>
+      </p:sp>
+      <p:sp>
+        <p:nvSpPr>
+          <p:cNvPr name="Freeform 31" id="31" descr="Dunlo"/>
           <p:cNvSpPr/>
           <p:nvPr/>
         </p:nvSpPr>
@@ -19054,14 +20541,14 @@
       </p:sp>
       <p:sp>
         <p:nvSpPr>
-          <p:cNvPr name="Freeform 17" id="17" descr="Dunlo Explore on a phone: source-labelled ideas, Save and Share, a recipe control and a prediction."/>
+          <p:cNvPr name="Freeform 32" id="32" descr="Original Dunlo factor model: four areas x squared, 3x, 4x and 12, with the middle terms combined."/>
           <p:cNvSpPr/>
           <p:nvPr/>
         </p:nvSpPr>
         <p:spPr>
           <a:xfrm flipH="false" flipV="false" rot="0">
-            <a:off x="8515350" y="1676400"/>
-            <a:ext cx="2114550" cy="4572000"/>
+            <a:off x="838200" y="2000250"/>
+            <a:ext cx="3905250" cy="3813851"/>
           </a:xfrm>
           <a:custGeom>
             <a:avLst/>
@@ -19070,18 +20557,18 @@
             <a:cxnLst/>
             <a:rect r="r" b="b" t="t" l="l"/>
             <a:pathLst>
-              <a:path h="4572000" w="2114550">
+              <a:path h="3813851" w="3905250">
                 <a:moveTo>
                   <a:pt x="0" y="0"/>
                 </a:moveTo>
                 <a:lnTo>
-                  <a:pt x="2114550" y="0"/>
+                  <a:pt x="3905250" y="0"/>
                 </a:lnTo>
                 <a:lnTo>
-                  <a:pt x="2114550" y="4572000"/>
+                  <a:pt x="3905250" y="3813851"/>
                 </a:lnTo>
                 <a:lnTo>
-                  <a:pt x="0" y="4572000"/>
+                  <a:pt x="0" y="3813851"/>
                 </a:lnTo>
                 <a:lnTo>
                   <a:pt x="0" y="0"/>
@@ -19093,7 +20580,7 @@
           <a:blipFill>
             <a:blip r:embed="rId10"/>
             <a:stretch>
-              <a:fillRect l="0" t="-135" r="0" b="-135"/>
+              <a:fillRect l="-35" t="0" r="-35" b="0"/>
             </a:stretch>
           </a:blipFill>
         </p:spPr>
@@ -19106,7 +20593,7 @@
 </p:sld>
 </file>
 
-<file path=ppt/slides/slide5.xml><?xml version="1.0" encoding="utf-8"?>
+<file path=ppt/slides/slide6.xml><?xml version="1.0" encoding="utf-8"?>
 <p:sld xmlns:p="http://schemas.openxmlformats.org/presentationml/2006/main" xmlns:a="http://schemas.openxmlformats.org/drawingml/2006/main" xmlns:r="http://schemas.openxmlformats.org/officeDocument/2006/relationships">
   <p:cSld>
     <p:spTree>
@@ -19355,1226 +20842,6 @@
                 <a:cs typeface="DM Sans"/>
                 <a:sym typeface="DM Sans"/>
               </a:rPr>
-              <a:t>05</a:t>
-            </a:r>
-          </a:p>
-        </p:txBody>
-      </p:sp>
-      <p:sp>
-        <p:nvSpPr>
-          <p:cNvPr name="TextBox 9" id="9"/>
-          <p:cNvSpPr txBox="true"/>
-          <p:nvPr/>
-        </p:nvSpPr>
-        <p:spPr>
-          <a:xfrm rot="0">
-            <a:off x="609600" y="866775"/>
-            <a:ext cx="10972800" cy="487299"/>
-          </a:xfrm>
-          <a:prstGeom prst="rect">
-            <a:avLst/>
-          </a:prstGeom>
-        </p:spPr>
-        <p:txBody>
-          <a:bodyPr anchor="t" rtlCol="false" tIns="0" lIns="0" bIns="0" rIns="0">
-            <a:spAutoFit/>
-          </a:bodyPr>
-          <a:lstStyle/>
-          <a:p>
-            <a:pPr algn="l" marL="0" indent="0" lvl="0">
-              <a:lnSpc>
-                <a:spcPts val="3843"/>
-              </a:lnSpc>
-              <a:spcBef>
-                <a:spcPct val="0"/>
-              </a:spcBef>
-            </a:pPr>
-            <a:r>
-              <a:rPr lang="en-US" b="true" sz="3150" strike="noStrike" u="none">
-                <a:solidFill>
-                  <a:srgbClr val="0A2A66"/>
-                </a:solidFill>
-                <a:latin typeface="DM Sans Bold"/>
-                <a:ea typeface="DM Sans Bold"/>
-                <a:cs typeface="DM Sans Bold"/>
-                <a:sym typeface="DM Sans Bold"/>
-              </a:rPr>
-              <a:t>Make the relationship visible</a:t>
-            </a:r>
-          </a:p>
-        </p:txBody>
-      </p:sp>
-      <p:sp>
-        <p:nvSpPr>
-          <p:cNvPr name="TextBox 10" id="10"/>
-          <p:cNvSpPr txBox="true"/>
-          <p:nvPr/>
-        </p:nvSpPr>
-        <p:spPr>
-          <a:xfrm rot="0">
-            <a:off x="6667500" y="2209800"/>
-            <a:ext cx="4572000" cy="159258"/>
-          </a:xfrm>
-          <a:prstGeom prst="rect">
-            <a:avLst/>
-          </a:prstGeom>
-        </p:spPr>
-        <p:txBody>
-          <a:bodyPr anchor="t" rtlCol="false" tIns="0" lIns="0" bIns="0" rIns="0">
-            <a:spAutoFit/>
-          </a:bodyPr>
-          <a:lstStyle/>
-          <a:p>
-            <a:pPr algn="l" marL="0" indent="0" lvl="0">
-              <a:lnSpc>
-                <a:spcPts val="1281"/>
-              </a:lnSpc>
-              <a:spcBef>
-                <a:spcPct val="0"/>
-              </a:spcBef>
-            </a:pPr>
-            <a:r>
-              <a:rPr lang="en-US" sz="1050" strike="noStrike" u="none">
-                <a:solidFill>
-                  <a:srgbClr val="0A2A66"/>
-                </a:solidFill>
-                <a:latin typeface="DM Sans"/>
-                <a:ea typeface="DM Sans"/>
-                <a:cs typeface="DM Sans"/>
-                <a:sym typeface="DM Sans"/>
-              </a:rPr>
-              <a:t>FOUR AREAS</a:t>
-            </a:r>
-          </a:p>
-        </p:txBody>
-      </p:sp>
-      <p:sp>
-        <p:nvSpPr>
-          <p:cNvPr name="TextBox 11" id="11"/>
-          <p:cNvSpPr txBox="true"/>
-          <p:nvPr/>
-        </p:nvSpPr>
-        <p:spPr>
-          <a:xfrm rot="0">
-            <a:off x="6667500" y="2533650"/>
-            <a:ext cx="4572000" cy="346710"/>
-          </a:xfrm>
-          <a:prstGeom prst="rect">
-            <a:avLst/>
-          </a:prstGeom>
-        </p:spPr>
-        <p:txBody>
-          <a:bodyPr anchor="t" rtlCol="false" tIns="0" lIns="0" bIns="0" rIns="0">
-            <a:spAutoFit/>
-          </a:bodyPr>
-          <a:lstStyle/>
-          <a:p>
-            <a:pPr algn="l" marL="0" indent="0" lvl="0">
-              <a:lnSpc>
-                <a:spcPts val="2745"/>
-              </a:lnSpc>
-              <a:spcBef>
-                <a:spcPct val="0"/>
-              </a:spcBef>
-            </a:pPr>
-            <a:r>
-              <a:rPr lang="en-US" sz="2250" strike="noStrike" u="none">
-                <a:solidFill>
-                  <a:srgbClr val="0A2A66"/>
-                </a:solidFill>
-                <a:latin typeface="DM Sans"/>
-                <a:ea typeface="DM Sans"/>
-                <a:cs typeface="DM Sans"/>
-                <a:sym typeface="DM Sans"/>
-              </a:rPr>
-              <a:t>x² + 3x + 4x + 12</a:t>
-            </a:r>
-          </a:p>
-        </p:txBody>
-      </p:sp>
-      <p:sp>
-        <p:nvSpPr>
-          <p:cNvPr name="TextBox 12" id="12"/>
-          <p:cNvSpPr txBox="true"/>
-          <p:nvPr/>
-        </p:nvSpPr>
-        <p:spPr>
-          <a:xfrm rot="0">
-            <a:off x="6667500" y="2952750"/>
-            <a:ext cx="4572000" cy="234315"/>
-          </a:xfrm>
-          <a:prstGeom prst="rect">
-            <a:avLst/>
-          </a:prstGeom>
-        </p:spPr>
-        <p:txBody>
-          <a:bodyPr anchor="t" rtlCol="false" tIns="0" lIns="0" bIns="0" rIns="0">
-            <a:spAutoFit/>
-          </a:bodyPr>
-          <a:lstStyle/>
-          <a:p>
-            <a:pPr algn="l" marL="0" indent="0" lvl="0">
-              <a:lnSpc>
-                <a:spcPts val="1830"/>
-              </a:lnSpc>
-              <a:spcBef>
-                <a:spcPct val="0"/>
-              </a:spcBef>
-            </a:pPr>
-            <a:r>
-              <a:rPr lang="en-US" sz="1500" strike="noStrike" u="none">
-                <a:solidFill>
-                  <a:srgbClr val="0A2A66"/>
-                </a:solidFill>
-                <a:latin typeface="DM Sans"/>
-                <a:ea typeface="DM Sans"/>
-                <a:cs typeface="DM Sans"/>
-                <a:sym typeface="DM Sans"/>
-              </a:rPr>
-              <a:t>Each part keeps its meaning.</a:t>
-            </a:r>
-          </a:p>
-        </p:txBody>
-      </p:sp>
-      <p:sp>
-        <p:nvSpPr>
-          <p:cNvPr name="AutoShape 13" id="13"/>
-          <p:cNvSpPr/>
-          <p:nvPr/>
-        </p:nvSpPr>
-        <p:spPr>
-          <a:xfrm rot="0">
-            <a:off x="3990975" y="3838575"/>
-            <a:ext cx="238125" cy="38100"/>
-          </a:xfrm>
-          <a:prstGeom prst="rect">
-            <a:avLst/>
-          </a:prstGeom>
-          <a:solidFill>
-            <a:srgbClr val="CCD7E4"/>
-          </a:solidFill>
-        </p:spPr>
-      </p:sp>
-      <p:grpSp>
-        <p:nvGrpSpPr>
-          <p:cNvPr name="Group 14" id="14"/>
-          <p:cNvGrpSpPr/>
-          <p:nvPr/>
-        </p:nvGrpSpPr>
-        <p:grpSpPr>
-          <a:xfrm rot="1840140">
-            <a:off x="4171283" y="3802952"/>
-            <a:ext cx="171450" cy="28575"/>
-            <a:chOff x="0" y="0"/>
-            <a:chExt cx="228600" cy="38100"/>
-          </a:xfrm>
-        </p:grpSpPr>
-        <p:sp>
-          <p:nvSpPr>
-            <p:cNvPr name="Freeform 15" id="15"/>
-            <p:cNvSpPr/>
-            <p:nvPr/>
-          </p:nvSpPr>
-          <p:spPr>
-            <a:xfrm flipH="false" flipV="false" rot="0">
-              <a:off x="0" y="0"/>
-              <a:ext cx="228600" cy="38100"/>
-            </a:xfrm>
-            <a:custGeom>
-              <a:avLst/>
-              <a:gdLst/>
-              <a:ahLst/>
-              <a:cxnLst/>
-              <a:rect r="r" b="b" t="t" l="l"/>
-              <a:pathLst>
-                <a:path h="38100" w="228600">
-                  <a:moveTo>
-                    <a:pt x="19050" y="0"/>
-                  </a:moveTo>
-                  <a:lnTo>
-                    <a:pt x="209550" y="0"/>
-                  </a:lnTo>
-                  <a:cubicBezTo>
-                    <a:pt x="220091" y="0"/>
-                    <a:pt x="228600" y="8509"/>
-                    <a:pt x="228600" y="19050"/>
-                  </a:cubicBezTo>
-                  <a:cubicBezTo>
-                    <a:pt x="228600" y="29591"/>
-                    <a:pt x="220091" y="38100"/>
-                    <a:pt x="209550" y="38100"/>
-                  </a:cubicBezTo>
-                  <a:lnTo>
-                    <a:pt x="19050" y="38100"/>
-                  </a:lnTo>
-                  <a:cubicBezTo>
-                    <a:pt x="8509" y="38100"/>
-                    <a:pt x="0" y="29591"/>
-                    <a:pt x="0" y="19050"/>
-                  </a:cubicBezTo>
-                  <a:cubicBezTo>
-                    <a:pt x="0" y="8509"/>
-                    <a:pt x="8509" y="0"/>
-                    <a:pt x="19050" y="0"/>
-                  </a:cubicBezTo>
-                  <a:close/>
-                </a:path>
-              </a:pathLst>
-            </a:custGeom>
-            <a:solidFill>
-              <a:srgbClr val="CCD7E4"/>
-            </a:solidFill>
-          </p:spPr>
-        </p:sp>
-      </p:grpSp>
-      <p:grpSp>
-        <p:nvGrpSpPr>
-          <p:cNvPr name="Group 16" id="16"/>
-          <p:cNvGrpSpPr/>
-          <p:nvPr/>
-        </p:nvGrpSpPr>
-        <p:grpSpPr>
-          <a:xfrm rot="8959860">
-            <a:off x="4163187" y="3888676"/>
-            <a:ext cx="171450" cy="28575"/>
-            <a:chOff x="0" y="0"/>
-            <a:chExt cx="228600" cy="38100"/>
-          </a:xfrm>
-        </p:grpSpPr>
-        <p:sp>
-          <p:nvSpPr>
-            <p:cNvPr name="Freeform 17" id="17"/>
-            <p:cNvSpPr/>
-            <p:nvPr/>
-          </p:nvSpPr>
-          <p:spPr>
-            <a:xfrm flipH="false" flipV="false" rot="0">
-              <a:off x="0" y="0"/>
-              <a:ext cx="228600" cy="38100"/>
-            </a:xfrm>
-            <a:custGeom>
-              <a:avLst/>
-              <a:gdLst/>
-              <a:ahLst/>
-              <a:cxnLst/>
-              <a:rect r="r" b="b" t="t" l="l"/>
-              <a:pathLst>
-                <a:path h="38100" w="228600">
-                  <a:moveTo>
-                    <a:pt x="19050" y="0"/>
-                  </a:moveTo>
-                  <a:lnTo>
-                    <a:pt x="209550" y="0"/>
-                  </a:lnTo>
-                  <a:cubicBezTo>
-                    <a:pt x="220091" y="0"/>
-                    <a:pt x="228600" y="8509"/>
-                    <a:pt x="228600" y="19050"/>
-                  </a:cubicBezTo>
-                  <a:cubicBezTo>
-                    <a:pt x="228600" y="29591"/>
-                    <a:pt x="220091" y="38100"/>
-                    <a:pt x="209550" y="38100"/>
-                  </a:cubicBezTo>
-                  <a:lnTo>
-                    <a:pt x="19050" y="38100"/>
-                  </a:lnTo>
-                  <a:cubicBezTo>
-                    <a:pt x="8509" y="38100"/>
-                    <a:pt x="0" y="29591"/>
-                    <a:pt x="0" y="19050"/>
-                  </a:cubicBezTo>
-                  <a:cubicBezTo>
-                    <a:pt x="0" y="8509"/>
-                    <a:pt x="8509" y="0"/>
-                    <a:pt x="19050" y="0"/>
-                  </a:cubicBezTo>
-                  <a:close/>
-                </a:path>
-              </a:pathLst>
-            </a:custGeom>
-            <a:solidFill>
-              <a:srgbClr val="CCD7E4"/>
-            </a:solidFill>
-          </p:spPr>
-        </p:sp>
-      </p:grpSp>
-      <p:sp>
-        <p:nvSpPr>
-          <p:cNvPr name="TextBox 18" id="18"/>
-          <p:cNvSpPr txBox="true"/>
-          <p:nvPr/>
-        </p:nvSpPr>
-        <p:spPr>
-          <a:xfrm rot="0">
-            <a:off x="6667500" y="3562350"/>
-            <a:ext cx="4572000" cy="159258"/>
-          </a:xfrm>
-          <a:prstGeom prst="rect">
-            <a:avLst/>
-          </a:prstGeom>
-        </p:spPr>
-        <p:txBody>
-          <a:bodyPr anchor="t" rtlCol="false" tIns="0" lIns="0" bIns="0" rIns="0">
-            <a:spAutoFit/>
-          </a:bodyPr>
-          <a:lstStyle/>
-          <a:p>
-            <a:pPr algn="l" marL="0" indent="0" lvl="0">
-              <a:lnSpc>
-                <a:spcPts val="1281"/>
-              </a:lnSpc>
-              <a:spcBef>
-                <a:spcPct val="0"/>
-              </a:spcBef>
-            </a:pPr>
-            <a:r>
-              <a:rPr lang="en-US" sz="1050" strike="noStrike" u="none">
-                <a:solidFill>
-                  <a:srgbClr val="0A2A66"/>
-                </a:solidFill>
-                <a:latin typeface="DM Sans"/>
-                <a:ea typeface="DM Sans"/>
-                <a:cs typeface="DM Sans"/>
-                <a:sym typeface="DM Sans"/>
-              </a:rPr>
-              <a:t>COMBINE</a:t>
-            </a:r>
-          </a:p>
-        </p:txBody>
-      </p:sp>
-      <p:sp>
-        <p:nvSpPr>
-          <p:cNvPr name="TextBox 19" id="19"/>
-          <p:cNvSpPr txBox="true"/>
-          <p:nvPr/>
-        </p:nvSpPr>
-        <p:spPr>
-          <a:xfrm rot="0">
-            <a:off x="6667500" y="3886200"/>
-            <a:ext cx="4572000" cy="346710"/>
-          </a:xfrm>
-          <a:prstGeom prst="rect">
-            <a:avLst/>
-          </a:prstGeom>
-        </p:spPr>
-        <p:txBody>
-          <a:bodyPr anchor="t" rtlCol="false" tIns="0" lIns="0" bIns="0" rIns="0">
-            <a:spAutoFit/>
-          </a:bodyPr>
-          <a:lstStyle/>
-          <a:p>
-            <a:pPr algn="l" marL="0" indent="0" lvl="0">
-              <a:lnSpc>
-                <a:spcPts val="2745"/>
-              </a:lnSpc>
-              <a:spcBef>
-                <a:spcPct val="0"/>
-              </a:spcBef>
-            </a:pPr>
-            <a:r>
-              <a:rPr lang="en-US" sz="2250" strike="noStrike" u="none">
-                <a:solidFill>
-                  <a:srgbClr val="0A2A66"/>
-                </a:solidFill>
-                <a:latin typeface="DM Sans"/>
-                <a:ea typeface="DM Sans"/>
-                <a:cs typeface="DM Sans"/>
-                <a:sym typeface="DM Sans"/>
-              </a:rPr>
-              <a:t>3x + 4x = 7x</a:t>
-            </a:r>
-          </a:p>
-        </p:txBody>
-      </p:sp>
-      <p:sp>
-        <p:nvSpPr>
-          <p:cNvPr name="TextBox 20" id="20"/>
-          <p:cNvSpPr txBox="true"/>
-          <p:nvPr/>
-        </p:nvSpPr>
-        <p:spPr>
-          <a:xfrm rot="0">
-            <a:off x="6667500" y="4286250"/>
-            <a:ext cx="4572000" cy="234315"/>
-          </a:xfrm>
-          <a:prstGeom prst="rect">
-            <a:avLst/>
-          </a:prstGeom>
-        </p:spPr>
-        <p:txBody>
-          <a:bodyPr anchor="t" rtlCol="false" tIns="0" lIns="0" bIns="0" rIns="0">
-            <a:spAutoFit/>
-          </a:bodyPr>
-          <a:lstStyle/>
-          <a:p>
-            <a:pPr algn="l" marL="0" indent="0" lvl="0">
-              <a:lnSpc>
-                <a:spcPts val="1830"/>
-              </a:lnSpc>
-              <a:spcBef>
-                <a:spcPct val="0"/>
-              </a:spcBef>
-            </a:pPr>
-            <a:r>
-              <a:rPr lang="en-US" sz="1500" strike="noStrike" u="none">
-                <a:solidFill>
-                  <a:srgbClr val="0A2A66"/>
-                </a:solidFill>
-                <a:latin typeface="DM Sans"/>
-                <a:ea typeface="DM Sans"/>
-                <a:cs typeface="DM Sans"/>
-                <a:sym typeface="DM Sans"/>
-              </a:rPr>
-              <a:t>The middle terms belong together.</a:t>
-            </a:r>
-          </a:p>
-        </p:txBody>
-      </p:sp>
-      <p:grpSp>
-        <p:nvGrpSpPr>
-          <p:cNvPr name="Group 21" id="21"/>
-          <p:cNvGrpSpPr/>
-          <p:nvPr/>
-        </p:nvGrpSpPr>
-        <p:grpSpPr>
-          <a:xfrm rot="1840140">
-            <a:off x="8057483" y="3802952"/>
-            <a:ext cx="171450" cy="28575"/>
-            <a:chOff x="0" y="0"/>
-            <a:chExt cx="228600" cy="38100"/>
-          </a:xfrm>
-        </p:grpSpPr>
-        <p:sp>
-          <p:nvSpPr>
-            <p:cNvPr name="Freeform 22" id="22"/>
-            <p:cNvSpPr/>
-            <p:nvPr/>
-          </p:nvSpPr>
-          <p:spPr>
-            <a:xfrm flipH="false" flipV="false" rot="0">
-              <a:off x="0" y="0"/>
-              <a:ext cx="228600" cy="38100"/>
-            </a:xfrm>
-            <a:custGeom>
-              <a:avLst/>
-              <a:gdLst/>
-              <a:ahLst/>
-              <a:cxnLst/>
-              <a:rect r="r" b="b" t="t" l="l"/>
-              <a:pathLst>
-                <a:path h="38100" w="228600">
-                  <a:moveTo>
-                    <a:pt x="19050" y="0"/>
-                  </a:moveTo>
-                  <a:lnTo>
-                    <a:pt x="209550" y="0"/>
-                  </a:lnTo>
-                  <a:cubicBezTo>
-                    <a:pt x="220091" y="0"/>
-                    <a:pt x="228600" y="8509"/>
-                    <a:pt x="228600" y="19050"/>
-                  </a:cubicBezTo>
-                  <a:cubicBezTo>
-                    <a:pt x="228600" y="29591"/>
-                    <a:pt x="220091" y="38100"/>
-                    <a:pt x="209550" y="38100"/>
-                  </a:cubicBezTo>
-                  <a:lnTo>
-                    <a:pt x="19050" y="38100"/>
-                  </a:lnTo>
-                  <a:cubicBezTo>
-                    <a:pt x="8509" y="38100"/>
-                    <a:pt x="0" y="29591"/>
-                    <a:pt x="0" y="19050"/>
-                  </a:cubicBezTo>
-                  <a:cubicBezTo>
-                    <a:pt x="0" y="8509"/>
-                    <a:pt x="8509" y="0"/>
-                    <a:pt x="19050" y="0"/>
-                  </a:cubicBezTo>
-                  <a:close/>
-                </a:path>
-              </a:pathLst>
-            </a:custGeom>
-            <a:solidFill>
-              <a:srgbClr val="CCD7E4"/>
-            </a:solidFill>
-          </p:spPr>
-        </p:sp>
-      </p:grpSp>
-      <p:grpSp>
-        <p:nvGrpSpPr>
-          <p:cNvPr name="Group 23" id="23"/>
-          <p:cNvGrpSpPr/>
-          <p:nvPr/>
-        </p:nvGrpSpPr>
-        <p:grpSpPr>
-          <a:xfrm rot="8959860">
-            <a:off x="8049387" y="3888676"/>
-            <a:ext cx="171450" cy="28575"/>
-            <a:chOff x="0" y="0"/>
-            <a:chExt cx="228600" cy="38100"/>
-          </a:xfrm>
-        </p:grpSpPr>
-        <p:sp>
-          <p:nvSpPr>
-            <p:cNvPr name="Freeform 24" id="24"/>
-            <p:cNvSpPr/>
-            <p:nvPr/>
-          </p:nvSpPr>
-          <p:spPr>
-            <a:xfrm flipH="false" flipV="false" rot="0">
-              <a:off x="0" y="0"/>
-              <a:ext cx="228600" cy="38100"/>
-            </a:xfrm>
-            <a:custGeom>
-              <a:avLst/>
-              <a:gdLst/>
-              <a:ahLst/>
-              <a:cxnLst/>
-              <a:rect r="r" b="b" t="t" l="l"/>
-              <a:pathLst>
-                <a:path h="38100" w="228600">
-                  <a:moveTo>
-                    <a:pt x="19050" y="0"/>
-                  </a:moveTo>
-                  <a:lnTo>
-                    <a:pt x="209550" y="0"/>
-                  </a:lnTo>
-                  <a:cubicBezTo>
-                    <a:pt x="220091" y="0"/>
-                    <a:pt x="228600" y="8509"/>
-                    <a:pt x="228600" y="19050"/>
-                  </a:cubicBezTo>
-                  <a:cubicBezTo>
-                    <a:pt x="228600" y="29591"/>
-                    <a:pt x="220091" y="38100"/>
-                    <a:pt x="209550" y="38100"/>
-                  </a:cubicBezTo>
-                  <a:lnTo>
-                    <a:pt x="19050" y="38100"/>
-                  </a:lnTo>
-                  <a:cubicBezTo>
-                    <a:pt x="8509" y="38100"/>
-                    <a:pt x="0" y="29591"/>
-                    <a:pt x="0" y="19050"/>
-                  </a:cubicBezTo>
-                  <a:cubicBezTo>
-                    <a:pt x="0" y="8509"/>
-                    <a:pt x="8509" y="0"/>
-                    <a:pt x="19050" y="0"/>
-                  </a:cubicBezTo>
-                  <a:close/>
-                </a:path>
-              </a:pathLst>
-            </a:custGeom>
-            <a:solidFill>
-              <a:srgbClr val="CCD7E4"/>
-            </a:solidFill>
-          </p:spPr>
-        </p:sp>
-      </p:grpSp>
-      <p:sp>
-        <p:nvSpPr>
-          <p:cNvPr name="TextBox 25" id="25"/>
-          <p:cNvSpPr txBox="true"/>
-          <p:nvPr/>
-        </p:nvSpPr>
-        <p:spPr>
-          <a:xfrm rot="0">
-            <a:off x="6667500" y="4895850"/>
-            <a:ext cx="4572000" cy="159258"/>
-          </a:xfrm>
-          <a:prstGeom prst="rect">
-            <a:avLst/>
-          </a:prstGeom>
-        </p:spPr>
-        <p:txBody>
-          <a:bodyPr anchor="t" rtlCol="false" tIns="0" lIns="0" bIns="0" rIns="0">
-            <a:spAutoFit/>
-          </a:bodyPr>
-          <a:lstStyle/>
-          <a:p>
-            <a:pPr algn="l" marL="0" indent="0" lvl="0">
-              <a:lnSpc>
-                <a:spcPts val="1281"/>
-              </a:lnSpc>
-              <a:spcBef>
-                <a:spcPct val="0"/>
-              </a:spcBef>
-            </a:pPr>
-            <a:r>
-              <a:rPr lang="en-US" sz="1050" strike="noStrike" u="none">
-                <a:solidFill>
-                  <a:srgbClr val="0A2A66"/>
-                </a:solidFill>
-                <a:latin typeface="DM Sans"/>
-                <a:ea typeface="DM Sans"/>
-                <a:cs typeface="DM Sans"/>
-                <a:sym typeface="DM Sans"/>
-              </a:rPr>
-              <a:t>RESULT</a:t>
-            </a:r>
-          </a:p>
-        </p:txBody>
-      </p:sp>
-      <p:sp>
-        <p:nvSpPr>
-          <p:cNvPr name="TextBox 26" id="26"/>
-          <p:cNvSpPr txBox="true"/>
-          <p:nvPr/>
-        </p:nvSpPr>
-        <p:spPr>
-          <a:xfrm rot="0">
-            <a:off x="6667500" y="5219700"/>
-            <a:ext cx="4572000" cy="346710"/>
-          </a:xfrm>
-          <a:prstGeom prst="rect">
-            <a:avLst/>
-          </a:prstGeom>
-        </p:spPr>
-        <p:txBody>
-          <a:bodyPr anchor="t" rtlCol="false" tIns="0" lIns="0" bIns="0" rIns="0">
-            <a:spAutoFit/>
-          </a:bodyPr>
-          <a:lstStyle/>
-          <a:p>
-            <a:pPr algn="l" marL="0" indent="0" lvl="0">
-              <a:lnSpc>
-                <a:spcPts val="2745"/>
-              </a:lnSpc>
-              <a:spcBef>
-                <a:spcPct val="0"/>
-              </a:spcBef>
-            </a:pPr>
-            <a:r>
-              <a:rPr lang="en-US" sz="2250" strike="noStrike" u="none">
-                <a:solidFill>
-                  <a:srgbClr val="0A2A66"/>
-                </a:solidFill>
-                <a:latin typeface="DM Sans"/>
-                <a:ea typeface="DM Sans"/>
-                <a:cs typeface="DM Sans"/>
-                <a:sym typeface="DM Sans"/>
-              </a:rPr>
-              <a:t>x² + 7x + 12</a:t>
-            </a:r>
-          </a:p>
-        </p:txBody>
-      </p:sp>
-      <p:sp>
-        <p:nvSpPr>
-          <p:cNvPr name="TextBox 27" id="27"/>
-          <p:cNvSpPr txBox="true"/>
-          <p:nvPr/>
-        </p:nvSpPr>
-        <p:spPr>
-          <a:xfrm rot="0">
-            <a:off x="6667500" y="5610225"/>
-            <a:ext cx="4572000" cy="234315"/>
-          </a:xfrm>
-          <a:prstGeom prst="rect">
-            <a:avLst/>
-          </a:prstGeom>
-        </p:spPr>
-        <p:txBody>
-          <a:bodyPr anchor="t" rtlCol="false" tIns="0" lIns="0" bIns="0" rIns="0">
-            <a:spAutoFit/>
-          </a:bodyPr>
-          <a:lstStyle/>
-          <a:p>
-            <a:pPr algn="l" marL="0" indent="0" lvl="0">
-              <a:lnSpc>
-                <a:spcPts val="1830"/>
-              </a:lnSpc>
-              <a:spcBef>
-                <a:spcPct val="0"/>
-              </a:spcBef>
-            </a:pPr>
-            <a:r>
-              <a:rPr lang="en-US" sz="1500" strike="noStrike" u="none">
-                <a:solidFill>
-                  <a:srgbClr val="0A2A66"/>
-                </a:solidFill>
-                <a:latin typeface="DM Sans"/>
-                <a:ea typeface="DM Sans"/>
-                <a:cs typeface="DM Sans"/>
-                <a:sym typeface="DM Sans"/>
-              </a:rPr>
-              <a:t>Then try a different question.</a:t>
-            </a:r>
-          </a:p>
-        </p:txBody>
-      </p:sp>
-      <p:sp>
-        <p:nvSpPr>
-          <p:cNvPr name="TextBox 28" id="28"/>
-          <p:cNvSpPr txBox="true"/>
-          <p:nvPr/>
-        </p:nvSpPr>
-        <p:spPr>
-          <a:xfrm rot="0">
-            <a:off x="609600" y="6181725"/>
-            <a:ext cx="9906000" cy="187452"/>
-          </a:xfrm>
-          <a:prstGeom prst="rect">
-            <a:avLst/>
-          </a:prstGeom>
-        </p:spPr>
-        <p:txBody>
-          <a:bodyPr anchor="t" rtlCol="false" tIns="0" lIns="0" bIns="0" rIns="0">
-            <a:spAutoFit/>
-          </a:bodyPr>
-          <a:lstStyle/>
-          <a:p>
-            <a:pPr algn="ctr" marL="0" indent="0" lvl="0">
-              <a:lnSpc>
-                <a:spcPts val="1464"/>
-              </a:lnSpc>
-              <a:spcBef>
-                <a:spcPct val="0"/>
-              </a:spcBef>
-            </a:pPr>
-            <a:r>
-              <a:rPr lang="en-US" sz="1200" strike="noStrike" u="none">
-                <a:solidFill>
-                  <a:srgbClr val="0A2A66"/>
-                </a:solidFill>
-                <a:latin typeface="DM Sans"/>
-                <a:ea typeface="DM Sans"/>
-                <a:cs typeface="DM Sans"/>
-                <a:sym typeface="DM Sans"/>
-                <a:hlinkClick r:id="rId7" tooltip="https://dunlo.vercel.app/explore?item=four-pieces"/>
-              </a:rPr>
-              <a:t>Original Dunlo interactive · Explore the factor model</a:t>
-            </a:r>
-          </a:p>
-        </p:txBody>
-      </p:sp>
-      <p:sp>
-        <p:nvSpPr>
-          <p:cNvPr name="TextBox 29" id="29"/>
-          <p:cNvSpPr txBox="true"/>
-          <p:nvPr/>
-        </p:nvSpPr>
-        <p:spPr>
-          <a:xfrm rot="0">
-            <a:off x="609600" y="1600200"/>
-            <a:ext cx="10972800" cy="280988"/>
-          </a:xfrm>
-          <a:prstGeom prst="rect">
-            <a:avLst/>
-          </a:prstGeom>
-        </p:spPr>
-        <p:txBody>
-          <a:bodyPr anchor="t" rtlCol="false" tIns="0" lIns="0" bIns="0" rIns="0">
-            <a:spAutoFit/>
-          </a:bodyPr>
-          <a:lstStyle/>
-          <a:p>
-            <a:pPr algn="l" marL="0" indent="0" lvl="0">
-              <a:lnSpc>
-                <a:spcPts val="2287"/>
-              </a:lnSpc>
-              <a:spcBef>
-                <a:spcPct val="0"/>
-              </a:spcBef>
-            </a:pPr>
-            <a:r>
-              <a:rPr lang="en-US" sz="1875" strike="noStrike" u="none">
-                <a:solidFill>
-                  <a:srgbClr val="0A2A66"/>
-                </a:solidFill>
-                <a:latin typeface="DM Sans"/>
-                <a:ea typeface="DM Sans"/>
-                <a:cs typeface="DM Sans"/>
-                <a:sym typeface="DM Sans"/>
-              </a:rPr>
-              <a:t>Separate the pieces. Put the idea together.</a:t>
-            </a:r>
-          </a:p>
-        </p:txBody>
-      </p:sp>
-      <p:sp>
-        <p:nvSpPr>
-          <p:cNvPr name="AutoShape 30" id="30"/>
-          <p:cNvSpPr/>
-          <p:nvPr/>
-        </p:nvSpPr>
-        <p:spPr>
-          <a:xfrm>
-            <a:off x="609600" y="1381125"/>
-            <a:ext cx="10972800" cy="0"/>
-          </a:xfrm>
-          <a:prstGeom prst="line">
-            <a:avLst/>
-          </a:prstGeom>
-          <a:ln cap="flat" w="19050">
-            <a:solidFill>
-              <a:srgbClr val="CCD7E4"/>
-            </a:solidFill>
-            <a:prstDash val="solid"/>
-            <a:headEnd type="none" len="sm" w="sm"/>
-            <a:tailEnd type="none" len="sm" w="sm"/>
-          </a:ln>
-        </p:spPr>
-      </p:sp>
-      <p:sp>
-        <p:nvSpPr>
-          <p:cNvPr name="Freeform 31" id="31" descr="Dunlo"/>
-          <p:cNvSpPr/>
-          <p:nvPr/>
-        </p:nvSpPr>
-        <p:spPr>
-          <a:xfrm flipH="false" flipV="false" rot="0">
-            <a:off x="609600" y="38100"/>
-            <a:ext cx="1571625" cy="521160"/>
-          </a:xfrm>
-          <a:custGeom>
-            <a:avLst/>
-            <a:gdLst/>
-            <a:ahLst/>
-            <a:cxnLst/>
-            <a:rect r="r" b="b" t="t" l="l"/>
-            <a:pathLst>
-              <a:path h="521160" w="1571625">
-                <a:moveTo>
-                  <a:pt x="0" y="0"/>
-                </a:moveTo>
-                <a:lnTo>
-                  <a:pt x="1571625" y="0"/>
-                </a:lnTo>
-                <a:lnTo>
-                  <a:pt x="1571625" y="521160"/>
-                </a:lnTo>
-                <a:lnTo>
-                  <a:pt x="0" y="521160"/>
-                </a:lnTo>
-                <a:lnTo>
-                  <a:pt x="0" y="0"/>
-                </a:lnTo>
-                <a:close/>
-              </a:path>
-            </a:pathLst>
-          </a:custGeom>
-          <a:blipFill>
-            <a:blip r:embed="rId8">
-              <a:extLst>
-                <a:ext uri="{96DAC541-7B7A-43D3-8B79-37D633B846F1}">
-                  <asvg:svgBlip xmlns:asvg="http://schemas.microsoft.com/office/drawing/2016/SVG/main" r:embed="rId9"/>
-                </a:ext>
-              </a:extLst>
-            </a:blip>
-            <a:stretch>
-              <a:fillRect l="0" t="0" r="0" b="0"/>
-            </a:stretch>
-          </a:blipFill>
-        </p:spPr>
-      </p:sp>
-      <p:sp>
-        <p:nvSpPr>
-          <p:cNvPr name="Freeform 32" id="32" descr="Original Dunlo factor model: four areas x squared, 3x, 4x and 12, with the middle terms combined."/>
-          <p:cNvSpPr/>
-          <p:nvPr/>
-        </p:nvSpPr>
-        <p:spPr>
-          <a:xfrm flipH="false" flipV="false" rot="0">
-            <a:off x="838200" y="2000250"/>
-            <a:ext cx="3905250" cy="3813851"/>
-          </a:xfrm>
-          <a:custGeom>
-            <a:avLst/>
-            <a:gdLst/>
-            <a:ahLst/>
-            <a:cxnLst/>
-            <a:rect r="r" b="b" t="t" l="l"/>
-            <a:pathLst>
-              <a:path h="3813851" w="3905250">
-                <a:moveTo>
-                  <a:pt x="0" y="0"/>
-                </a:moveTo>
-                <a:lnTo>
-                  <a:pt x="3905250" y="0"/>
-                </a:lnTo>
-                <a:lnTo>
-                  <a:pt x="3905250" y="3813851"/>
-                </a:lnTo>
-                <a:lnTo>
-                  <a:pt x="0" y="3813851"/>
-                </a:lnTo>
-                <a:lnTo>
-                  <a:pt x="0" y="0"/>
-                </a:lnTo>
-                <a:close/>
-              </a:path>
-            </a:pathLst>
-          </a:custGeom>
-          <a:blipFill>
-            <a:blip r:embed="rId10"/>
-            <a:stretch>
-              <a:fillRect l="-35" t="0" r="-35" b="0"/>
-            </a:stretch>
-          </a:blipFill>
-        </p:spPr>
-      </p:sp>
-    </p:spTree>
-  </p:cSld>
-  <p:clrMapOvr>
-    <a:masterClrMapping/>
-  </p:clrMapOvr>
-</p:sld>
-</file>
-
-<file path=ppt/slides/slide6.xml><?xml version="1.0" encoding="utf-8"?>
-<p:sld xmlns:p="http://schemas.openxmlformats.org/presentationml/2006/main" xmlns:a="http://schemas.openxmlformats.org/drawingml/2006/main" xmlns:r="http://schemas.openxmlformats.org/officeDocument/2006/relationships">
-  <p:cSld>
-    <p:spTree>
-      <p:nvGrpSpPr>
-        <p:cNvPr id="1" name=""/>
-        <p:cNvGrpSpPr/>
-        <p:nvPr/>
-      </p:nvGrpSpPr>
-      <p:grpSpPr>
-        <a:xfrm>
-          <a:off x="0" y="0"/>
-          <a:ext cx="0" cy="0"/>
-          <a:chOff x="0" y="0"/>
-          <a:chExt cx="0" cy="0"/>
-        </a:xfrm>
-      </p:grpSpPr>
-      <p:sp>
-        <p:nvSpPr>
-          <p:cNvPr name="AutoShape 2" id="2"/>
-          <p:cNvSpPr/>
-          <p:nvPr/>
-        </p:nvSpPr>
-        <p:spPr>
-          <a:xfrm rot="0">
-            <a:off x="0" y="0"/>
-            <a:ext cx="12192000" cy="6858000"/>
-          </a:xfrm>
-          <a:prstGeom prst="rect">
-            <a:avLst/>
-          </a:prstGeom>
-          <a:solidFill>
-            <a:srgbClr val="FFFFFF"/>
-          </a:solidFill>
-        </p:spPr>
-      </p:sp>
-      <p:grpSp>
-        <p:nvGrpSpPr>
-          <p:cNvPr name="Group 3" id="3"/>
-          <p:cNvGrpSpPr/>
-          <p:nvPr/>
-        </p:nvGrpSpPr>
-        <p:grpSpPr>
-          <a:xfrm rot="0">
-            <a:off x="0" y="0"/>
-            <a:ext cx="12192000" cy="6858000"/>
-            <a:chOff x="0" y="0"/>
-            <a:chExt cx="16256000" cy="9144000"/>
-          </a:xfrm>
-        </p:grpSpPr>
-        <p:sp>
-          <p:nvSpPr>
-            <p:cNvPr name="Freeform 4" id="4"/>
-            <p:cNvSpPr/>
-            <p:nvPr/>
-          </p:nvSpPr>
-          <p:spPr>
-            <a:xfrm flipH="false" flipV="false" rot="0">
-              <a:off x="0" y="0"/>
-              <a:ext cx="16256000" cy="9144000"/>
-            </a:xfrm>
-            <a:custGeom>
-              <a:avLst/>
-              <a:gdLst/>
-              <a:ahLst/>
-              <a:cxnLst/>
-              <a:rect r="r" b="b" t="t" l="l"/>
-              <a:pathLst>
-                <a:path h="9144000" w="16256000">
-                  <a:moveTo>
-                    <a:pt x="0" y="0"/>
-                  </a:moveTo>
-                  <a:lnTo>
-                    <a:pt x="16256000" y="0"/>
-                  </a:lnTo>
-                  <a:lnTo>
-                    <a:pt x="16256000" y="9144000"/>
-                  </a:lnTo>
-                  <a:lnTo>
-                    <a:pt x="0" y="9144000"/>
-                  </a:lnTo>
-                  <a:lnTo>
-                    <a:pt x="0" y="0"/>
-                  </a:lnTo>
-                  <a:close/>
-                </a:path>
-              </a:pathLst>
-            </a:custGeom>
-            <a:blipFill>
-              <a:blip r:embed="rId3"/>
-              <a:stretch>
-                <a:fillRect l="0" t="0" r="0" b="0"/>
-              </a:stretch>
-            </a:blipFill>
-          </p:spPr>
-        </p:sp>
-      </p:grpSp>
-      <p:grpSp>
-        <p:nvGrpSpPr>
-          <p:cNvPr name="Group 5" id="5"/>
-          <p:cNvGrpSpPr/>
-          <p:nvPr/>
-        </p:nvGrpSpPr>
-        <p:grpSpPr>
-          <a:xfrm rot="0">
-            <a:off x="0" y="0"/>
-            <a:ext cx="12192000" cy="6858000"/>
-            <a:chOff x="0" y="0"/>
-            <a:chExt cx="16256000" cy="9144000"/>
-          </a:xfrm>
-        </p:grpSpPr>
-        <p:sp>
-          <p:nvSpPr>
-            <p:cNvPr name="Freeform 6" id="6"/>
-            <p:cNvSpPr/>
-            <p:nvPr/>
-          </p:nvSpPr>
-          <p:spPr>
-            <a:xfrm flipH="false" flipV="false" rot="0">
-              <a:off x="0" y="0"/>
-              <a:ext cx="16256000" cy="9144000"/>
-            </a:xfrm>
-            <a:custGeom>
-              <a:avLst/>
-              <a:gdLst/>
-              <a:ahLst/>
-              <a:cxnLst/>
-              <a:rect r="r" b="b" t="t" l="l"/>
-              <a:pathLst>
-                <a:path h="9144000" w="16256000">
-                  <a:moveTo>
-                    <a:pt x="0" y="0"/>
-                  </a:moveTo>
-                  <a:lnTo>
-                    <a:pt x="16256000" y="0"/>
-                  </a:lnTo>
-                  <a:lnTo>
-                    <a:pt x="16256000" y="9144000"/>
-                  </a:lnTo>
-                  <a:lnTo>
-                    <a:pt x="0" y="9144000"/>
-                  </a:lnTo>
-                  <a:lnTo>
-                    <a:pt x="0" y="0"/>
-                  </a:lnTo>
-                  <a:close/>
-                </a:path>
-              </a:pathLst>
-            </a:custGeom>
-            <a:blipFill>
-              <a:blip r:embed="rId4">
-                <a:extLst>
-                  <a:ext uri="{96DAC541-7B7A-43D3-8B79-37D633B846F1}">
-                    <asvg:svgBlip xmlns:asvg="http://schemas.microsoft.com/office/drawing/2016/SVG/main" r:embed="rId5"/>
-                  </a:ext>
-                </a:extLst>
-              </a:blip>
-              <a:stretch>
-                <a:fillRect l="0" t="0" r="0" b="0"/>
-              </a:stretch>
-            </a:blipFill>
-          </p:spPr>
-        </p:sp>
-        <p:sp>
-          <p:nvSpPr>
-            <p:cNvPr name="Freeform 7" id="7"/>
-            <p:cNvSpPr/>
-            <p:nvPr/>
-          </p:nvSpPr>
-          <p:spPr>
-            <a:xfrm flipH="false" flipV="false" rot="0">
-              <a:off x="11887200" y="0"/>
-              <a:ext cx="3556000" cy="803656"/>
-            </a:xfrm>
-            <a:custGeom>
-              <a:avLst/>
-              <a:gdLst/>
-              <a:ahLst/>
-              <a:cxnLst/>
-              <a:rect r="r" b="b" t="t" l="l"/>
-              <a:pathLst>
-                <a:path h="803656" w="3556000">
-                  <a:moveTo>
-                    <a:pt x="0" y="0"/>
-                  </a:moveTo>
-                  <a:lnTo>
-                    <a:pt x="3556000" y="0"/>
-                  </a:lnTo>
-                  <a:lnTo>
-                    <a:pt x="3556000" y="803656"/>
-                  </a:lnTo>
-                  <a:lnTo>
-                    <a:pt x="0" y="803656"/>
-                  </a:lnTo>
-                  <a:lnTo>
-                    <a:pt x="0" y="0"/>
-                  </a:lnTo>
-                  <a:close/>
-                </a:path>
-              </a:pathLst>
-            </a:custGeom>
-            <a:blipFill>
-              <a:blip r:embed="rId6"/>
-              <a:stretch>
-                <a:fillRect l="0" t="0" r="0" b="0"/>
-              </a:stretch>
-            </a:blipFill>
-          </p:spPr>
-        </p:sp>
-      </p:grpSp>
-      <p:sp>
-        <p:nvSpPr>
-          <p:cNvPr name="TextBox 8" id="8"/>
-          <p:cNvSpPr txBox="true"/>
-          <p:nvPr/>
-        </p:nvSpPr>
-        <p:spPr>
-          <a:xfrm rot="0">
-            <a:off x="11239500" y="6353175"/>
-            <a:ext cx="428625" cy="168592"/>
-          </a:xfrm>
-          <a:prstGeom prst="rect">
-            <a:avLst/>
-          </a:prstGeom>
-        </p:spPr>
-        <p:txBody>
-          <a:bodyPr anchor="t" rtlCol="false" tIns="0" lIns="0" bIns="0" rIns="0">
-            <a:spAutoFit/>
-          </a:bodyPr>
-          <a:lstStyle/>
-          <a:p>
-            <a:pPr algn="l" marL="0" indent="0" lvl="0">
-              <a:lnSpc>
-                <a:spcPts val="1372"/>
-              </a:lnSpc>
-              <a:spcBef>
-                <a:spcPct val="0"/>
-              </a:spcBef>
-            </a:pPr>
-            <a:r>
-              <a:rPr lang="en-US" sz="1125" strike="noStrike" u="none">
-                <a:solidFill>
-                  <a:srgbClr val="0A2A66"/>
-                </a:solidFill>
-                <a:latin typeface="DM Sans"/>
-                <a:ea typeface="DM Sans"/>
-                <a:cs typeface="DM Sans"/>
-                <a:sym typeface="DM Sans"/>
-              </a:rPr>
               <a:t>06</a:t>
             </a:r>
           </a:p>
@@ -20676,8 +20943,8 @@
         </p:nvSpPr>
         <p:spPr>
           <a:xfrm rot="0">
-            <a:off x="609600" y="2790825"/>
-            <a:ext cx="5048250" cy="869061"/>
+            <a:off x="609600" y="2781300"/>
+            <a:ext cx="5048250" cy="973074"/>
           </a:xfrm>
           <a:prstGeom prst="rect">
             <a:avLst/>
@@ -20691,14 +20958,14 @@
           <a:p>
             <a:pPr algn="ctr" marL="0" indent="0" lvl="0">
               <a:lnSpc>
-                <a:spcPts val="3476"/>
+                <a:spcPts val="3843"/>
               </a:lnSpc>
               <a:spcBef>
                 <a:spcPct val="0"/>
               </a:spcBef>
             </a:pPr>
             <a:r>
-              <a:rPr lang="en-US" sz="2850" strike="noStrike" u="none">
+              <a:rPr lang="en-US" sz="3150" strike="noStrike" u="none">
                 <a:solidFill>
                   <a:srgbClr val="0A2A66"/>
                 </a:solidFill>
@@ -20707,20 +20974,20 @@
                 <a:cs typeface="DM Sans"/>
                 <a:sym typeface="DM Sans"/>
               </a:rPr>
-              <a:t>Watch the original.</a:t>
+              <a:t>One focused clip.</a:t>
             </a:r>
           </a:p>
           <a:p>
             <a:pPr algn="ctr" marL="0" indent="0" lvl="0">
               <a:lnSpc>
-                <a:spcPts val="3476"/>
+                <a:spcPts val="3843"/>
               </a:lnSpc>
               <a:spcBef>
                 <a:spcPct val="0"/>
               </a:spcBef>
             </a:pPr>
             <a:r>
-              <a:rPr lang="en-US" sz="2850" strike="noStrike" u="none">
+              <a:rPr lang="en-US" sz="3150" strike="noStrike" u="none">
                 <a:solidFill>
                   <a:srgbClr val="0A2A66"/>
                 </a:solidFill>
@@ -20729,7 +20996,7 @@
                 <a:cs typeface="DM Sans"/>
                 <a:sym typeface="DM Sans"/>
               </a:rPr>
-              <a:t>Then try the idea.</a:t>
+              <a:t>A clear next step.</a:t>
             </a:r>
           </a:p>
         </p:txBody>
@@ -20742,8 +21009,8 @@
         </p:nvSpPr>
         <p:spPr>
           <a:xfrm rot="0">
-            <a:off x="609600" y="4191000"/>
-            <a:ext cx="5143500" cy="604456"/>
+            <a:off x="609600" y="4105275"/>
+            <a:ext cx="5381625" cy="909256"/>
           </a:xfrm>
           <a:prstGeom prst="rect">
             <a:avLst/>
@@ -20773,7 +21040,7 @@
                 <a:cs typeface="DM Sans"/>
                 <a:sym typeface="DM Sans"/>
               </a:rPr>
-              <a:t>A focused explanation,</a:t>
+              <a:t>The original Khan video plays in the feed.</a:t>
             </a:r>
           </a:p>
           <a:p>
@@ -20795,7 +21062,29 @@
                 <a:cs typeface="DM Sans"/>
                 <a:sym typeface="DM Sans"/>
               </a:rPr>
-              <a:t>with a useful next step.</a:t>
+              <a:t>Learners can open the full lesson,</a:t>
+            </a:r>
+          </a:p>
+          <a:p>
+            <a:pPr algn="ctr" marL="0" indent="0" lvl="0">
+              <a:lnSpc>
+                <a:spcPts val="2470"/>
+              </a:lnSpc>
+              <a:spcBef>
+                <a:spcPct val="0"/>
+              </a:spcBef>
+            </a:pPr>
+            <a:r>
+              <a:rPr lang="en-US" sz="2025" strike="noStrike" u="none">
+                <a:solidFill>
+                  <a:srgbClr val="0A2A66"/>
+                </a:solidFill>
+                <a:latin typeface="DM Sans"/>
+                <a:ea typeface="DM Sans"/>
+                <a:cs typeface="DM Sans"/>
+                <a:sym typeface="DM Sans"/>
+              </a:rPr>
+              <a:t>then practise the same skill on Khan.</a:t>
             </a:r>
           </a:p>
         </p:txBody>
@@ -21391,8 +21680,8 @@
         </p:nvSpPr>
         <p:spPr>
           <a:xfrm rot="0">
-            <a:off x="609600" y="3476625"/>
-            <a:ext cx="2571750" cy="576072"/>
+            <a:off x="609600" y="3467100"/>
+            <a:ext cx="2571750" cy="909256"/>
           </a:xfrm>
           <a:prstGeom prst="rect">
             <a:avLst/>
@@ -21406,14 +21695,14 @@
           <a:p>
             <a:pPr algn="ctr" marL="0" indent="0" lvl="0">
               <a:lnSpc>
-                <a:spcPts val="2379"/>
+                <a:spcPts val="2470"/>
               </a:lnSpc>
               <a:spcBef>
                 <a:spcPct val="0"/>
               </a:spcBef>
             </a:pPr>
             <a:r>
-              <a:rPr lang="en-US" sz="1950" strike="noStrike" u="none">
+              <a:rPr lang="en-US" sz="2025" strike="noStrike" u="none">
                 <a:solidFill>
                   <a:srgbClr val="0A2A66"/>
                 </a:solidFill>
@@ -21422,20 +21711,20 @@
                 <a:cs typeface="DM Sans"/>
                 <a:sym typeface="DM Sans"/>
               </a:rPr>
-              <a:t>A fresh check</a:t>
+              <a:t>A short question</a:t>
             </a:r>
           </a:p>
           <a:p>
             <a:pPr algn="ctr" marL="0" indent="0" lvl="0">
               <a:lnSpc>
-                <a:spcPts val="2379"/>
+                <a:spcPts val="2470"/>
               </a:lnSpc>
               <a:spcBef>
                 <a:spcPct val="0"/>
               </a:spcBef>
             </a:pPr>
             <a:r>
-              <a:rPr lang="en-US" sz="1950" strike="noStrike" u="none">
+              <a:rPr lang="en-US" sz="2025" strike="noStrike" u="none">
                 <a:solidFill>
                   <a:srgbClr val="0A2A66"/>
                 </a:solidFill>
@@ -21444,7 +21733,7 @@
                 <a:cs typeface="DM Sans"/>
                 <a:sym typeface="DM Sans"/>
               </a:rPr>
-              <a:t>clarifies the difficulty</a:t>
+              <a:t>finds the missing step</a:t>
             </a:r>
           </a:p>
         </p:txBody>
@@ -21730,8 +22019,8 @@
         </p:nvSpPr>
         <p:spPr>
           <a:xfrm rot="0">
-            <a:off x="4495800" y="3476625"/>
-            <a:ext cx="2571750" cy="871347"/>
+            <a:off x="4495800" y="3467100"/>
+            <a:ext cx="2571750" cy="604456"/>
           </a:xfrm>
           <a:prstGeom prst="rect">
             <a:avLst/>
@@ -21745,14 +22034,14 @@
           <a:p>
             <a:pPr algn="ctr" marL="0" indent="0" lvl="0">
               <a:lnSpc>
-                <a:spcPts val="2379"/>
+                <a:spcPts val="2470"/>
               </a:lnSpc>
               <a:spcBef>
                 <a:spcPct val="0"/>
               </a:spcBef>
             </a:pPr>
             <a:r>
-              <a:rPr lang="en-US" sz="1950" strike="noStrike" u="none">
+              <a:rPr lang="en-US" sz="2025" strike="noStrike" u="none">
                 <a:solidFill>
                   <a:srgbClr val="0A2A66"/>
                 </a:solidFill>
@@ -21761,20 +22050,20 @@
                 <a:cs typeface="DM Sans"/>
                 <a:sym typeface="DM Sans"/>
               </a:rPr>
-              <a:t>An explanation</a:t>
+              <a:t>A worked example</a:t>
             </a:r>
           </a:p>
           <a:p>
             <a:pPr algn="ctr" marL="0" indent="0" lvl="0">
               <a:lnSpc>
-                <a:spcPts val="2379"/>
+                <a:spcPts val="2470"/>
               </a:lnSpc>
               <a:spcBef>
                 <a:spcPct val="0"/>
               </a:spcBef>
             </a:pPr>
             <a:r>
-              <a:rPr lang="en-US" sz="1950" strike="noStrike" u="none">
+              <a:rPr lang="en-US" sz="2025" strike="noStrike" u="none">
                 <a:solidFill>
                   <a:srgbClr val="0A2A66"/>
                 </a:solidFill>
@@ -21783,7 +22072,7 @@
                 <a:cs typeface="DM Sans"/>
                 <a:sym typeface="DM Sans"/>
               </a:rPr>
-              <a:t>works through the step</a:t>
+              <a:t>explains that step</a:t>
             </a:r>
           </a:p>
         </p:txBody>
@@ -22069,8 +22358,74 @@
         </p:nvSpPr>
         <p:spPr>
           <a:xfrm rot="0">
-            <a:off x="8382000" y="3476625"/>
-            <a:ext cx="2571750" cy="576072"/>
+            <a:off x="8382000" y="3467100"/>
+            <a:ext cx="2571750" cy="909256"/>
+          </a:xfrm>
+          <a:prstGeom prst="rect">
+            <a:avLst/>
+          </a:prstGeom>
+        </p:spPr>
+        <p:txBody>
+          <a:bodyPr anchor="t" rtlCol="false" tIns="0" lIns="0" bIns="0" rIns="0">
+            <a:spAutoFit/>
+          </a:bodyPr>
+          <a:lstStyle/>
+          <a:p>
+            <a:pPr algn="ctr" marL="0" indent="0" lvl="0">
+              <a:lnSpc>
+                <a:spcPts val="2470"/>
+              </a:lnSpc>
+              <a:spcBef>
+                <a:spcPct val="0"/>
+              </a:spcBef>
+            </a:pPr>
+            <a:r>
+              <a:rPr lang="en-US" sz="2025" strike="noStrike" u="none">
+                <a:solidFill>
+                  <a:srgbClr val="0A2A66"/>
+                </a:solidFill>
+                <a:latin typeface="DM Sans"/>
+                <a:ea typeface="DM Sans"/>
+                <a:cs typeface="DM Sans"/>
+                <a:sym typeface="DM Sans"/>
+              </a:rPr>
+              <a:t>A new question</a:t>
+            </a:r>
+          </a:p>
+          <a:p>
+            <a:pPr algn="ctr" marL="0" indent="0" lvl="0">
+              <a:lnSpc>
+                <a:spcPts val="2470"/>
+              </a:lnSpc>
+              <a:spcBef>
+                <a:spcPct val="0"/>
+              </a:spcBef>
+            </a:pPr>
+            <a:r>
+              <a:rPr lang="en-US" sz="2025" strike="noStrike" u="none">
+                <a:solidFill>
+                  <a:srgbClr val="0A2A66"/>
+                </a:solidFill>
+                <a:latin typeface="DM Sans"/>
+                <a:ea typeface="DM Sans"/>
+                <a:cs typeface="DM Sans"/>
+                <a:sym typeface="DM Sans"/>
+              </a:rPr>
+              <a:t>checks independent use</a:t>
+            </a:r>
+          </a:p>
+        </p:txBody>
+      </p:sp>
+      <p:sp>
+        <p:nvSpPr>
+          <p:cNvPr name="TextBox 32" id="32"/>
+          <p:cNvSpPr txBox="true"/>
+          <p:nvPr/>
+        </p:nvSpPr>
+        <p:spPr>
+          <a:xfrm rot="0">
+            <a:off x="609600" y="5010150"/>
+            <a:ext cx="10972800" cy="280797"/>
           </a:xfrm>
           <a:prstGeom prst="rect">
             <a:avLst/>
@@ -22100,20 +22455,42 @@
                 <a:cs typeface="DM Sans"/>
                 <a:sym typeface="DM Sans"/>
               </a:rPr>
-              <a:t>A new question</a:t>
-            </a:r>
-          </a:p>
+              <a:t>Learners can choose “learn first” or check what they already know.</a:t>
+            </a:r>
+          </a:p>
+        </p:txBody>
+      </p:sp>
+      <p:sp>
+        <p:nvSpPr>
+          <p:cNvPr name="TextBox 33" id="33"/>
+          <p:cNvSpPr txBox="true"/>
+          <p:nvPr/>
+        </p:nvSpPr>
+        <p:spPr>
+          <a:xfrm rot="0">
+            <a:off x="609600" y="5467350"/>
+            <a:ext cx="10972800" cy="262318"/>
+          </a:xfrm>
+          <a:prstGeom prst="rect">
+            <a:avLst/>
+          </a:prstGeom>
+        </p:spPr>
+        <p:txBody>
+          <a:bodyPr anchor="t" rtlCol="false" tIns="0" lIns="0" bIns="0" rIns="0">
+            <a:spAutoFit/>
+          </a:bodyPr>
+          <a:lstStyle/>
           <a:p>
             <a:pPr algn="ctr" marL="0" indent="0" lvl="0">
               <a:lnSpc>
-                <a:spcPts val="2379"/>
+                <a:spcPts val="2104"/>
               </a:lnSpc>
               <a:spcBef>
                 <a:spcPct val="0"/>
               </a:spcBef>
             </a:pPr>
             <a:r>
-              <a:rPr lang="en-US" sz="1950" strike="noStrike" u="none">
+              <a:rPr lang="en-US" sz="1725" strike="noStrike" u="none">
                 <a:solidFill>
                   <a:srgbClr val="0A2A66"/>
                 </a:solidFill>
@@ -22122,95 +22499,7 @@
                 <a:cs typeface="DM Sans"/>
                 <a:sym typeface="DM Sans"/>
               </a:rPr>
-              <a:t>returns to the goal</a:t>
-            </a:r>
-          </a:p>
-        </p:txBody>
-      </p:sp>
-      <p:sp>
-        <p:nvSpPr>
-          <p:cNvPr name="TextBox 32" id="32"/>
-          <p:cNvSpPr txBox="true"/>
-          <p:nvPr/>
-        </p:nvSpPr>
-        <p:spPr>
-          <a:xfrm rot="0">
-            <a:off x="609600" y="5010150"/>
-            <a:ext cx="10972800" cy="280797"/>
-          </a:xfrm>
-          <a:prstGeom prst="rect">
-            <a:avLst/>
-          </a:prstGeom>
-        </p:spPr>
-        <p:txBody>
-          <a:bodyPr anchor="t" rtlCol="false" tIns="0" lIns="0" bIns="0" rIns="0">
-            <a:spAutoFit/>
-          </a:bodyPr>
-          <a:lstStyle/>
-          <a:p>
-            <a:pPr algn="ctr" marL="0" indent="0" lvl="0">
-              <a:lnSpc>
-                <a:spcPts val="2379"/>
-              </a:lnSpc>
-              <a:spcBef>
-                <a:spcPct val="0"/>
-              </a:spcBef>
-            </a:pPr>
-            <a:r>
-              <a:rPr lang="en-US" sz="1950" strike="noStrike" u="none">
-                <a:solidFill>
-                  <a:srgbClr val="0A2A66"/>
-                </a:solidFill>
-                <a:latin typeface="DM Sans"/>
-                <a:ea typeface="DM Sans"/>
-                <a:cs typeface="DM Sans"/>
-                <a:sym typeface="DM Sans"/>
-              </a:rPr>
-              <a:t>The learner can also choose to learn first.</a:t>
-            </a:r>
-          </a:p>
-        </p:txBody>
-      </p:sp>
-      <p:sp>
-        <p:nvSpPr>
-          <p:cNvPr name="TextBox 33" id="33"/>
-          <p:cNvSpPr txBox="true"/>
-          <p:nvPr/>
-        </p:nvSpPr>
-        <p:spPr>
-          <a:xfrm rot="0">
-            <a:off x="609600" y="5476875"/>
-            <a:ext cx="10972800" cy="215456"/>
-          </a:xfrm>
-          <a:prstGeom prst="rect">
-            <a:avLst/>
-          </a:prstGeom>
-        </p:spPr>
-        <p:txBody>
-          <a:bodyPr anchor="t" rtlCol="false" tIns="0" lIns="0" bIns="0" rIns="0">
-            <a:spAutoFit/>
-          </a:bodyPr>
-          <a:lstStyle/>
-          <a:p>
-            <a:pPr algn="ctr" marL="0" indent="0" lvl="0">
-              <a:lnSpc>
-                <a:spcPts val="1738"/>
-              </a:lnSpc>
-              <a:spcBef>
-                <a:spcPct val="0"/>
-              </a:spcBef>
-            </a:pPr>
-            <a:r>
-              <a:rPr lang="en-US" sz="1425" strike="noStrike" u="none">
-                <a:solidFill>
-                  <a:srgbClr val="0A2A66"/>
-                </a:solidFill>
-                <a:latin typeface="DM Sans"/>
-                <a:ea typeface="DM Sans"/>
-                <a:cs typeface="DM Sans"/>
-                <a:sym typeface="DM Sans"/>
-              </a:rPr>
-              <a:t>The existing recovery engine connects the support and return.</a:t>
+              <a:t>Worked examples guide the attempt; a different question checks what the learner can do next.</a:t>
             </a:r>
           </a:p>
         </p:txBody>

--- a/output/submission/Dunlo_KEIC_2026_Editable.pptx
+++ b/output/submission/Dunlo_KEIC_2026_Editable.pptx
@@ -620,7 +620,7 @@
           <a:p>
             <a:r>
               <a:rPr lang="en-US"/>
-              <a:t>Problem: understanding an explanation does not always make the next independent question straightforward. Dunlo connects a short-form starting point with practice and a useful return.</a:t>
+              <a:t>OECD’s PISA 2025 Philippines country note, published 8 September 2026, reports that 21% of participating Filipino 15-year-old students attained at least Level 2 in mathematics. The slide uses the complement: 100% − 21% = 79% below Level 2, the baseline proficiency threshold. The statistic describes school students represented by PISA, not all Filipinos. Source: https://www.oecd.org/en/publications/pisa-2025-results-volume-i-country-notes_2d4ff9ea-en/philippines_3699b9d5-en.html</a:t>
             </a:r>
             <a:endParaRPr lang="en-US" smtClean="0"/>
           </a:p>
@@ -6832,8 +6832,8 @@
         </p:nvSpPr>
         <p:spPr>
           <a:xfrm rot="0">
-            <a:off x="11239500" y="6353175"/>
-            <a:ext cx="428625" cy="168592"/>
+            <a:off x="762000" y="5743575"/>
+            <a:ext cx="10668000" cy="196596"/>
           </a:xfrm>
           <a:prstGeom prst="rect">
             <a:avLst/>
@@ -6847,14 +6847,103 @@
           <a:p>
             <a:pPr algn="l" marL="0" indent="0" lvl="0">
               <a:lnSpc>
-                <a:spcPts val="1372"/>
+                <a:spcPts val="1647"/>
               </a:lnSpc>
               <a:spcBef>
                 <a:spcPct val="0"/>
               </a:spcBef>
             </a:pPr>
             <a:r>
-              <a:rPr lang="en-US" sz="1125" strike="noStrike" u="none">
+              <a:rPr lang="en-US" sz="1350" strike="noStrike" u="none">
+                <a:solidFill>
+                  <a:srgbClr val="0A2A66"/>
+                </a:solidFill>
+                <a:latin typeface="DM Sans"/>
+                <a:ea typeface="DM Sans"/>
+                <a:cs typeface="DM Sans"/>
+                <a:sym typeface="DM Sans"/>
+                <a:hlinkClick r:id="rId7" tooltip="https://www.oecd.org/en/publications/pisa-2025-results-volume-i-country-notes_2d4ff9ea-en/philippines_3699b9d5-en.html"/>
+              </a:rPr>
+              <a:t>Source: OECD · PISA 2025, Philippines (2026) · Below Level 2 in mathematics</a:t>
+            </a:r>
+          </a:p>
+        </p:txBody>
+      </p:sp>
+      <p:sp>
+        <p:nvSpPr>
+          <p:cNvPr name="TextBox 9" id="9"/>
+          <p:cNvSpPr txBox="true"/>
+          <p:nvPr/>
+        </p:nvSpPr>
+        <p:spPr>
+          <a:xfrm rot="0">
+            <a:off x="762000" y="1600200"/>
+            <a:ext cx="10668000" cy="1592961"/>
+          </a:xfrm>
+          <a:prstGeom prst="rect">
+            <a:avLst/>
+          </a:prstGeom>
+        </p:spPr>
+        <p:txBody>
+          <a:bodyPr anchor="t" rtlCol="false" tIns="0" lIns="0" bIns="0" rIns="0">
+            <a:spAutoFit/>
+          </a:bodyPr>
+          <a:lstStyle/>
+          <a:p>
+            <a:pPr algn="l" marL="0" indent="0" lvl="0">
+              <a:lnSpc>
+                <a:spcPts val="12627"/>
+              </a:lnSpc>
+              <a:spcBef>
+                <a:spcPct val="0"/>
+              </a:spcBef>
+            </a:pPr>
+            <a:r>
+              <a:rPr lang="en-US" b="true" sz="10350" strike="noStrike" u="none">
+                <a:solidFill>
+                  <a:srgbClr val="0A2A66"/>
+                </a:solidFill>
+                <a:latin typeface="DM Sans Bold"/>
+                <a:ea typeface="DM Sans Bold"/>
+                <a:cs typeface="DM Sans Bold"/>
+                <a:sym typeface="DM Sans Bold"/>
+              </a:rPr>
+              <a:t>79%</a:t>
+            </a:r>
+          </a:p>
+        </p:txBody>
+      </p:sp>
+      <p:sp>
+        <p:nvSpPr>
+          <p:cNvPr name="TextBox 10" id="10"/>
+          <p:cNvSpPr txBox="true"/>
+          <p:nvPr/>
+        </p:nvSpPr>
+        <p:spPr>
+          <a:xfrm rot="0">
+            <a:off x="762000" y="3400425"/>
+            <a:ext cx="10668000" cy="973074"/>
+          </a:xfrm>
+          <a:prstGeom prst="rect">
+            <a:avLst/>
+          </a:prstGeom>
+        </p:spPr>
+        <p:txBody>
+          <a:bodyPr anchor="t" rtlCol="false" tIns="0" lIns="0" bIns="0" rIns="0">
+            <a:spAutoFit/>
+          </a:bodyPr>
+          <a:lstStyle/>
+          <a:p>
+            <a:pPr algn="l" marL="0" indent="0" lvl="0">
+              <a:lnSpc>
+                <a:spcPts val="3843"/>
+              </a:lnSpc>
+              <a:spcBef>
+                <a:spcPct val="0"/>
+              </a:spcBef>
+            </a:pPr>
+            <a:r>
+              <a:rPr lang="en-US" sz="3150" strike="noStrike" u="none">
                 <a:solidFill>
                   <a:srgbClr val="0A2A66"/>
                 </a:solidFill>
@@ -6863,95 +6952,29 @@
                 <a:cs typeface="DM Sans"/>
                 <a:sym typeface="DM Sans"/>
               </a:rPr>
-              <a:t>01</a:t>
-            </a:r>
-          </a:p>
-        </p:txBody>
-      </p:sp>
-      <p:sp>
-        <p:nvSpPr>
-          <p:cNvPr name="TextBox 9" id="9"/>
-          <p:cNvSpPr txBox="true"/>
-          <p:nvPr/>
-        </p:nvSpPr>
-        <p:spPr>
-          <a:xfrm rot="0">
-            <a:off x="762000" y="2352675"/>
-            <a:ext cx="10668000" cy="618363"/>
-          </a:xfrm>
-          <a:prstGeom prst="rect">
-            <a:avLst/>
-          </a:prstGeom>
-        </p:spPr>
-        <p:txBody>
-          <a:bodyPr anchor="t" rtlCol="false" tIns="0" lIns="0" bIns="0" rIns="0">
-            <a:spAutoFit/>
-          </a:bodyPr>
-          <a:lstStyle/>
+              <a:t>of Filipino 15-year-old students scored</a:t>
+            </a:r>
+          </a:p>
           <a:p>
             <a:pPr algn="l" marL="0" indent="0" lvl="0">
               <a:lnSpc>
-                <a:spcPts val="4941"/>
+                <a:spcPts val="3843"/>
               </a:lnSpc>
               <a:spcBef>
                 <a:spcPct val="0"/>
               </a:spcBef>
             </a:pPr>
             <a:r>
-              <a:rPr lang="en-US" b="true" sz="4050" strike="noStrike" u="none">
+              <a:rPr lang="en-US" sz="3150" strike="noStrike" u="none">
                 <a:solidFill>
                   <a:srgbClr val="0A2A66"/>
                 </a:solidFill>
-                <a:latin typeface="DM Sans Bold"/>
-                <a:ea typeface="DM Sans Bold"/>
-                <a:cs typeface="DM Sans Bold"/>
-                <a:sym typeface="DM Sans Bold"/>
+                <a:latin typeface="DM Sans"/>
+                <a:ea typeface="DM Sans"/>
+                <a:cs typeface="DM Sans"/>
+                <a:sym typeface="DM Sans"/>
               </a:rPr>
-              <a:t>The lesson makes sense.</a:t>
-            </a:r>
-          </a:p>
-        </p:txBody>
-      </p:sp>
-      <p:sp>
-        <p:nvSpPr>
-          <p:cNvPr name="TextBox 10" id="10"/>
-          <p:cNvSpPr txBox="true"/>
-          <p:nvPr/>
-        </p:nvSpPr>
-        <p:spPr>
-          <a:xfrm rot="0">
-            <a:off x="762000" y="3086100"/>
-            <a:ext cx="10668000" cy="618363"/>
-          </a:xfrm>
-          <a:prstGeom prst="rect">
-            <a:avLst/>
-          </a:prstGeom>
-        </p:spPr>
-        <p:txBody>
-          <a:bodyPr anchor="t" rtlCol="false" tIns="0" lIns="0" bIns="0" rIns="0">
-            <a:spAutoFit/>
-          </a:bodyPr>
-          <a:lstStyle/>
-          <a:p>
-            <a:pPr algn="l" marL="0" indent="0" lvl="0">
-              <a:lnSpc>
-                <a:spcPts val="4941"/>
-              </a:lnSpc>
-              <a:spcBef>
-                <a:spcPct val="0"/>
-              </a:spcBef>
-            </a:pPr>
-            <a:r>
-              <a:rPr lang="en-US" b="true" sz="4050" strike="noStrike" u="none">
-                <a:solidFill>
-                  <a:srgbClr val="0A2A66"/>
-                </a:solidFill>
-                <a:latin typeface="DM Sans Bold"/>
-                <a:ea typeface="DM Sans Bold"/>
-                <a:cs typeface="DM Sans Bold"/>
-                <a:sym typeface="DM Sans Bold"/>
-              </a:rPr>
-              <a:t>The next question doesn’t.</a:t>
+              <a:t>below basic proficiency in mathematics.</a:t>
             </a:r>
           </a:p>
         </p:txBody>
@@ -6995,15 +7018,67 @@
             </a:pathLst>
           </a:custGeom>
           <a:blipFill>
-            <a:blip r:embed="rId7">
+            <a:blip r:embed="rId8">
               <a:extLst>
                 <a:ext uri="{96DAC541-7B7A-43D3-8B79-37D633B846F1}">
-                  <asvg:svgBlip xmlns:asvg="http://schemas.microsoft.com/office/drawing/2016/SVG/main" r:embed="rId8"/>
+                  <asvg:svgBlip xmlns:asvg="http://schemas.microsoft.com/office/drawing/2016/SVG/main" r:embed="rId9"/>
                 </a:ext>
               </a:extLst>
             </a:blip>
             <a:stretch>
               <a:fillRect l="0" t="0" r="0" b="0"/>
+            </a:stretch>
+          </a:blipFill>
+        </p:spPr>
+      </p:sp>
+      <p:sp>
+        <p:nvSpPr>
+          <p:cNvPr name="Freeform 12" id="12"/>
+          <p:cNvSpPr/>
+          <p:nvPr/>
+        </p:nvSpPr>
+        <p:spPr>
+          <a:xfrm flipH="false" flipV="false" rot="0">
+            <a:off x="9429750" y="323850"/>
+            <a:ext cx="2152650" cy="133350"/>
+          </a:xfrm>
+          <a:custGeom>
+            <a:avLst/>
+            <a:gdLst/>
+            <a:ahLst/>
+            <a:cxnLst/>
+            <a:rect r="r" b="b" t="t" l="l"/>
+            <a:pathLst>
+              <a:path h="133350" w="2152650">
+                <a:moveTo>
+                  <a:pt x="0" y="0"/>
+                </a:moveTo>
+                <a:lnTo>
+                  <a:pt x="2152650" y="0"/>
+                </a:lnTo>
+                <a:lnTo>
+                  <a:pt x="2152650" y="133350"/>
+                </a:lnTo>
+                <a:lnTo>
+                  <a:pt x="0" y="133350"/>
+                </a:lnTo>
+                <a:lnTo>
+                  <a:pt x="0" y="0"/>
+                </a:lnTo>
+                <a:close/>
+              </a:path>
+            </a:pathLst>
+          </a:custGeom>
+          <a:blipFill>
+            <a:blip r:embed="rId10">
+              <a:extLst>
+                <a:ext uri="{96DAC541-7B7A-43D3-8B79-37D633B846F1}">
+                  <asvg:svgBlip xmlns:asvg="http://schemas.microsoft.com/office/drawing/2016/SVG/main" r:embed="rId11"/>
+                </a:ext>
+              </a:extLst>
+            </a:blip>
+            <a:stretch>
+              <a:fillRect l="0" t="-1363" r="0" b="-1363"/>
             </a:stretch>
           </a:blipFill>
         </p:spPr>
@@ -8116,6 +8191,58 @@
           </a:blipFill>
         </p:spPr>
       </p:sp>
+      <p:sp>
+        <p:nvSpPr>
+          <p:cNvPr name="Freeform 31" id="31"/>
+          <p:cNvSpPr/>
+          <p:nvPr/>
+        </p:nvSpPr>
+        <p:spPr>
+          <a:xfrm flipH="false" flipV="false" rot="0">
+            <a:off x="9429750" y="323850"/>
+            <a:ext cx="2152650" cy="133350"/>
+          </a:xfrm>
+          <a:custGeom>
+            <a:avLst/>
+            <a:gdLst/>
+            <a:ahLst/>
+            <a:cxnLst/>
+            <a:rect r="r" b="b" t="t" l="l"/>
+            <a:pathLst>
+              <a:path h="133350" w="2152650">
+                <a:moveTo>
+                  <a:pt x="0" y="0"/>
+                </a:moveTo>
+                <a:lnTo>
+                  <a:pt x="2152650" y="0"/>
+                </a:lnTo>
+                <a:lnTo>
+                  <a:pt x="2152650" y="133350"/>
+                </a:lnTo>
+                <a:lnTo>
+                  <a:pt x="0" y="133350"/>
+                </a:lnTo>
+                <a:lnTo>
+                  <a:pt x="0" y="0"/>
+                </a:lnTo>
+                <a:close/>
+              </a:path>
+            </a:pathLst>
+          </a:custGeom>
+          <a:blipFill>
+            <a:blip r:embed="rId10">
+              <a:extLst>
+                <a:ext uri="{96DAC541-7B7A-43D3-8B79-37D633B846F1}">
+                  <asvg:svgBlip xmlns:asvg="http://schemas.microsoft.com/office/drawing/2016/SVG/main" r:embed="rId11"/>
+                </a:ext>
+              </a:extLst>
+            </a:blip>
+            <a:stretch>
+              <a:fillRect l="0" t="-1363" r="0" b="-1363"/>
+            </a:stretch>
+          </a:blipFill>
+        </p:spPr>
+      </p:sp>
     </p:spTree>
   </p:cSld>
   <p:clrMapOvr>
@@ -9465,6 +9592,58 @@
           </a:blipFill>
         </p:spPr>
       </p:sp>
+      <p:sp>
+        <p:nvSpPr>
+          <p:cNvPr name="Freeform 38" id="38"/>
+          <p:cNvSpPr/>
+          <p:nvPr/>
+        </p:nvSpPr>
+        <p:spPr>
+          <a:xfrm flipH="false" flipV="false" rot="0">
+            <a:off x="9429750" y="323850"/>
+            <a:ext cx="2152650" cy="133350"/>
+          </a:xfrm>
+          <a:custGeom>
+            <a:avLst/>
+            <a:gdLst/>
+            <a:ahLst/>
+            <a:cxnLst/>
+            <a:rect r="r" b="b" t="t" l="l"/>
+            <a:pathLst>
+              <a:path h="133350" w="2152650">
+                <a:moveTo>
+                  <a:pt x="0" y="0"/>
+                </a:moveTo>
+                <a:lnTo>
+                  <a:pt x="2152650" y="0"/>
+                </a:lnTo>
+                <a:lnTo>
+                  <a:pt x="2152650" y="133350"/>
+                </a:lnTo>
+                <a:lnTo>
+                  <a:pt x="0" y="133350"/>
+                </a:lnTo>
+                <a:lnTo>
+                  <a:pt x="0" y="0"/>
+                </a:lnTo>
+                <a:close/>
+              </a:path>
+            </a:pathLst>
+          </a:custGeom>
+          <a:blipFill>
+            <a:blip r:embed="rId9">
+              <a:extLst>
+                <a:ext uri="{96DAC541-7B7A-43D3-8B79-37D633B846F1}">
+                  <asvg:svgBlip xmlns:asvg="http://schemas.microsoft.com/office/drawing/2016/SVG/main" r:embed="rId10"/>
+                </a:ext>
+              </a:extLst>
+            </a:blip>
+            <a:stretch>
+              <a:fillRect l="0" t="-1363" r="0" b="-1363"/>
+            </a:stretch>
+          </a:blipFill>
+        </p:spPr>
+      </p:sp>
     </p:spTree>
   </p:cSld>
   <p:clrMapOvr>
@@ -10362,6 +10541,58 @@
             </a:blip>
             <a:stretch>
               <a:fillRect l="0" t="0" r="0" b="0"/>
+            </a:stretch>
+          </a:blipFill>
+        </p:spPr>
+      </p:sp>
+      <p:sp>
+        <p:nvSpPr>
+          <p:cNvPr name="Freeform 22" id="22"/>
+          <p:cNvSpPr/>
+          <p:nvPr/>
+        </p:nvSpPr>
+        <p:spPr>
+          <a:xfrm flipH="false" flipV="false" rot="0">
+            <a:off x="9429750" y="323850"/>
+            <a:ext cx="2152650" cy="133350"/>
+          </a:xfrm>
+          <a:custGeom>
+            <a:avLst/>
+            <a:gdLst/>
+            <a:ahLst/>
+            <a:cxnLst/>
+            <a:rect r="r" b="b" t="t" l="l"/>
+            <a:pathLst>
+              <a:path h="133350" w="2152650">
+                <a:moveTo>
+                  <a:pt x="0" y="0"/>
+                </a:moveTo>
+                <a:lnTo>
+                  <a:pt x="2152650" y="0"/>
+                </a:lnTo>
+                <a:lnTo>
+                  <a:pt x="2152650" y="133350"/>
+                </a:lnTo>
+                <a:lnTo>
+                  <a:pt x="0" y="133350"/>
+                </a:lnTo>
+                <a:lnTo>
+                  <a:pt x="0" y="0"/>
+                </a:lnTo>
+                <a:close/>
+              </a:path>
+            </a:pathLst>
+          </a:custGeom>
+          <a:blipFill>
+            <a:blip r:embed="rId9">
+              <a:extLst>
+                <a:ext uri="{96DAC541-7B7A-43D3-8B79-37D633B846F1}">
+                  <asvg:svgBlip xmlns:asvg="http://schemas.microsoft.com/office/drawing/2016/SVG/main" r:embed="rId10"/>
+                </a:ext>
+              </a:extLst>
+            </a:blip>
+            <a:stretch>
+              <a:fillRect l="0" t="-1363" r="0" b="-1363"/>
             </a:stretch>
           </a:blipFill>
         </p:spPr>
@@ -14031,6 +14262,58 @@
           </a:blipFill>
         </p:spPr>
       </p:sp>
+      <p:sp>
+        <p:nvSpPr>
+          <p:cNvPr name="Freeform 97" id="97"/>
+          <p:cNvSpPr/>
+          <p:nvPr/>
+        </p:nvSpPr>
+        <p:spPr>
+          <a:xfrm flipH="false" flipV="false" rot="0">
+            <a:off x="9429750" y="323850"/>
+            <a:ext cx="2152650" cy="133350"/>
+          </a:xfrm>
+          <a:custGeom>
+            <a:avLst/>
+            <a:gdLst/>
+            <a:ahLst/>
+            <a:cxnLst/>
+            <a:rect r="r" b="b" t="t" l="l"/>
+            <a:pathLst>
+              <a:path h="133350" w="2152650">
+                <a:moveTo>
+                  <a:pt x="0" y="0"/>
+                </a:moveTo>
+                <a:lnTo>
+                  <a:pt x="2152650" y="0"/>
+                </a:lnTo>
+                <a:lnTo>
+                  <a:pt x="2152650" y="133350"/>
+                </a:lnTo>
+                <a:lnTo>
+                  <a:pt x="0" y="133350"/>
+                </a:lnTo>
+                <a:lnTo>
+                  <a:pt x="0" y="0"/>
+                </a:lnTo>
+                <a:close/>
+              </a:path>
+            </a:pathLst>
+          </a:custGeom>
+          <a:blipFill>
+            <a:blip r:embed="rId10">
+              <a:extLst>
+                <a:ext uri="{96DAC541-7B7A-43D3-8B79-37D633B846F1}">
+                  <asvg:svgBlip xmlns:asvg="http://schemas.microsoft.com/office/drawing/2016/SVG/main" r:embed="rId11"/>
+                </a:ext>
+              </a:extLst>
+            </a:blip>
+            <a:stretch>
+              <a:fillRect l="0" t="-1363" r="0" b="-1363"/>
+            </a:stretch>
+          </a:blipFill>
+        </p:spPr>
+      </p:sp>
     </p:spTree>
   </p:cSld>
   <p:clrMapOvr>
@@ -14566,6 +14849,58 @@
           </a:blipFill>
         </p:spPr>
       </p:sp>
+      <p:sp>
+        <p:nvSpPr>
+          <p:cNvPr name="Freeform 14" id="14"/>
+          <p:cNvSpPr/>
+          <p:nvPr/>
+        </p:nvSpPr>
+        <p:spPr>
+          <a:xfrm flipH="false" flipV="false" rot="0">
+            <a:off x="9429750" y="323850"/>
+            <a:ext cx="2152650" cy="133350"/>
+          </a:xfrm>
+          <a:custGeom>
+            <a:avLst/>
+            <a:gdLst/>
+            <a:ahLst/>
+            <a:cxnLst/>
+            <a:rect r="r" b="b" t="t" l="l"/>
+            <a:pathLst>
+              <a:path h="133350" w="2152650">
+                <a:moveTo>
+                  <a:pt x="0" y="0"/>
+                </a:moveTo>
+                <a:lnTo>
+                  <a:pt x="2152650" y="0"/>
+                </a:lnTo>
+                <a:lnTo>
+                  <a:pt x="2152650" y="133350"/>
+                </a:lnTo>
+                <a:lnTo>
+                  <a:pt x="0" y="133350"/>
+                </a:lnTo>
+                <a:lnTo>
+                  <a:pt x="0" y="0"/>
+                </a:lnTo>
+                <a:close/>
+              </a:path>
+            </a:pathLst>
+          </a:custGeom>
+          <a:blipFill>
+            <a:blip r:embed="rId10">
+              <a:extLst>
+                <a:ext uri="{96DAC541-7B7A-43D3-8B79-37D633B846F1}">
+                  <asvg:svgBlip xmlns:asvg="http://schemas.microsoft.com/office/drawing/2016/SVG/main" r:embed="rId11"/>
+                </a:ext>
+              </a:extLst>
+            </a:blip>
+            <a:stretch>
+              <a:fillRect l="0" t="-1363" r="0" b="-1363"/>
+            </a:stretch>
+          </a:blipFill>
+        </p:spPr>
+      </p:sp>
     </p:spTree>
   </p:cSld>
   <p:clrMapOvr>
@@ -15654,6 +15989,58 @@
           </a:blipFill>
         </p:spPr>
       </p:sp>
+      <p:sp>
+        <p:nvSpPr>
+          <p:cNvPr name="Freeform 19" id="19"/>
+          <p:cNvSpPr/>
+          <p:nvPr/>
+        </p:nvSpPr>
+        <p:spPr>
+          <a:xfrm flipH="false" flipV="false" rot="0">
+            <a:off x="9429750" y="323850"/>
+            <a:ext cx="2152650" cy="133350"/>
+          </a:xfrm>
+          <a:custGeom>
+            <a:avLst/>
+            <a:gdLst/>
+            <a:ahLst/>
+            <a:cxnLst/>
+            <a:rect r="r" b="b" t="t" l="l"/>
+            <a:pathLst>
+              <a:path h="133350" w="2152650">
+                <a:moveTo>
+                  <a:pt x="0" y="0"/>
+                </a:moveTo>
+                <a:lnTo>
+                  <a:pt x="2152650" y="0"/>
+                </a:lnTo>
+                <a:lnTo>
+                  <a:pt x="2152650" y="133350"/>
+                </a:lnTo>
+                <a:lnTo>
+                  <a:pt x="0" y="133350"/>
+                </a:lnTo>
+                <a:lnTo>
+                  <a:pt x="0" y="0"/>
+                </a:lnTo>
+                <a:close/>
+              </a:path>
+            </a:pathLst>
+          </a:custGeom>
+          <a:blipFill>
+            <a:blip r:embed="rId33">
+              <a:extLst>
+                <a:ext uri="{96DAC541-7B7A-43D3-8B79-37D633B846F1}">
+                  <asvg:svgBlip xmlns:asvg="http://schemas.microsoft.com/office/drawing/2016/SVG/main" r:embed="rId34"/>
+                </a:ext>
+              </a:extLst>
+            </a:blip>
+            <a:stretch>
+              <a:fillRect l="0" t="-1363" r="0" b="-1363"/>
+            </a:stretch>
+          </a:blipFill>
+        </p:spPr>
+      </p:sp>
     </p:spTree>
   </p:cSld>
   <p:clrMapOvr>
@@ -16673,6 +17060,58 @@
             </a:blip>
             <a:stretch>
               <a:fillRect l="0" t="0" r="0" b="0"/>
+            </a:stretch>
+          </a:blipFill>
+        </p:spPr>
+      </p:sp>
+      <p:sp>
+        <p:nvSpPr>
+          <p:cNvPr name="Freeform 27" id="27"/>
+          <p:cNvSpPr/>
+          <p:nvPr/>
+        </p:nvSpPr>
+        <p:spPr>
+          <a:xfrm flipH="false" flipV="false" rot="0">
+            <a:off x="9429750" y="323850"/>
+            <a:ext cx="2152650" cy="133350"/>
+          </a:xfrm>
+          <a:custGeom>
+            <a:avLst/>
+            <a:gdLst/>
+            <a:ahLst/>
+            <a:cxnLst/>
+            <a:rect r="r" b="b" t="t" l="l"/>
+            <a:pathLst>
+              <a:path h="133350" w="2152650">
+                <a:moveTo>
+                  <a:pt x="0" y="0"/>
+                </a:moveTo>
+                <a:lnTo>
+                  <a:pt x="2152650" y="0"/>
+                </a:lnTo>
+                <a:lnTo>
+                  <a:pt x="2152650" y="133350"/>
+                </a:lnTo>
+                <a:lnTo>
+                  <a:pt x="0" y="133350"/>
+                </a:lnTo>
+                <a:lnTo>
+                  <a:pt x="0" y="0"/>
+                </a:lnTo>
+                <a:close/>
+              </a:path>
+            </a:pathLst>
+          </a:custGeom>
+          <a:blipFill>
+            <a:blip r:embed="rId9">
+              <a:extLst>
+                <a:ext uri="{96DAC541-7B7A-43D3-8B79-37D633B846F1}">
+                  <asvg:svgBlip xmlns:asvg="http://schemas.microsoft.com/office/drawing/2016/SVG/main" r:embed="rId10"/>
+                </a:ext>
+              </a:extLst>
+            </a:blip>
+            <a:stretch>
+              <a:fillRect l="0" t="-1363" r="0" b="-1363"/>
             </a:stretch>
           </a:blipFill>
         </p:spPr>
@@ -18320,6 +18759,58 @@
           </a:blipFill>
         </p:spPr>
       </p:sp>
+      <p:sp>
+        <p:nvSpPr>
+          <p:cNvPr name="Freeform 44" id="44"/>
+          <p:cNvSpPr/>
+          <p:nvPr/>
+        </p:nvSpPr>
+        <p:spPr>
+          <a:xfrm flipH="false" flipV="false" rot="0">
+            <a:off x="9429750" y="323850"/>
+            <a:ext cx="2152650" cy="133350"/>
+          </a:xfrm>
+          <a:custGeom>
+            <a:avLst/>
+            <a:gdLst/>
+            <a:ahLst/>
+            <a:cxnLst/>
+            <a:rect r="r" b="b" t="t" l="l"/>
+            <a:pathLst>
+              <a:path h="133350" w="2152650">
+                <a:moveTo>
+                  <a:pt x="0" y="0"/>
+                </a:moveTo>
+                <a:lnTo>
+                  <a:pt x="2152650" y="0"/>
+                </a:lnTo>
+                <a:lnTo>
+                  <a:pt x="2152650" y="133350"/>
+                </a:lnTo>
+                <a:lnTo>
+                  <a:pt x="0" y="133350"/>
+                </a:lnTo>
+                <a:lnTo>
+                  <a:pt x="0" y="0"/>
+                </a:lnTo>
+                <a:close/>
+              </a:path>
+            </a:pathLst>
+          </a:custGeom>
+          <a:blipFill>
+            <a:blip r:embed="rId11">
+              <a:extLst>
+                <a:ext uri="{96DAC541-7B7A-43D3-8B79-37D633B846F1}">
+                  <asvg:svgBlip xmlns:asvg="http://schemas.microsoft.com/office/drawing/2016/SVG/main" r:embed="rId12"/>
+                </a:ext>
+              </a:extLst>
+            </a:blip>
+            <a:stretch>
+              <a:fillRect l="0" t="-1363" r="0" b="-1363"/>
+            </a:stretch>
+          </a:blipFill>
+        </p:spPr>
+      </p:sp>
     </p:spTree>
   </p:cSld>
   <p:clrMapOvr>
@@ -18380,7 +18871,13 @@
         </p:grpSpPr>
         <p:sp>
           <p:nvSpPr>
-            <p:cNvPr name="Freeform 4" id="4"/>
+            <p:cNvPr name="Freeform 4" id="4">
+              <a:extLst>
+                <a:ext uri="{C183D7F6-B498-43B3-948B-1728B52AA6E4}">
+                  <adec:decorative xmlns:adec="http://schemas.microsoft.com/office/drawing/2017/decorative" val="1"/>
+                </a:ext>
+              </a:extLst>
+            </p:cNvPr>
             <p:cNvSpPr/>
             <p:nvPr/>
           </p:nvSpPr>
@@ -18622,6 +19119,272 @@
         </p:nvSpPr>
         <p:spPr>
           <a:xfrm rot="0">
+            <a:off x="609600" y="1790700"/>
+            <a:ext cx="7000875" cy="604456"/>
+          </a:xfrm>
+          <a:prstGeom prst="rect">
+            <a:avLst/>
+          </a:prstGeom>
+        </p:spPr>
+        <p:txBody>
+          <a:bodyPr anchor="t" rtlCol="false" tIns="0" lIns="0" bIns="0" rIns="0">
+            <a:spAutoFit/>
+          </a:bodyPr>
+          <a:lstStyle/>
+          <a:p>
+            <a:pPr algn="l" marL="0" indent="0" lvl="0">
+              <a:lnSpc>
+                <a:spcPts val="2470"/>
+              </a:lnSpc>
+              <a:spcBef>
+                <a:spcPct val="0"/>
+              </a:spcBef>
+            </a:pPr>
+            <a:r>
+              <a:rPr lang="en-US" sz="2025" strike="noStrike" u="none">
+                <a:solidFill>
+                  <a:srgbClr val="0A2A66"/>
+                </a:solidFill>
+                <a:latin typeface="DM Sans"/>
+                <a:ea typeface="DM Sans"/>
+                <a:cs typeface="DM Sans"/>
+                <a:sym typeface="DM Sans"/>
+              </a:rPr>
+              <a:t>For learners used to mobile feeds,</a:t>
+            </a:r>
+          </a:p>
+          <a:p>
+            <a:pPr algn="l" marL="0" indent="0" lvl="0">
+              <a:lnSpc>
+                <a:spcPts val="2470"/>
+              </a:lnSpc>
+              <a:spcBef>
+                <a:spcPct val="0"/>
+              </a:spcBef>
+            </a:pPr>
+            <a:r>
+              <a:rPr lang="en-US" sz="2025" strike="noStrike" u="none">
+                <a:solidFill>
+                  <a:srgbClr val="0A2A66"/>
+                </a:solidFill>
+                <a:latin typeface="DM Sans"/>
+                <a:ea typeface="DM Sans"/>
+                <a:cs typeface="DM Sans"/>
+                <a:sym typeface="DM Sans"/>
+              </a:rPr>
+              <a:t>Dunlo makes one idea easy to start.</a:t>
+            </a:r>
+          </a:p>
+        </p:txBody>
+      </p:sp>
+      <p:sp>
+        <p:nvSpPr>
+          <p:cNvPr name="TextBox 11" id="11"/>
+          <p:cNvSpPr txBox="true"/>
+          <p:nvPr/>
+        </p:nvSpPr>
+        <p:spPr>
+          <a:xfrm rot="0">
+            <a:off x="609600" y="2838450"/>
+            <a:ext cx="7048500" cy="393573"/>
+          </a:xfrm>
+          <a:prstGeom prst="rect">
+            <a:avLst/>
+          </a:prstGeom>
+        </p:spPr>
+        <p:txBody>
+          <a:bodyPr anchor="t" rtlCol="false" tIns="0" lIns="0" bIns="0" rIns="0">
+            <a:spAutoFit/>
+          </a:bodyPr>
+          <a:lstStyle/>
+          <a:p>
+            <a:pPr algn="l" marL="0" indent="0" lvl="0">
+              <a:lnSpc>
+                <a:spcPts val="3111"/>
+              </a:lnSpc>
+              <a:spcBef>
+                <a:spcPct val="0"/>
+              </a:spcBef>
+            </a:pPr>
+            <a:r>
+              <a:rPr lang="en-US" b="true" sz="2550" strike="noStrike" u="none">
+                <a:solidFill>
+                  <a:srgbClr val="0A2A66"/>
+                </a:solidFill>
+                <a:latin typeface="DM Sans Bold"/>
+                <a:ea typeface="DM Sans Bold"/>
+                <a:cs typeface="DM Sans Bold"/>
+                <a:sym typeface="DM Sans Bold"/>
+              </a:rPr>
+              <a:t>Scroll. Try. Keep going.</a:t>
+            </a:r>
+          </a:p>
+        </p:txBody>
+      </p:sp>
+      <p:sp>
+        <p:nvSpPr>
+          <p:cNvPr name="TextBox 12" id="12"/>
+          <p:cNvSpPr txBox="true"/>
+          <p:nvPr/>
+        </p:nvSpPr>
+        <p:spPr>
+          <a:xfrm rot="0">
+            <a:off x="609600" y="3448050"/>
+            <a:ext cx="7048500" cy="604456"/>
+          </a:xfrm>
+          <a:prstGeom prst="rect">
+            <a:avLst/>
+          </a:prstGeom>
+        </p:spPr>
+        <p:txBody>
+          <a:bodyPr anchor="t" rtlCol="false" tIns="0" lIns="0" bIns="0" rIns="0">
+            <a:spAutoFit/>
+          </a:bodyPr>
+          <a:lstStyle/>
+          <a:p>
+            <a:pPr algn="l" marL="0" indent="0" lvl="0">
+              <a:lnSpc>
+                <a:spcPts val="2470"/>
+              </a:lnSpc>
+              <a:spcBef>
+                <a:spcPct val="0"/>
+              </a:spcBef>
+            </a:pPr>
+            <a:r>
+              <a:rPr lang="en-US" sz="2025" strike="noStrike" u="none">
+                <a:solidFill>
+                  <a:srgbClr val="0A2A66"/>
+                </a:solidFill>
+                <a:latin typeface="DM Sans"/>
+                <a:ea typeface="DM Sans"/>
+                <a:cs typeface="DM Sans"/>
+                <a:sym typeface="DM Sans"/>
+              </a:rPr>
+              <a:t>Move a slider or watch a focused Khan clip.</a:t>
+            </a:r>
+          </a:p>
+          <a:p>
+            <a:pPr algn="l" marL="0" indent="0" lvl="0">
+              <a:lnSpc>
+                <a:spcPts val="2470"/>
+              </a:lnSpc>
+              <a:spcBef>
+                <a:spcPct val="0"/>
+              </a:spcBef>
+            </a:pPr>
+            <a:r>
+              <a:rPr lang="en-US" sz="2025" strike="noStrike" u="none">
+                <a:solidFill>
+                  <a:srgbClr val="0A2A66"/>
+                </a:solidFill>
+                <a:latin typeface="DM Sans"/>
+                <a:ea typeface="DM Sans"/>
+                <a:cs typeface="DM Sans"/>
+                <a:sym typeface="DM Sans"/>
+              </a:rPr>
+              <a:t>Make a prediction and get an explanation.</a:t>
+            </a:r>
+          </a:p>
+        </p:txBody>
+      </p:sp>
+      <p:sp>
+        <p:nvSpPr>
+          <p:cNvPr name="TextBox 13" id="13"/>
+          <p:cNvSpPr txBox="true"/>
+          <p:nvPr/>
+        </p:nvSpPr>
+        <p:spPr>
+          <a:xfrm rot="0">
+            <a:off x="609600" y="4686300"/>
+            <a:ext cx="7334250" cy="604456"/>
+          </a:xfrm>
+          <a:prstGeom prst="rect">
+            <a:avLst/>
+          </a:prstGeom>
+        </p:spPr>
+        <p:txBody>
+          <a:bodyPr anchor="t" rtlCol="false" tIns="0" lIns="0" bIns="0" rIns="0">
+            <a:spAutoFit/>
+          </a:bodyPr>
+          <a:lstStyle/>
+          <a:p>
+            <a:pPr algn="l" marL="0" indent="0" lvl="0">
+              <a:lnSpc>
+                <a:spcPts val="2470"/>
+              </a:lnSpc>
+              <a:spcBef>
+                <a:spcPct val="0"/>
+              </a:spcBef>
+            </a:pPr>
+            <a:r>
+              <a:rPr lang="en-US" sz="2025" strike="noStrike" u="none">
+                <a:solidFill>
+                  <a:srgbClr val="0A2A66"/>
+                </a:solidFill>
+                <a:latin typeface="DM Sans"/>
+                <a:ea typeface="DM Sans"/>
+                <a:cs typeface="DM Sans"/>
+                <a:sym typeface="DM Sans"/>
+              </a:rPr>
+              <a:t>Follow the idea into a matching Khan exercise.</a:t>
+            </a:r>
+          </a:p>
+          <a:p>
+            <a:pPr algn="l" marL="0" indent="0" lvl="0">
+              <a:lnSpc>
+                <a:spcPts val="2470"/>
+              </a:lnSpc>
+              <a:spcBef>
+                <a:spcPct val="0"/>
+              </a:spcBef>
+            </a:pPr>
+            <a:r>
+              <a:rPr lang="en-US" sz="2025" strike="noStrike" u="none">
+                <a:solidFill>
+                  <a:srgbClr val="0A2A66"/>
+                </a:solidFill>
+                <a:latin typeface="DM Sans"/>
+                <a:ea typeface="DM Sans"/>
+                <a:cs typeface="DM Sans"/>
+                <a:sym typeface="DM Sans"/>
+              </a:rPr>
+              <a:t>Save it for a fresh question later.</a:t>
+            </a:r>
+          </a:p>
+        </p:txBody>
+      </p:sp>
+      <p:pic>
+        <p:nvPicPr>
+          <p:cNvPr name="Picture 14" id="14"/>
+          <p:cNvPicPr>
+            <a:picLocks noChangeAspect="true"/>
+          </p:cNvPicPr>
+          <p:nvPr/>
+        </p:nvPicPr>
+        <p:blipFill>
+          <a:blip r:embed="rId9"/>
+          <a:stretch>
+            <a:fillRect/>
+          </a:stretch>
+        </p:blipFill>
+        <p:spPr>
+          <a:xfrm rot="0">
+            <a:off x="7986495" y="1033245"/>
+            <a:ext cx="3362760" cy="5889061"/>
+          </a:xfrm>
+          <a:prstGeom prst="rect">
+            <a:avLst/>
+          </a:prstGeom>
+        </p:spPr>
+      </p:pic>
+      <p:sp>
+        <p:nvSpPr>
+          <p:cNvPr name="TextBox 15" id="15"/>
+          <p:cNvSpPr txBox="true"/>
+          <p:nvPr/>
+        </p:nvSpPr>
+        <p:spPr>
+          <a:xfrm rot="0">
             <a:off x="609600" y="866775"/>
             <a:ext cx="10972800" cy="487299"/>
           </a:xfrm>
@@ -18660,249 +19423,7 @@
       </p:sp>
       <p:sp>
         <p:nvSpPr>
-          <p:cNvPr name="TextBox 11" id="11"/>
-          <p:cNvSpPr txBox="true"/>
-          <p:nvPr/>
-        </p:nvSpPr>
-        <p:spPr>
-          <a:xfrm rot="0">
-            <a:off x="609600" y="1790700"/>
-            <a:ext cx="7000875" cy="604456"/>
-          </a:xfrm>
-          <a:prstGeom prst="rect">
-            <a:avLst/>
-          </a:prstGeom>
-        </p:spPr>
-        <p:txBody>
-          <a:bodyPr anchor="t" rtlCol="false" tIns="0" lIns="0" bIns="0" rIns="0">
-            <a:spAutoFit/>
-          </a:bodyPr>
-          <a:lstStyle/>
-          <a:p>
-            <a:pPr algn="l" marL="0" indent="0" lvl="0">
-              <a:lnSpc>
-                <a:spcPts val="2470"/>
-              </a:lnSpc>
-              <a:spcBef>
-                <a:spcPct val="0"/>
-              </a:spcBef>
-            </a:pPr>
-            <a:r>
-              <a:rPr lang="en-US" sz="2025" strike="noStrike" u="none">
-                <a:solidFill>
-                  <a:srgbClr val="0A2A66"/>
-                </a:solidFill>
-                <a:latin typeface="DM Sans"/>
-                <a:ea typeface="DM Sans"/>
-                <a:cs typeface="DM Sans"/>
-                <a:sym typeface="DM Sans"/>
-              </a:rPr>
-              <a:t>For learners used to mobile feeds,</a:t>
-            </a:r>
-          </a:p>
-          <a:p>
-            <a:pPr algn="l" marL="0" indent="0" lvl="0">
-              <a:lnSpc>
-                <a:spcPts val="2470"/>
-              </a:lnSpc>
-              <a:spcBef>
-                <a:spcPct val="0"/>
-              </a:spcBef>
-            </a:pPr>
-            <a:r>
-              <a:rPr lang="en-US" sz="2025" strike="noStrike" u="none">
-                <a:solidFill>
-                  <a:srgbClr val="0A2A66"/>
-                </a:solidFill>
-                <a:latin typeface="DM Sans"/>
-                <a:ea typeface="DM Sans"/>
-                <a:cs typeface="DM Sans"/>
-                <a:sym typeface="DM Sans"/>
-              </a:rPr>
-              <a:t>Dunlo makes one idea easy to start.</a:t>
-            </a:r>
-          </a:p>
-        </p:txBody>
-      </p:sp>
-      <p:sp>
-        <p:nvSpPr>
-          <p:cNvPr name="TextBox 12" id="12"/>
-          <p:cNvSpPr txBox="true"/>
-          <p:nvPr/>
-        </p:nvSpPr>
-        <p:spPr>
-          <a:xfrm rot="0">
-            <a:off x="609600" y="2838450"/>
-            <a:ext cx="7048500" cy="393573"/>
-          </a:xfrm>
-          <a:prstGeom prst="rect">
-            <a:avLst/>
-          </a:prstGeom>
-        </p:spPr>
-        <p:txBody>
-          <a:bodyPr anchor="t" rtlCol="false" tIns="0" lIns="0" bIns="0" rIns="0">
-            <a:spAutoFit/>
-          </a:bodyPr>
-          <a:lstStyle/>
-          <a:p>
-            <a:pPr algn="l" marL="0" indent="0" lvl="0">
-              <a:lnSpc>
-                <a:spcPts val="3111"/>
-              </a:lnSpc>
-              <a:spcBef>
-                <a:spcPct val="0"/>
-              </a:spcBef>
-            </a:pPr>
-            <a:r>
-              <a:rPr lang="en-US" b="true" sz="2550" strike="noStrike" u="none">
-                <a:solidFill>
-                  <a:srgbClr val="0A2A66"/>
-                </a:solidFill>
-                <a:latin typeface="DM Sans Bold"/>
-                <a:ea typeface="DM Sans Bold"/>
-                <a:cs typeface="DM Sans Bold"/>
-                <a:sym typeface="DM Sans Bold"/>
-              </a:rPr>
-              <a:t>Scroll. Try. Keep going.</a:t>
-            </a:r>
-          </a:p>
-        </p:txBody>
-      </p:sp>
-      <p:sp>
-        <p:nvSpPr>
-          <p:cNvPr name="TextBox 13" id="13"/>
-          <p:cNvSpPr txBox="true"/>
-          <p:nvPr/>
-        </p:nvSpPr>
-        <p:spPr>
-          <a:xfrm rot="0">
-            <a:off x="609600" y="3448050"/>
-            <a:ext cx="7048500" cy="604456"/>
-          </a:xfrm>
-          <a:prstGeom prst="rect">
-            <a:avLst/>
-          </a:prstGeom>
-        </p:spPr>
-        <p:txBody>
-          <a:bodyPr anchor="t" rtlCol="false" tIns="0" lIns="0" bIns="0" rIns="0">
-            <a:spAutoFit/>
-          </a:bodyPr>
-          <a:lstStyle/>
-          <a:p>
-            <a:pPr algn="l" marL="0" indent="0" lvl="0">
-              <a:lnSpc>
-                <a:spcPts val="2470"/>
-              </a:lnSpc>
-              <a:spcBef>
-                <a:spcPct val="0"/>
-              </a:spcBef>
-            </a:pPr>
-            <a:r>
-              <a:rPr lang="en-US" sz="2025" strike="noStrike" u="none">
-                <a:solidFill>
-                  <a:srgbClr val="0A2A66"/>
-                </a:solidFill>
-                <a:latin typeface="DM Sans"/>
-                <a:ea typeface="DM Sans"/>
-                <a:cs typeface="DM Sans"/>
-                <a:sym typeface="DM Sans"/>
-              </a:rPr>
-              <a:t>Move a slider or watch a focused Khan clip.</a:t>
-            </a:r>
-          </a:p>
-          <a:p>
-            <a:pPr algn="l" marL="0" indent="0" lvl="0">
-              <a:lnSpc>
-                <a:spcPts val="2470"/>
-              </a:lnSpc>
-              <a:spcBef>
-                <a:spcPct val="0"/>
-              </a:spcBef>
-            </a:pPr>
-            <a:r>
-              <a:rPr lang="en-US" sz="2025" strike="noStrike" u="none">
-                <a:solidFill>
-                  <a:srgbClr val="0A2A66"/>
-                </a:solidFill>
-                <a:latin typeface="DM Sans"/>
-                <a:ea typeface="DM Sans"/>
-                <a:cs typeface="DM Sans"/>
-                <a:sym typeface="DM Sans"/>
-              </a:rPr>
-              <a:t>Make a prediction and get an explanation.</a:t>
-            </a:r>
-          </a:p>
-        </p:txBody>
-      </p:sp>
-      <p:sp>
-        <p:nvSpPr>
-          <p:cNvPr name="TextBox 14" id="14"/>
-          <p:cNvSpPr txBox="true"/>
-          <p:nvPr/>
-        </p:nvSpPr>
-        <p:spPr>
-          <a:xfrm rot="0">
-            <a:off x="609600" y="4686300"/>
-            <a:ext cx="7334250" cy="604456"/>
-          </a:xfrm>
-          <a:prstGeom prst="rect">
-            <a:avLst/>
-          </a:prstGeom>
-        </p:spPr>
-        <p:txBody>
-          <a:bodyPr anchor="t" rtlCol="false" tIns="0" lIns="0" bIns="0" rIns="0">
-            <a:spAutoFit/>
-          </a:bodyPr>
-          <a:lstStyle/>
-          <a:p>
-            <a:pPr algn="l" marL="0" indent="0" lvl="0">
-              <a:lnSpc>
-                <a:spcPts val="2470"/>
-              </a:lnSpc>
-              <a:spcBef>
-                <a:spcPct val="0"/>
-              </a:spcBef>
-            </a:pPr>
-            <a:r>
-              <a:rPr lang="en-US" sz="2025" strike="noStrike" u="none">
-                <a:solidFill>
-                  <a:srgbClr val="0A2A66"/>
-                </a:solidFill>
-                <a:latin typeface="DM Sans"/>
-                <a:ea typeface="DM Sans"/>
-                <a:cs typeface="DM Sans"/>
-                <a:sym typeface="DM Sans"/>
-              </a:rPr>
-              <a:t>Follow the idea into a matching Khan exercise.</a:t>
-            </a:r>
-          </a:p>
-          <a:p>
-            <a:pPr algn="l" marL="0" indent="0" lvl="0">
-              <a:lnSpc>
-                <a:spcPts val="2470"/>
-              </a:lnSpc>
-              <a:spcBef>
-                <a:spcPct val="0"/>
-              </a:spcBef>
-            </a:pPr>
-            <a:r>
-              <a:rPr lang="en-US" sz="2025" strike="noStrike" u="none">
-                <a:solidFill>
-                  <a:srgbClr val="0A2A66"/>
-                </a:solidFill>
-                <a:latin typeface="DM Sans"/>
-                <a:ea typeface="DM Sans"/>
-                <a:cs typeface="DM Sans"/>
-                <a:sym typeface="DM Sans"/>
-              </a:rPr>
-              <a:t>Save it for a fresh question later.</a:t>
-            </a:r>
-          </a:p>
-        </p:txBody>
-      </p:sp>
-      <p:sp>
-        <p:nvSpPr>
-          <p:cNvPr name="TextBox 15" id="15"/>
+          <p:cNvPr name="TextBox 16" id="16"/>
           <p:cNvSpPr txBox="true"/>
           <p:nvPr/>
         </p:nvSpPr>
@@ -18938,241 +19459,16 @@
                 <a:ea typeface="DM Sans"/>
                 <a:cs typeface="DM Sans"/>
                 <a:sym typeface="DM Sans"/>
-                <a:hlinkClick r:id="rId9" tooltip="https://dunlo.vercel.app/explore"/>
+                <a:hlinkClick r:id="rId10" tooltip="https://dunlo.vercel.app/explore"/>
               </a:rPr>
               <a:t>Explore the working feed · dunlo.vercel.app/explore</a:t>
             </a:r>
           </a:p>
         </p:txBody>
       </p:sp>
-      <p:grpSp>
-        <p:nvGrpSpPr>
-          <p:cNvPr name="Group 16" id="16"/>
-          <p:cNvGrpSpPr/>
-          <p:nvPr/>
-        </p:nvGrpSpPr>
-        <p:grpSpPr>
-          <a:xfrm rot="0">
-            <a:off x="8477250" y="1495425"/>
-            <a:ext cx="2343150" cy="4972050"/>
-            <a:chOff x="0" y="0"/>
-            <a:chExt cx="925689" cy="1964267"/>
-          </a:xfrm>
-        </p:grpSpPr>
-        <p:sp>
-          <p:nvSpPr>
-            <p:cNvPr name="Freeform 17" id="17"/>
-            <p:cNvSpPr/>
-            <p:nvPr/>
-          </p:nvSpPr>
-          <p:spPr>
-            <a:xfrm flipH="false" flipV="false" rot="0">
-              <a:off x="0" y="0"/>
-              <a:ext cx="925689" cy="1964267"/>
-            </a:xfrm>
-            <a:custGeom>
-              <a:avLst/>
-              <a:gdLst/>
-              <a:ahLst/>
-              <a:cxnLst/>
-              <a:rect r="r" b="b" t="t" l="l"/>
-              <a:pathLst>
-                <a:path h="1964267" w="925689">
-                  <a:moveTo>
-                    <a:pt x="125554" y="0"/>
-                  </a:moveTo>
-                  <a:lnTo>
-                    <a:pt x="800134" y="0"/>
-                  </a:lnTo>
-                  <a:cubicBezTo>
-                    <a:pt x="833434" y="0"/>
-                    <a:pt x="865369" y="13228"/>
-                    <a:pt x="888915" y="36774"/>
-                  </a:cubicBezTo>
-                  <a:cubicBezTo>
-                    <a:pt x="912461" y="60320"/>
-                    <a:pt x="925689" y="92255"/>
-                    <a:pt x="925689" y="125554"/>
-                  </a:cubicBezTo>
-                  <a:lnTo>
-                    <a:pt x="925689" y="1838712"/>
-                  </a:lnTo>
-                  <a:cubicBezTo>
-                    <a:pt x="925689" y="1908054"/>
-                    <a:pt x="869476" y="1964267"/>
-                    <a:pt x="800134" y="1964267"/>
-                  </a:cubicBezTo>
-                  <a:lnTo>
-                    <a:pt x="125554" y="1964267"/>
-                  </a:lnTo>
-                  <a:cubicBezTo>
-                    <a:pt x="92255" y="1964267"/>
-                    <a:pt x="60320" y="1951039"/>
-                    <a:pt x="36774" y="1927493"/>
-                  </a:cubicBezTo>
-                  <a:cubicBezTo>
-                    <a:pt x="13228" y="1903947"/>
-                    <a:pt x="0" y="1872011"/>
-                    <a:pt x="0" y="1838712"/>
-                  </a:cubicBezTo>
-                  <a:lnTo>
-                    <a:pt x="0" y="125554"/>
-                  </a:lnTo>
-                  <a:cubicBezTo>
-                    <a:pt x="0" y="92255"/>
-                    <a:pt x="13228" y="60320"/>
-                    <a:pt x="36774" y="36774"/>
-                  </a:cubicBezTo>
-                  <a:cubicBezTo>
-                    <a:pt x="60320" y="13228"/>
-                    <a:pt x="92255" y="0"/>
-                    <a:pt x="125554" y="0"/>
-                  </a:cubicBezTo>
-                  <a:close/>
-                </a:path>
-              </a:pathLst>
-            </a:custGeom>
-            <a:solidFill>
-              <a:srgbClr val="15171B"/>
-            </a:solidFill>
-          </p:spPr>
-        </p:sp>
-        <p:sp>
-          <p:nvSpPr>
-            <p:cNvPr name="TextBox 18" id="18"/>
-            <p:cNvSpPr txBox="true"/>
-            <p:nvPr/>
-          </p:nvSpPr>
-          <p:spPr>
-            <a:xfrm>
-              <a:off x="0" y="0"/>
-              <a:ext cx="925689" cy="1964267"/>
-            </a:xfrm>
-            <a:prstGeom prst="rect">
-              <a:avLst/>
-            </a:prstGeom>
-          </p:spPr>
-          <p:txBody>
-            <a:bodyPr anchor="ctr" rtlCol="false" tIns="50800" lIns="50800" bIns="50800" rIns="50800"/>
-            <a:lstStyle/>
-            <a:p>
-              <a:pPr algn="ctr">
-                <a:lnSpc>
-                  <a:spcPts val="1372"/>
-                </a:lnSpc>
-              </a:pPr>
-            </a:p>
-          </p:txBody>
-        </p:sp>
-      </p:grpSp>
-      <p:grpSp>
-        <p:nvGrpSpPr>
-          <p:cNvPr name="Group 19" id="19"/>
-          <p:cNvGrpSpPr/>
-          <p:nvPr/>
-        </p:nvGrpSpPr>
-        <p:grpSpPr>
-          <a:xfrm rot="0">
-            <a:off x="9401175" y="1685925"/>
-            <a:ext cx="495300" cy="47625"/>
-            <a:chOff x="0" y="0"/>
-            <a:chExt cx="195674" cy="18815"/>
-          </a:xfrm>
-        </p:grpSpPr>
-        <p:sp>
-          <p:nvSpPr>
-            <p:cNvPr name="Freeform 20" id="20"/>
-            <p:cNvSpPr/>
-            <p:nvPr/>
-          </p:nvSpPr>
-          <p:spPr>
-            <a:xfrm flipH="false" flipV="false" rot="0">
-              <a:off x="0" y="0"/>
-              <a:ext cx="195674" cy="18815"/>
-            </a:xfrm>
-            <a:custGeom>
-              <a:avLst/>
-              <a:gdLst/>
-              <a:ahLst/>
-              <a:cxnLst/>
-              <a:rect r="r" b="b" t="t" l="l"/>
-              <a:pathLst>
-                <a:path h="18815" w="195674">
-                  <a:moveTo>
-                    <a:pt x="9407" y="0"/>
-                  </a:moveTo>
-                  <a:lnTo>
-                    <a:pt x="186267" y="0"/>
-                  </a:lnTo>
-                  <a:cubicBezTo>
-                    <a:pt x="191462" y="0"/>
-                    <a:pt x="195674" y="4212"/>
-                    <a:pt x="195674" y="9407"/>
-                  </a:cubicBezTo>
-                  <a:lnTo>
-                    <a:pt x="195674" y="9407"/>
-                  </a:lnTo>
-                  <a:cubicBezTo>
-                    <a:pt x="195674" y="14603"/>
-                    <a:pt x="191462" y="18815"/>
-                    <a:pt x="186267" y="18815"/>
-                  </a:cubicBezTo>
-                  <a:lnTo>
-                    <a:pt x="9407" y="18815"/>
-                  </a:lnTo>
-                  <a:cubicBezTo>
-                    <a:pt x="4212" y="18815"/>
-                    <a:pt x="0" y="14603"/>
-                    <a:pt x="0" y="9407"/>
-                  </a:cubicBezTo>
-                  <a:lnTo>
-                    <a:pt x="0" y="9407"/>
-                  </a:lnTo>
-                  <a:cubicBezTo>
-                    <a:pt x="0" y="4212"/>
-                    <a:pt x="4212" y="0"/>
-                    <a:pt x="9407" y="0"/>
-                  </a:cubicBezTo>
-                  <a:close/>
-                </a:path>
-              </a:pathLst>
-            </a:custGeom>
-            <a:solidFill>
-              <a:srgbClr val="555555"/>
-            </a:solidFill>
-          </p:spPr>
-        </p:sp>
-        <p:sp>
-          <p:nvSpPr>
-            <p:cNvPr name="TextBox 21" id="21"/>
-            <p:cNvSpPr txBox="true"/>
-            <p:nvPr/>
-          </p:nvSpPr>
-          <p:spPr>
-            <a:xfrm>
-              <a:off x="0" y="0"/>
-              <a:ext cx="195674" cy="18815"/>
-            </a:xfrm>
-            <a:prstGeom prst="rect">
-              <a:avLst/>
-            </a:prstGeom>
-          </p:spPr>
-          <p:txBody>
-            <a:bodyPr anchor="ctr" rtlCol="false" tIns="50800" lIns="50800" bIns="50800" rIns="50800"/>
-            <a:lstStyle/>
-            <a:p>
-              <a:pPr algn="ctr">
-                <a:lnSpc>
-                  <a:spcPts val="1372"/>
-                </a:lnSpc>
-              </a:pPr>
-            </a:p>
-          </p:txBody>
-        </p:sp>
-      </p:grpSp>
-      <p:sp>
-        <p:nvSpPr>
-          <p:cNvPr name="TextBox 22" id="22"/>
+      <p:sp>
+        <p:nvSpPr>
+          <p:cNvPr name="TextBox 17" id="17"/>
           <p:cNvSpPr txBox="true"/>
           <p:nvPr/>
         </p:nvSpPr>
@@ -19216,14 +19512,14 @@
       </p:sp>
       <p:sp>
         <p:nvSpPr>
-          <p:cNvPr name="Freeform 23" id="23" descr="Actual Dunlo mobile Explore screen, fully visible inside a phone mockup."/>
+          <p:cNvPr name="Freeform 18" id="18"/>
           <p:cNvSpPr/>
           <p:nvPr/>
         </p:nvSpPr>
         <p:spPr>
           <a:xfrm flipH="false" flipV="false" rot="0">
-            <a:off x="8648700" y="1885950"/>
-            <a:ext cx="2000250" cy="4336675"/>
+            <a:off x="9429750" y="323850"/>
+            <a:ext cx="2152650" cy="133350"/>
           </a:xfrm>
           <a:custGeom>
             <a:avLst/>
@@ -19232,18 +19528,18 @@
             <a:cxnLst/>
             <a:rect r="r" b="b" t="t" l="l"/>
             <a:pathLst>
-              <a:path h="4336675" w="2000250">
+              <a:path h="133350" w="2152650">
                 <a:moveTo>
                   <a:pt x="0" y="0"/>
                 </a:moveTo>
                 <a:lnTo>
-                  <a:pt x="2000250" y="0"/>
+                  <a:pt x="2152650" y="0"/>
                 </a:lnTo>
                 <a:lnTo>
-                  <a:pt x="2000250" y="4336675"/>
+                  <a:pt x="2152650" y="133350"/>
                 </a:lnTo>
                 <a:lnTo>
-                  <a:pt x="0" y="4336675"/>
+                  <a:pt x="0" y="133350"/>
                 </a:lnTo>
                 <a:lnTo>
                   <a:pt x="0" y="0"/>
@@ -19253,118 +19549,19 @@
             </a:pathLst>
           </a:custGeom>
           <a:blipFill>
-            <a:blip r:embed="rId10"/>
+            <a:blip r:embed="rId11">
+              <a:extLst>
+                <a:ext uri="{96DAC541-7B7A-43D3-8B79-37D633B846F1}">
+                  <asvg:svgBlip xmlns:asvg="http://schemas.microsoft.com/office/drawing/2016/SVG/main" r:embed="rId12"/>
+                </a:ext>
+              </a:extLst>
+            </a:blip>
             <a:stretch>
-              <a:fillRect l="-1" t="0" r="-1" b="0"/>
+              <a:fillRect l="0" t="-1363" r="0" b="-1363"/>
             </a:stretch>
           </a:blipFill>
         </p:spPr>
       </p:sp>
-      <p:grpSp>
-        <p:nvGrpSpPr>
-          <p:cNvPr name="Group 24" id="24"/>
-          <p:cNvGrpSpPr/>
-          <p:nvPr/>
-        </p:nvGrpSpPr>
-        <p:grpSpPr>
-          <a:xfrm rot="0">
-            <a:off x="9401175" y="6334125"/>
-            <a:ext cx="495300" cy="47625"/>
-            <a:chOff x="0" y="0"/>
-            <a:chExt cx="195674" cy="18815"/>
-          </a:xfrm>
-        </p:grpSpPr>
-        <p:sp>
-          <p:nvSpPr>
-            <p:cNvPr name="Freeform 25" id="25"/>
-            <p:cNvSpPr/>
-            <p:nvPr/>
-          </p:nvSpPr>
-          <p:spPr>
-            <a:xfrm flipH="false" flipV="false" rot="0">
-              <a:off x="0" y="0"/>
-              <a:ext cx="195674" cy="18815"/>
-            </a:xfrm>
-            <a:custGeom>
-              <a:avLst/>
-              <a:gdLst/>
-              <a:ahLst/>
-              <a:cxnLst/>
-              <a:rect r="r" b="b" t="t" l="l"/>
-              <a:pathLst>
-                <a:path h="18815" w="195674">
-                  <a:moveTo>
-                    <a:pt x="9407" y="0"/>
-                  </a:moveTo>
-                  <a:lnTo>
-                    <a:pt x="186267" y="0"/>
-                  </a:lnTo>
-                  <a:cubicBezTo>
-                    <a:pt x="191462" y="0"/>
-                    <a:pt x="195674" y="4212"/>
-                    <a:pt x="195674" y="9407"/>
-                  </a:cubicBezTo>
-                  <a:lnTo>
-                    <a:pt x="195674" y="9407"/>
-                  </a:lnTo>
-                  <a:cubicBezTo>
-                    <a:pt x="195674" y="14603"/>
-                    <a:pt x="191462" y="18815"/>
-                    <a:pt x="186267" y="18815"/>
-                  </a:cubicBezTo>
-                  <a:lnTo>
-                    <a:pt x="9407" y="18815"/>
-                  </a:lnTo>
-                  <a:cubicBezTo>
-                    <a:pt x="4212" y="18815"/>
-                    <a:pt x="0" y="14603"/>
-                    <a:pt x="0" y="9407"/>
-                  </a:cubicBezTo>
-                  <a:lnTo>
-                    <a:pt x="0" y="9407"/>
-                  </a:lnTo>
-                  <a:cubicBezTo>
-                    <a:pt x="0" y="4212"/>
-                    <a:pt x="4212" y="0"/>
-                    <a:pt x="9407" y="0"/>
-                  </a:cubicBezTo>
-                  <a:close/>
-                </a:path>
-              </a:pathLst>
-            </a:custGeom>
-            <a:solidFill>
-              <a:srgbClr val="555555"/>
-            </a:solidFill>
-          </p:spPr>
-        </p:sp>
-        <p:sp>
-          <p:nvSpPr>
-            <p:cNvPr name="TextBox 26" id="26"/>
-            <p:cNvSpPr txBox="true"/>
-            <p:nvPr/>
-          </p:nvSpPr>
-          <p:spPr>
-            <a:xfrm>
-              <a:off x="0" y="0"/>
-              <a:ext cx="195674" cy="18815"/>
-            </a:xfrm>
-            <a:prstGeom prst="rect">
-              <a:avLst/>
-            </a:prstGeom>
-          </p:spPr>
-          <p:txBody>
-            <a:bodyPr anchor="ctr" rtlCol="false" tIns="50800" lIns="50800" bIns="50800" rIns="50800"/>
-            <a:lstStyle/>
-            <a:p>
-              <a:pPr algn="ctr">
-                <a:lnSpc>
-                  <a:spcPts val="1372"/>
-                </a:lnSpc>
-              </a:pPr>
-            </a:p>
-          </p:txBody>
-        </p:sp>
-      </p:grpSp>
     </p:spTree>
   </p:cSld>
   <p:clrMapOvr>
@@ -20585,6 +20782,58 @@
           </a:blipFill>
         </p:spPr>
       </p:sp>
+      <p:sp>
+        <p:nvSpPr>
+          <p:cNvPr name="Freeform 33" id="33"/>
+          <p:cNvSpPr/>
+          <p:nvPr/>
+        </p:nvSpPr>
+        <p:spPr>
+          <a:xfrm flipH="false" flipV="false" rot="0">
+            <a:off x="9429750" y="323850"/>
+            <a:ext cx="2152650" cy="133350"/>
+          </a:xfrm>
+          <a:custGeom>
+            <a:avLst/>
+            <a:gdLst/>
+            <a:ahLst/>
+            <a:cxnLst/>
+            <a:rect r="r" b="b" t="t" l="l"/>
+            <a:pathLst>
+              <a:path h="133350" w="2152650">
+                <a:moveTo>
+                  <a:pt x="0" y="0"/>
+                </a:moveTo>
+                <a:lnTo>
+                  <a:pt x="2152650" y="0"/>
+                </a:lnTo>
+                <a:lnTo>
+                  <a:pt x="2152650" y="133350"/>
+                </a:lnTo>
+                <a:lnTo>
+                  <a:pt x="0" y="133350"/>
+                </a:lnTo>
+                <a:lnTo>
+                  <a:pt x="0" y="0"/>
+                </a:lnTo>
+                <a:close/>
+              </a:path>
+            </a:pathLst>
+          </a:custGeom>
+          <a:blipFill>
+            <a:blip r:embed="rId11">
+              <a:extLst>
+                <a:ext uri="{96DAC541-7B7A-43D3-8B79-37D633B846F1}">
+                  <asvg:svgBlip xmlns:asvg="http://schemas.microsoft.com/office/drawing/2016/SVG/main" r:embed="rId12"/>
+                </a:ext>
+              </a:extLst>
+            </a:blip>
+            <a:stretch>
+              <a:fillRect l="0" t="-1363" r="0" b="-1363"/>
+            </a:stretch>
+          </a:blipFill>
+        </p:spPr>
+      </p:sp>
     </p:spTree>
   </p:cSld>
   <p:clrMapOvr>
@@ -21252,6 +21501,58 @@
             <a:blip r:embed="rId10"/>
             <a:stretch>
               <a:fillRect l="0" t="-29" r="0" b="-29"/>
+            </a:stretch>
+          </a:blipFill>
+        </p:spPr>
+      </p:sp>
+      <p:sp>
+        <p:nvSpPr>
+          <p:cNvPr name="Freeform 17" id="17"/>
+          <p:cNvSpPr/>
+          <p:nvPr/>
+        </p:nvSpPr>
+        <p:spPr>
+          <a:xfrm flipH="false" flipV="false" rot="0">
+            <a:off x="9429750" y="323850"/>
+            <a:ext cx="2152650" cy="133350"/>
+          </a:xfrm>
+          <a:custGeom>
+            <a:avLst/>
+            <a:gdLst/>
+            <a:ahLst/>
+            <a:cxnLst/>
+            <a:rect r="r" b="b" t="t" l="l"/>
+            <a:pathLst>
+              <a:path h="133350" w="2152650">
+                <a:moveTo>
+                  <a:pt x="0" y="0"/>
+                </a:moveTo>
+                <a:lnTo>
+                  <a:pt x="2152650" y="0"/>
+                </a:lnTo>
+                <a:lnTo>
+                  <a:pt x="2152650" y="133350"/>
+                </a:lnTo>
+                <a:lnTo>
+                  <a:pt x="0" y="133350"/>
+                </a:lnTo>
+                <a:lnTo>
+                  <a:pt x="0" y="0"/>
+                </a:lnTo>
+                <a:close/>
+              </a:path>
+            </a:pathLst>
+          </a:custGeom>
+          <a:blipFill>
+            <a:blip r:embed="rId11">
+              <a:extLst>
+                <a:ext uri="{96DAC541-7B7A-43D3-8B79-37D633B846F1}">
+                  <asvg:svgBlip xmlns:asvg="http://schemas.microsoft.com/office/drawing/2016/SVG/main" r:embed="rId12"/>
+                </a:ext>
+              </a:extLst>
+            </a:blip>
+            <a:stretch>
+              <a:fillRect l="0" t="-1363" r="0" b="-1363"/>
             </a:stretch>
           </a:blipFill>
         </p:spPr>
@@ -22625,6 +22926,58 @@
           </a:blipFill>
         </p:spPr>
       </p:sp>
+      <p:sp>
+        <p:nvSpPr>
+          <p:cNvPr name="Freeform 37" id="37"/>
+          <p:cNvSpPr/>
+          <p:nvPr/>
+        </p:nvSpPr>
+        <p:spPr>
+          <a:xfrm flipH="false" flipV="false" rot="0">
+            <a:off x="9429750" y="323850"/>
+            <a:ext cx="2152650" cy="133350"/>
+          </a:xfrm>
+          <a:custGeom>
+            <a:avLst/>
+            <a:gdLst/>
+            <a:ahLst/>
+            <a:cxnLst/>
+            <a:rect r="r" b="b" t="t" l="l"/>
+            <a:pathLst>
+              <a:path h="133350" w="2152650">
+                <a:moveTo>
+                  <a:pt x="0" y="0"/>
+                </a:moveTo>
+                <a:lnTo>
+                  <a:pt x="2152650" y="0"/>
+                </a:lnTo>
+                <a:lnTo>
+                  <a:pt x="2152650" y="133350"/>
+                </a:lnTo>
+                <a:lnTo>
+                  <a:pt x="0" y="133350"/>
+                </a:lnTo>
+                <a:lnTo>
+                  <a:pt x="0" y="0"/>
+                </a:lnTo>
+                <a:close/>
+              </a:path>
+            </a:pathLst>
+          </a:custGeom>
+          <a:blipFill>
+            <a:blip r:embed="rId10">
+              <a:extLst>
+                <a:ext uri="{96DAC541-7B7A-43D3-8B79-37D633B846F1}">
+                  <asvg:svgBlip xmlns:asvg="http://schemas.microsoft.com/office/drawing/2016/SVG/main" r:embed="rId11"/>
+                </a:ext>
+              </a:extLst>
+            </a:blip>
+            <a:stretch>
+              <a:fillRect l="0" t="-1363" r="0" b="-1363"/>
+            </a:stretch>
+          </a:blipFill>
+        </p:spPr>
+      </p:sp>
     </p:spTree>
   </p:cSld>
   <p:clrMapOvr>
@@ -23434,6 +23787,58 @@
             </a:blip>
             <a:stretch>
               <a:fillRect l="0" t="0" r="0" b="0"/>
+            </a:stretch>
+          </a:blipFill>
+        </p:spPr>
+      </p:sp>
+      <p:sp>
+        <p:nvSpPr>
+          <p:cNvPr name="Freeform 22" id="22"/>
+          <p:cNvSpPr/>
+          <p:nvPr/>
+        </p:nvSpPr>
+        <p:spPr>
+          <a:xfrm flipH="false" flipV="false" rot="0">
+            <a:off x="9429750" y="323850"/>
+            <a:ext cx="2152650" cy="133350"/>
+          </a:xfrm>
+          <a:custGeom>
+            <a:avLst/>
+            <a:gdLst/>
+            <a:ahLst/>
+            <a:cxnLst/>
+            <a:rect r="r" b="b" t="t" l="l"/>
+            <a:pathLst>
+              <a:path h="133350" w="2152650">
+                <a:moveTo>
+                  <a:pt x="0" y="0"/>
+                </a:moveTo>
+                <a:lnTo>
+                  <a:pt x="2152650" y="0"/>
+                </a:lnTo>
+                <a:lnTo>
+                  <a:pt x="2152650" y="133350"/>
+                </a:lnTo>
+                <a:lnTo>
+                  <a:pt x="0" y="133350"/>
+                </a:lnTo>
+                <a:lnTo>
+                  <a:pt x="0" y="0"/>
+                </a:lnTo>
+                <a:close/>
+              </a:path>
+            </a:pathLst>
+          </a:custGeom>
+          <a:blipFill>
+            <a:blip r:embed="rId14">
+              <a:extLst>
+                <a:ext uri="{96DAC541-7B7A-43D3-8B79-37D633B846F1}">
+                  <asvg:svgBlip xmlns:asvg="http://schemas.microsoft.com/office/drawing/2016/SVG/main" r:embed="rId15"/>
+                </a:ext>
+              </a:extLst>
+            </a:blip>
+            <a:stretch>
+              <a:fillRect l="0" t="-1363" r="0" b="-1363"/>
             </a:stretch>
           </a:blipFill>
         </p:spPr>
@@ -24894,6 +25299,58 @@
             <a:blip r:embed="rId10"/>
             <a:stretch>
               <a:fillRect l="0" t="-1" r="0" b="-1"/>
+            </a:stretch>
+          </a:blipFill>
+        </p:spPr>
+      </p:sp>
+      <p:sp>
+        <p:nvSpPr>
+          <p:cNvPr name="Freeform 37" id="37"/>
+          <p:cNvSpPr/>
+          <p:nvPr/>
+        </p:nvSpPr>
+        <p:spPr>
+          <a:xfrm flipH="false" flipV="false" rot="0">
+            <a:off x="9429750" y="323850"/>
+            <a:ext cx="2152650" cy="133350"/>
+          </a:xfrm>
+          <a:custGeom>
+            <a:avLst/>
+            <a:gdLst/>
+            <a:ahLst/>
+            <a:cxnLst/>
+            <a:rect r="r" b="b" t="t" l="l"/>
+            <a:pathLst>
+              <a:path h="133350" w="2152650">
+                <a:moveTo>
+                  <a:pt x="0" y="0"/>
+                </a:moveTo>
+                <a:lnTo>
+                  <a:pt x="2152650" y="0"/>
+                </a:lnTo>
+                <a:lnTo>
+                  <a:pt x="2152650" y="133350"/>
+                </a:lnTo>
+                <a:lnTo>
+                  <a:pt x="0" y="133350"/>
+                </a:lnTo>
+                <a:lnTo>
+                  <a:pt x="0" y="0"/>
+                </a:lnTo>
+                <a:close/>
+              </a:path>
+            </a:pathLst>
+          </a:custGeom>
+          <a:blipFill>
+            <a:blip r:embed="rId11">
+              <a:extLst>
+                <a:ext uri="{96DAC541-7B7A-43D3-8B79-37D633B846F1}">
+                  <asvg:svgBlip xmlns:asvg="http://schemas.microsoft.com/office/drawing/2016/SVG/main" r:embed="rId12"/>
+                </a:ext>
+              </a:extLst>
+            </a:blip>
+            <a:stretch>
+              <a:fillRect l="0" t="-1363" r="0" b="-1363"/>
             </a:stretch>
           </a:blipFill>
         </p:spPr>
